--- a/reports/FraudLens_AI_Presentation.pptx
+++ b/reports/FraudLens_AI_Presentation.pptx
@@ -4265,6 +4265,18 @@
               <a:t>Presenter: Manish Patil | Course: Machine Learning (PBL 100 Marks)</a:t>
             </a:r>
           </a:p>
+          <a:p>
+            <a:pPr>
+              <a:defRPr sz="1200" b="1">
+                <a:solidFill>
+                  <a:srgbClr val="38BDF8"/>
+                </a:solidFill>
+              </a:defRPr>
+            </a:pPr>
+            <a:r>
+              <a:t>🌐 Live Web App: https://fraudlensai1.streamlit.app/ | 💻 GitHub: https://github.com/Manish-Patil33/FraudLens-Al-</a:t>
+            </a:r>
+          </a:p>
         </p:txBody>
       </p:sp>
     </p:spTree>
@@ -4431,6 +4443,21 @@
             </a:pPr>
             <a:r>
               <a:t>✔ Measurable Financial Value: $1.56M saved on test stream with 100% fraud recall and 0% false positives.</a:t>
+            </a:r>
+          </a:p>
+          <a:p>
+            <a:pPr>
+              <a:spcAft>
+                <a:spcPts val="800"/>
+              </a:spcAft>
+              <a:defRPr sz="1400">
+                <a:solidFill>
+                  <a:srgbClr val="E2E8F0"/>
+                </a:solidFill>
+              </a:defRPr>
+            </a:pPr>
+            <a:r>
+              <a:t>✔ Live Production Deployment: https://fraudlensai1.streamlit.app/</a:t>
             </a:r>
           </a:p>
           <a:p>
@@ -5770,7 +5797,7 @@
               </a:defRPr>
             </a:pPr>
             <a:r>
-              <a:t>• Production Web Dashboard: Built with Streamlit (app.py) for real-time risk intelligence operations.</a:t>
+              <a:t>• Production Web Dashboard: Live deployed on Streamlit Cloud at https://fraudlensai1.streamlit.app/ for real-time risk intelligence operations.</a:t>
             </a:r>
           </a:p>
           <a:p>
@@ -5831,6 +5858,21 @@
             </a:pPr>
             <a:r>
               <a:t>• Model Evaluation Lab: Interactive algorithm comparison leaderboard, ROC curves, and Precision-Recall plots.</a:t>
+            </a:r>
+          </a:p>
+          <a:p>
+            <a:pPr>
+              <a:spcAft>
+                <a:spcPts val="1400"/>
+              </a:spcAft>
+              <a:defRPr sz="1400">
+                <a:solidFill>
+                  <a:srgbClr val="1E293B"/>
+                </a:solidFill>
+              </a:defRPr>
+            </a:pPr>
+            <a:r>
+              <a:t>• Public Source Code: Open-source GitHub repository available at https://github.com/Manish-Patil33/FraudLens-Al-</a:t>
             </a:r>
           </a:p>
         </p:txBody>

--- a/reports/FraudLens_AI_Presentation.pptx
+++ b/reports/FraudLens_AI_Presentation.pptx
@@ -15,6 +15,9 @@
     <p:sldId id="263" r:id="rId15"/>
     <p:sldId id="264" r:id="rId16"/>
     <p:sldId id="265" r:id="rId17"/>
+    <p:sldId id="266" r:id="rId18"/>
+    <p:sldId id="267" r:id="rId19"/>
+    <p:sldId id="268" r:id="rId20"/>
   </p:sldIdLst>
   <p:sldSz cx="12191695" cy="6858000" type="screen4x3"/>
   <p:notesSz cx="6858000" cy="9144000"/>
@@ -511,637 +514,7 @@
           <a:lstStyle/>
           <a:p>
             <a:r>
-              <a:t>Good morning respected evaluators. Today I am presenting FraudLens AI, an enterprise-grade machine learning system designed to detect fraudulent financial transactions using dual supervised and unsupervised learning models.</a:t>
-            </a:r>
-          </a:p>
-        </p:txBody>
-      </p:sp>
-      <p:sp>
-        <p:nvSpPr>
-          <p:cNvPr id="4" name="Slide Number Placeholder 3"/>
-          <p:cNvSpPr>
-            <a:spLocks noGrp="1"/>
-          </p:cNvSpPr>
-          <p:nvPr>
-            <p:ph type="sldNum" idx="5" sz="quarter"/>
-          </p:nvPr>
-        </p:nvSpPr>
-        <p:spPr/>
-      </p:sp>
-    </p:spTree>
-  </p:cSld>
-  <p:clrMapOvr>
-    <a:masterClrMapping/>
-  </p:clrMapOvr>
-</p:notes>
-</file>
-
-<file path=ppt/notesSlides/notesSlide10.xml><?xml version="1.0" encoding="utf-8"?>
-<p:notes xmlns:a="http://schemas.openxmlformats.org/drawingml/2006/main" xmlns:p="http://schemas.openxmlformats.org/presentationml/2006/main" xmlns:r="http://schemas.openxmlformats.org/officeDocument/2006/relationships">
-  <p:cSld>
-    <p:spTree>
-      <p:nvGrpSpPr>
-        <p:cNvPr id="1" name=""/>
-        <p:cNvGrpSpPr/>
-        <p:nvPr/>
-      </p:nvGrpSpPr>
-      <p:grpSpPr>
-        <a:xfrm>
-          <a:off x="0" y="0"/>
-          <a:ext cx="0" cy="0"/>
-          <a:chOff x="0" y="0"/>
-          <a:chExt cx="0" cy="0"/>
-        </a:xfrm>
-      </p:grpSpPr>
-      <p:sp>
-        <p:nvSpPr>
-          <p:cNvPr id="2" name="Slide Image Placeholder 1"/>
-          <p:cNvSpPr>
-            <a:spLocks noGrp="1"/>
-          </p:cNvSpPr>
-          <p:nvPr>
-            <p:ph type="sldImg" idx="2"/>
-          </p:nvPr>
-        </p:nvSpPr>
-        <p:spPr/>
-      </p:sp>
-      <p:sp>
-        <p:nvSpPr>
-          <p:cNvPr id="3" name="Notes Placeholder 2"/>
-          <p:cNvSpPr>
-            <a:spLocks noGrp="1"/>
-          </p:cNvSpPr>
-          <p:nvPr>
-            <p:ph type="body" idx="3" sz="quarter"/>
-          </p:nvPr>
-        </p:nvSpPr>
-        <p:spPr/>
-        <p:txBody>
-          <a:bodyPr/>
-          <a:lstStyle/>
-          <a:p>
-            <a:r>
-              <a:t>In conclusion, FraudLens AI demonstrates how combining advanced feature engineering, tree ensembles, and unsupervised anomaly detection can safeguard financial networks with zero customer friction. Thank you! I am now ready for your questions.</a:t>
-            </a:r>
-          </a:p>
-        </p:txBody>
-      </p:sp>
-      <p:sp>
-        <p:nvSpPr>
-          <p:cNvPr id="4" name="Slide Number Placeholder 3"/>
-          <p:cNvSpPr>
-            <a:spLocks noGrp="1"/>
-          </p:cNvSpPr>
-          <p:nvPr>
-            <p:ph type="sldNum" idx="5" sz="quarter"/>
-          </p:nvPr>
-        </p:nvSpPr>
-        <p:spPr/>
-      </p:sp>
-    </p:spTree>
-  </p:cSld>
-  <p:clrMapOvr>
-    <a:masterClrMapping/>
-  </p:clrMapOvr>
-</p:notes>
-</file>
-
-<file path=ppt/notesSlides/notesSlide2.xml><?xml version="1.0" encoding="utf-8"?>
-<p:notes xmlns:a="http://schemas.openxmlformats.org/drawingml/2006/main" xmlns:p="http://schemas.openxmlformats.org/presentationml/2006/main" xmlns:r="http://schemas.openxmlformats.org/officeDocument/2006/relationships">
-  <p:cSld>
-    <p:spTree>
-      <p:nvGrpSpPr>
-        <p:cNvPr id="1" name=""/>
-        <p:cNvGrpSpPr/>
-        <p:nvPr/>
-      </p:nvGrpSpPr>
-      <p:grpSpPr>
-        <a:xfrm>
-          <a:off x="0" y="0"/>
-          <a:ext cx="0" cy="0"/>
-          <a:chOff x="0" y="0"/>
-          <a:chExt cx="0" cy="0"/>
-        </a:xfrm>
-      </p:grpSpPr>
-      <p:sp>
-        <p:nvSpPr>
-          <p:cNvPr id="2" name="Slide Image Placeholder 1"/>
-          <p:cNvSpPr>
-            <a:spLocks noGrp="1"/>
-          </p:cNvSpPr>
-          <p:nvPr>
-            <p:ph type="sldImg" idx="2"/>
-          </p:nvPr>
-        </p:nvSpPr>
-        <p:spPr/>
-      </p:sp>
-      <p:sp>
-        <p:nvSpPr>
-          <p:cNvPr id="3" name="Notes Placeholder 2"/>
-          <p:cNvSpPr>
-            <a:spLocks noGrp="1"/>
-          </p:cNvSpPr>
-          <p:nvPr>
-            <p:ph type="body" idx="3" sz="quarter"/>
-          </p:nvPr>
-        </p:nvSpPr>
-        <p:spPr/>
-        <p:txBody>
-          <a:bodyPr/>
-          <a:lstStyle/>
-          <a:p>
-            <a:r>
-              <a:t>In rare fraud detection, accuracy is a meaningless vanity metric. We must prioritize PR-AUC and measure exact dollar savings while keeping false positives below 0.05% to protect customer conversion.</a:t>
-            </a:r>
-          </a:p>
-        </p:txBody>
-      </p:sp>
-      <p:sp>
-        <p:nvSpPr>
-          <p:cNvPr id="4" name="Slide Number Placeholder 3"/>
-          <p:cNvSpPr>
-            <a:spLocks noGrp="1"/>
-          </p:cNvSpPr>
-          <p:nvPr>
-            <p:ph type="sldNum" idx="5" sz="quarter"/>
-          </p:nvPr>
-        </p:nvSpPr>
-        <p:spPr/>
-      </p:sp>
-    </p:spTree>
-  </p:cSld>
-  <p:clrMapOvr>
-    <a:masterClrMapping/>
-  </p:clrMapOvr>
-</p:notes>
-</file>
-
-<file path=ppt/notesSlides/notesSlide3.xml><?xml version="1.0" encoding="utf-8"?>
-<p:notes xmlns:a="http://schemas.openxmlformats.org/drawingml/2006/main" xmlns:p="http://schemas.openxmlformats.org/presentationml/2006/main" xmlns:r="http://schemas.openxmlformats.org/officeDocument/2006/relationships">
-  <p:cSld>
-    <p:spTree>
-      <p:nvGrpSpPr>
-        <p:cNvPr id="1" name=""/>
-        <p:cNvGrpSpPr/>
-        <p:nvPr/>
-      </p:nvGrpSpPr>
-      <p:grpSpPr>
-        <a:xfrm>
-          <a:off x="0" y="0"/>
-          <a:ext cx="0" cy="0"/>
-          <a:chOff x="0" y="0"/>
-          <a:chExt cx="0" cy="0"/>
-        </a:xfrm>
-      </p:grpSpPr>
-      <p:sp>
-        <p:nvSpPr>
-          <p:cNvPr id="2" name="Slide Image Placeholder 1"/>
-          <p:cNvSpPr>
-            <a:spLocks noGrp="1"/>
-          </p:cNvSpPr>
-          <p:nvPr>
-            <p:ph type="sldImg" idx="2"/>
-          </p:nvPr>
-        </p:nvSpPr>
-        <p:spPr/>
-      </p:sp>
-      <p:sp>
-        <p:nvSpPr>
-          <p:cNvPr id="3" name="Notes Placeholder 2"/>
-          <p:cNvSpPr>
-            <a:spLocks noGrp="1"/>
-          </p:cNvSpPr>
-          <p:nvPr>
-            <p:ph type="body" idx="3" sz="quarter"/>
-          </p:nvPr>
-        </p:nvSpPr>
-        <p:spPr/>
-        <p:txBody>
-          <a:bodyPr/>
-          <a:lstStyle/>
-          <a:p>
-            <a:r>
-              <a:t>Our exploratory analysis showed that fraud is not uniform: it is concentrated in transfers and cash-outs, peaks at night, and leaves an unambiguous account-draining footprint.</a:t>
-            </a:r>
-          </a:p>
-        </p:txBody>
-      </p:sp>
-      <p:sp>
-        <p:nvSpPr>
-          <p:cNvPr id="4" name="Slide Number Placeholder 3"/>
-          <p:cNvSpPr>
-            <a:spLocks noGrp="1"/>
-          </p:cNvSpPr>
-          <p:nvPr>
-            <p:ph type="sldNum" idx="5" sz="quarter"/>
-          </p:nvPr>
-        </p:nvSpPr>
-        <p:spPr/>
-      </p:sp>
-    </p:spTree>
-  </p:cSld>
-  <p:clrMapOvr>
-    <a:masterClrMapping/>
-  </p:clrMapOvr>
-</p:notes>
-</file>
-
-<file path=ppt/notesSlides/notesSlide4.xml><?xml version="1.0" encoding="utf-8"?>
-<p:notes xmlns:a="http://schemas.openxmlformats.org/drawingml/2006/main" xmlns:p="http://schemas.openxmlformats.org/presentationml/2006/main" xmlns:r="http://schemas.openxmlformats.org/officeDocument/2006/relationships">
-  <p:cSld>
-    <p:spTree>
-      <p:nvGrpSpPr>
-        <p:cNvPr id="1" name=""/>
-        <p:cNvGrpSpPr/>
-        <p:nvPr/>
-      </p:nvGrpSpPr>
-      <p:grpSpPr>
-        <a:xfrm>
-          <a:off x="0" y="0"/>
-          <a:ext cx="0" cy="0"/>
-          <a:chOff x="0" y="0"/>
-          <a:chExt cx="0" cy="0"/>
-        </a:xfrm>
-      </p:grpSpPr>
-      <p:sp>
-        <p:nvSpPr>
-          <p:cNvPr id="2" name="Slide Image Placeholder 1"/>
-          <p:cNvSpPr>
-            <a:spLocks noGrp="1"/>
-          </p:cNvSpPr>
-          <p:nvPr>
-            <p:ph type="sldImg" idx="2"/>
-          </p:nvPr>
-        </p:nvSpPr>
-        <p:spPr/>
-      </p:sp>
-      <p:sp>
-        <p:nvSpPr>
-          <p:cNvPr id="3" name="Notes Placeholder 2"/>
-          <p:cNvSpPr>
-            <a:spLocks noGrp="1"/>
-          </p:cNvSpPr>
-          <p:nvPr>
-            <p:ph type="body" idx="3" sz="quarter"/>
-          </p:nvPr>
-        </p:nvSpPr>
-        <p:spPr/>
-        <p:txBody>
-          <a:bodyPr/>
-          <a:lstStyle/>
-          <a:p>
-            <a:r>
-              <a:t>A critical evaluation rubric is preventing data leakage. We split the data before applying RobustScaler, ensuring our test evaluation strictly mirrors production conditions.</a:t>
-            </a:r>
-          </a:p>
-        </p:txBody>
-      </p:sp>
-      <p:sp>
-        <p:nvSpPr>
-          <p:cNvPr id="4" name="Slide Number Placeholder 3"/>
-          <p:cNvSpPr>
-            <a:spLocks noGrp="1"/>
-          </p:cNvSpPr>
-          <p:nvPr>
-            <p:ph type="sldNum" idx="5" sz="quarter"/>
-          </p:nvPr>
-        </p:nvSpPr>
-        <p:spPr/>
-      </p:sp>
-    </p:spTree>
-  </p:cSld>
-  <p:clrMapOvr>
-    <a:masterClrMapping/>
-  </p:clrMapOvr>
-</p:notes>
-</file>
-
-<file path=ppt/notesSlides/notesSlide5.xml><?xml version="1.0" encoding="utf-8"?>
-<p:notes xmlns:a="http://schemas.openxmlformats.org/drawingml/2006/main" xmlns:p="http://schemas.openxmlformats.org/presentationml/2006/main" xmlns:r="http://schemas.openxmlformats.org/officeDocument/2006/relationships">
-  <p:cSld>
-    <p:spTree>
-      <p:nvGrpSpPr>
-        <p:cNvPr id="1" name=""/>
-        <p:cNvGrpSpPr/>
-        <p:nvPr/>
-      </p:nvGrpSpPr>
-      <p:grpSpPr>
-        <a:xfrm>
-          <a:off x="0" y="0"/>
-          <a:ext cx="0" cy="0"/>
-          <a:chOff x="0" y="0"/>
-          <a:chExt cx="0" cy="0"/>
-        </a:xfrm>
-      </p:grpSpPr>
-      <p:sp>
-        <p:nvSpPr>
-          <p:cNvPr id="2" name="Slide Image Placeholder 1"/>
-          <p:cNvSpPr>
-            <a:spLocks noGrp="1"/>
-          </p:cNvSpPr>
-          <p:nvPr>
-            <p:ph type="sldImg" idx="2"/>
-          </p:nvPr>
-        </p:nvSpPr>
-        <p:spPr/>
-      </p:sp>
-      <p:sp>
-        <p:nvSpPr>
-          <p:cNvPr id="3" name="Notes Placeholder 2"/>
-          <p:cNvSpPr>
-            <a:spLocks noGrp="1"/>
-          </p:cNvSpPr>
-          <p:nvPr>
-            <p:ph type="body" idx="3" sz="quarter"/>
-          </p:nvPr>
-        </p:nvSpPr>
-        <p:spPr/>
-        <p:txBody>
-          <a:bodyPr/>
-          <a:lstStyle/>
-          <a:p>
-            <a:r>
-              <a:t>Engineered features like balance error and liquidation flags are far more discriminative than raw amounts. This feature importance chart confirms balance discrepancies dominate the classification decisions.</a:t>
-            </a:r>
-          </a:p>
-        </p:txBody>
-      </p:sp>
-      <p:sp>
-        <p:nvSpPr>
-          <p:cNvPr id="4" name="Slide Number Placeholder 3"/>
-          <p:cNvSpPr>
-            <a:spLocks noGrp="1"/>
-          </p:cNvSpPr>
-          <p:nvPr>
-            <p:ph type="sldNum" idx="5" sz="quarter"/>
-          </p:nvPr>
-        </p:nvSpPr>
-        <p:spPr/>
-      </p:sp>
-    </p:spTree>
-  </p:cSld>
-  <p:clrMapOvr>
-    <a:masterClrMapping/>
-  </p:clrMapOvr>
-</p:notes>
-</file>
-
-<file path=ppt/notesSlides/notesSlide6.xml><?xml version="1.0" encoding="utf-8"?>
-<p:notes xmlns:a="http://schemas.openxmlformats.org/drawingml/2006/main" xmlns:p="http://schemas.openxmlformats.org/presentationml/2006/main" xmlns:r="http://schemas.openxmlformats.org/officeDocument/2006/relationships">
-  <p:cSld>
-    <p:spTree>
-      <p:nvGrpSpPr>
-        <p:cNvPr id="1" name=""/>
-        <p:cNvGrpSpPr/>
-        <p:nvPr/>
-      </p:nvGrpSpPr>
-      <p:grpSpPr>
-        <a:xfrm>
-          <a:off x="0" y="0"/>
-          <a:ext cx="0" cy="0"/>
-          <a:chOff x="0" y="0"/>
-          <a:chExt cx="0" cy="0"/>
-        </a:xfrm>
-      </p:grpSpPr>
-      <p:sp>
-        <p:nvSpPr>
-          <p:cNvPr id="2" name="Slide Image Placeholder 1"/>
-          <p:cNvSpPr>
-            <a:spLocks noGrp="1"/>
-          </p:cNvSpPr>
-          <p:nvPr>
-            <p:ph type="sldImg" idx="2"/>
-          </p:nvPr>
-        </p:nvSpPr>
-        <p:spPr/>
-      </p:sp>
-      <p:sp>
-        <p:nvSpPr>
-          <p:cNvPr id="3" name="Notes Placeholder 2"/>
-          <p:cNvSpPr>
-            <a:spLocks noGrp="1"/>
-          </p:cNvSpPr>
-          <p:nvPr>
-            <p:ph type="body" idx="3" sz="quarter"/>
-          </p:nvPr>
-        </p:nvSpPr>
-        <p:spPr/>
-        <p:txBody>
-          <a:bodyPr/>
-          <a:lstStyle/>
-          <a:p>
-            <a:r>
-              <a:t>By fusing 70% supervised probability with 30% unsupervised anomaly scores, our architecture catches known fraud while providing an active safety net for novel attack vectors.</a:t>
-            </a:r>
-          </a:p>
-        </p:txBody>
-      </p:sp>
-      <p:sp>
-        <p:nvSpPr>
-          <p:cNvPr id="4" name="Slide Number Placeholder 3"/>
-          <p:cNvSpPr>
-            <a:spLocks noGrp="1"/>
-          </p:cNvSpPr>
-          <p:nvPr>
-            <p:ph type="sldNum" idx="5" sz="quarter"/>
-          </p:nvPr>
-        </p:nvSpPr>
-        <p:spPr/>
-      </p:sp>
-    </p:spTree>
-  </p:cSld>
-  <p:clrMapOvr>
-    <a:masterClrMapping/>
-  </p:clrMapOvr>
-</p:notes>
-</file>
-
-<file path=ppt/notesSlides/notesSlide7.xml><?xml version="1.0" encoding="utf-8"?>
-<p:notes xmlns:a="http://schemas.openxmlformats.org/drawingml/2006/main" xmlns:p="http://schemas.openxmlformats.org/presentationml/2006/main" xmlns:r="http://schemas.openxmlformats.org/officeDocument/2006/relationships">
-  <p:cSld>
-    <p:spTree>
-      <p:nvGrpSpPr>
-        <p:cNvPr id="1" name=""/>
-        <p:cNvGrpSpPr/>
-        <p:nvPr/>
-      </p:nvGrpSpPr>
-      <p:grpSpPr>
-        <a:xfrm>
-          <a:off x="0" y="0"/>
-          <a:ext cx="0" cy="0"/>
-          <a:chOff x="0" y="0"/>
-          <a:chExt cx="0" cy="0"/>
-        </a:xfrm>
-      </p:grpSpPr>
-      <p:sp>
-        <p:nvSpPr>
-          <p:cNvPr id="2" name="Slide Image Placeholder 1"/>
-          <p:cNvSpPr>
-            <a:spLocks noGrp="1"/>
-          </p:cNvSpPr>
-          <p:nvPr>
-            <p:ph type="sldImg" idx="2"/>
-          </p:nvPr>
-        </p:nvSpPr>
-        <p:spPr/>
-      </p:sp>
-      <p:sp>
-        <p:nvSpPr>
-          <p:cNvPr id="3" name="Notes Placeholder 2"/>
-          <p:cNvSpPr>
-            <a:spLocks noGrp="1"/>
-          </p:cNvSpPr>
-          <p:nvPr>
-            <p:ph type="body" idx="3" sz="quarter"/>
-          </p:nvPr>
-        </p:nvSpPr>
-        <p:spPr/>
-        <p:txBody>
-          <a:bodyPr/>
-          <a:lstStyle/>
-          <a:p>
-            <a:r>
-              <a:t>Our ROC and Precision-Recall curves prove the superior separation achieved by tree ensembles and Isolation Forest under extreme 0.5% class imbalance.</a:t>
-            </a:r>
-          </a:p>
-        </p:txBody>
-      </p:sp>
-      <p:sp>
-        <p:nvSpPr>
-          <p:cNvPr id="4" name="Slide Number Placeholder 3"/>
-          <p:cNvSpPr>
-            <a:spLocks noGrp="1"/>
-          </p:cNvSpPr>
-          <p:nvPr>
-            <p:ph type="sldNum" idx="5" sz="quarter"/>
-          </p:nvPr>
-        </p:nvSpPr>
-        <p:spPr/>
-      </p:sp>
-    </p:spTree>
-  </p:cSld>
-  <p:clrMapOvr>
-    <a:masterClrMapping/>
-  </p:clrMapOvr>
-</p:notes>
-</file>
-
-<file path=ppt/notesSlides/notesSlide8.xml><?xml version="1.0" encoding="utf-8"?>
-<p:notes xmlns:a="http://schemas.openxmlformats.org/drawingml/2006/main" xmlns:p="http://schemas.openxmlformats.org/presentationml/2006/main" xmlns:r="http://schemas.openxmlformats.org/officeDocument/2006/relationships">
-  <p:cSld>
-    <p:spTree>
-      <p:nvGrpSpPr>
-        <p:cNvPr id="1" name=""/>
-        <p:cNvGrpSpPr/>
-        <p:nvPr/>
-      </p:nvGrpSpPr>
-      <p:grpSpPr>
-        <a:xfrm>
-          <a:off x="0" y="0"/>
-          <a:ext cx="0" cy="0"/>
-          <a:chOff x="0" y="0"/>
-          <a:chExt cx="0" cy="0"/>
-        </a:xfrm>
-      </p:grpSpPr>
-      <p:sp>
-        <p:nvSpPr>
-          <p:cNvPr id="2" name="Slide Image Placeholder 1"/>
-          <p:cNvSpPr>
-            <a:spLocks noGrp="1"/>
-          </p:cNvSpPr>
-          <p:nvPr>
-            <p:ph type="sldImg" idx="2"/>
-          </p:nvPr>
-        </p:nvSpPr>
-        <p:spPr/>
-      </p:sp>
-      <p:sp>
-        <p:nvSpPr>
-          <p:cNvPr id="3" name="Notes Placeholder 2"/>
-          <p:cNvSpPr>
-            <a:spLocks noGrp="1"/>
-          </p:cNvSpPr>
-          <p:nvPr>
-            <p:ph type="body" idx="3" sz="quarter"/>
-          </p:nvPr>
-        </p:nvSpPr>
-        <p:spPr/>
-        <p:txBody>
-          <a:bodyPr/>
-          <a:lstStyle/>
-          <a:p>
-            <a:r>
-              <a:t>The system delivers clear business value: preventing over $1.56 Million in fraud losses with only $1,500 in operational overhead, translating to over 100,000% ROI.</a:t>
-            </a:r>
-          </a:p>
-        </p:txBody>
-      </p:sp>
-      <p:sp>
-        <p:nvSpPr>
-          <p:cNvPr id="4" name="Slide Number Placeholder 3"/>
-          <p:cNvSpPr>
-            <a:spLocks noGrp="1"/>
-          </p:cNvSpPr>
-          <p:nvPr>
-            <p:ph type="sldNum" idx="5" sz="quarter"/>
-          </p:nvPr>
-        </p:nvSpPr>
-        <p:spPr/>
-      </p:sp>
-    </p:spTree>
-  </p:cSld>
-  <p:clrMapOvr>
-    <a:masterClrMapping/>
-  </p:clrMapOvr>
-</p:notes>
-</file>
-
-<file path=ppt/notesSlides/notesSlide9.xml><?xml version="1.0" encoding="utf-8"?>
-<p:notes xmlns:a="http://schemas.openxmlformats.org/drawingml/2006/main" xmlns:p="http://schemas.openxmlformats.org/presentationml/2006/main" xmlns:r="http://schemas.openxmlformats.org/officeDocument/2006/relationships">
-  <p:cSld>
-    <p:spTree>
-      <p:nvGrpSpPr>
-        <p:cNvPr id="1" name=""/>
-        <p:cNvGrpSpPr/>
-        <p:nvPr/>
-      </p:nvGrpSpPr>
-      <p:grpSpPr>
-        <a:xfrm>
-          <a:off x="0" y="0"/>
-          <a:ext cx="0" cy="0"/>
-          <a:chOff x="0" y="0"/>
-          <a:chExt cx="0" cy="0"/>
-        </a:xfrm>
-      </p:grpSpPr>
-      <p:sp>
-        <p:nvSpPr>
-          <p:cNvPr id="2" name="Slide Image Placeholder 1"/>
-          <p:cNvSpPr>
-            <a:spLocks noGrp="1"/>
-          </p:cNvSpPr>
-          <p:nvPr>
-            <p:ph type="sldImg" idx="2"/>
-          </p:nvPr>
-        </p:nvSpPr>
-        <p:spPr/>
-      </p:sp>
-      <p:sp>
-        <p:nvSpPr>
-          <p:cNvPr id="3" name="Notes Placeholder 2"/>
-          <p:cNvSpPr>
-            <a:spLocks noGrp="1"/>
-          </p:cNvSpPr>
-          <p:nvPr>
-            <p:ph type="body" idx="3" sz="quarter"/>
-          </p:nvPr>
-        </p:nvSpPr>
-        <p:spPr/>
-        <p:txBody>
-          <a:bodyPr/>
-          <a:lstStyle/>
-          <a:p>
-            <a:r>
-              <a:t>We deployed the system as a usable Streamlit web application with real-time scoring, batch scanning, and financial ROI simulation.</a:t>
+              <a:t>Welcome evaluators. Today I am presenting FraudLens AI, a complete machine learning pipeline for real-time transaction fraud triage.</a:t>
             </a:r>
           </a:p>
         </p:txBody>
@@ -4162,7 +3535,7 @@
             <a:avLst/>
           </a:prstGeom>
           <a:solidFill>
-            <a:srgbClr val="0F172A"/>
+            <a:srgbClr val="0B1329"/>
           </a:solidFill>
           <a:ln>
             <a:noFill/>
@@ -4198,8 +3571,8 @@
         </p:nvSpPr>
         <p:spPr>
           <a:xfrm>
-            <a:off x="914400" y="1645920"/>
-            <a:ext cx="10332720" cy="3657600"/>
+            <a:off x="731520" y="1371600"/>
+            <a:ext cx="10698480" cy="2926080"/>
           </a:xfrm>
           <a:prstGeom prst="rect">
             <a:avLst/>
@@ -4213,18 +3586,21 @@
           <a:lstStyle/>
           <a:p>
             <a:pPr>
-              <a:defRPr sz="1300" b="1">
+              <a:defRPr sz="1100" b="1">
                 <a:solidFill>
                   <a:srgbClr val="38BDF8"/>
                 </a:solidFill>
               </a:defRPr>
             </a:pPr>
             <a:r>
-              <a:t>MACHINE LEARNING CAPSTONE DEFENSE</a:t>
+              <a:t>CAPSTONE PRESENTATION OVERVIEW</a:t>
             </a:r>
           </a:p>
           <a:p>
             <a:pPr>
+              <a:spcBef>
+                <a:spcPts val="800"/>
+              </a:spcBef>
               <a:defRPr sz="3600" b="1">
                 <a:solidFill>
                   <a:srgbClr val="FFFFFF"/>
@@ -4232,49 +3608,234 @@
               </a:defRPr>
             </a:pPr>
             <a:r>
-              <a:t>FraudLens AI: Intelligent Real-Time</a:t>
+              <a:t>FraudLens AI: Real-Time Financial</a:t>
             </a:r>
             <a:br/>
             <a:r>
-              <a:t>Financial Transaction Fraud Detection</a:t>
-            </a:r>
-          </a:p>
-          <a:p>
-            <a:br/>
+              <a:t>Fraud Decision-Support Engine</a:t>
+            </a:r>
+          </a:p>
+          <a:p>
             <a:pPr>
-              <a:defRPr sz="1600">
-                <a:solidFill>
-                  <a:srgbClr val="CBD5E1"/>
-                </a:solidFill>
-              </a:defRPr>
-            </a:pPr>
-            <a:r>
-              <a:t>Dual-Engine Fusion Architecture: Cost-Sensitive Classification &amp; Unsupervised Anomaly Detection</a:t>
-            </a:r>
-          </a:p>
-          <a:p>
-            <a:br/>
+              <a:spcBef>
+                <a:spcPts val="1200"/>
+              </a:spcBef>
+              <a:defRPr sz="1500">
+                <a:solidFill>
+                  <a:srgbClr val="94A3B8"/>
+                </a:solidFill>
+              </a:defRPr>
+            </a:pPr>
+            <a:r>
+              <a:t>A machine learning pipeline combining cost-sensitive classification and unsupervised anomaly detection for instant transaction risk triage.</a:t>
+            </a:r>
+          </a:p>
+        </p:txBody>
+      </p:sp>
+      <p:sp>
+        <p:nvSpPr>
+          <p:cNvPr id="4" name="Rounded Rectangle 3"/>
+          <p:cNvSpPr/>
+          <p:nvPr/>
+        </p:nvSpPr>
+        <p:spPr>
+          <a:xfrm>
+            <a:off x="731520" y="4846320"/>
+            <a:ext cx="4114800" cy="1371600"/>
+          </a:xfrm>
+          <a:prstGeom prst="roundRect">
+            <a:avLst/>
+          </a:prstGeom>
+          <a:solidFill>
+            <a:srgbClr val="15203F"/>
+          </a:solidFill>
+          <a:ln w="12700">
+            <a:solidFill>
+              <a:srgbClr val="26345C"/>
+            </a:solidFill>
+          </a:ln>
+        </p:spPr>
+        <p:style>
+          <a:lnRef idx="1">
+            <a:schemeClr val="accent1"/>
+          </a:lnRef>
+          <a:fillRef idx="3">
+            <a:schemeClr val="accent1"/>
+          </a:fillRef>
+          <a:effectRef idx="2">
+            <a:schemeClr val="accent1"/>
+          </a:effectRef>
+          <a:fontRef idx="minor">
+            <a:schemeClr val="lt1"/>
+          </a:fontRef>
+        </p:style>
+        <p:txBody>
+          <a:bodyPr rtlCol="0" anchor="ctr"/>
+          <a:lstStyle/>
+          <a:p>
+            <a:pPr algn="ctr"/>
+          </a:p>
+        </p:txBody>
+      </p:sp>
+      <p:sp>
+        <p:nvSpPr>
+          <p:cNvPr id="5" name="TextBox 4"/>
+          <p:cNvSpPr txBox="1"/>
+          <p:nvPr/>
+        </p:nvSpPr>
+        <p:spPr>
+          <a:xfrm>
+            <a:off x="914400" y="4983480"/>
+            <a:ext cx="3749039" cy="1097280"/>
+          </a:xfrm>
+          <a:prstGeom prst="rect">
+            <a:avLst/>
+          </a:prstGeom>
+          <a:noFill/>
+        </p:spPr>
+        <p:txBody>
+          <a:bodyPr wrap="none">
+            <a:spAutoFit/>
+          </a:bodyPr>
+          <a:lstStyle/>
+          <a:p>
             <a:pPr>
-              <a:defRPr sz="1400">
+              <a:defRPr sz="1000" b="1">
                 <a:solidFill>
                   <a:srgbClr val="94A3B8"/>
                 </a:solidFill>
               </a:defRPr>
             </a:pPr>
             <a:r>
-              <a:t>Presenter: Manish Patil | Course: Machine Learning (PBL 100 Marks)</a:t>
+              <a:t>PRESENTER DETAILS</a:t>
+            </a:r>
+          </a:p>
+          <a:p>
+            <a:pPr>
+              <a:defRPr sz="1400" b="1">
+                <a:solidFill>
+                  <a:srgbClr val="FFFFFF"/>
+                </a:solidFill>
+              </a:defRPr>
+            </a:pPr>
+            <a:r>
+              <a:t>Manish Patil</a:t>
+            </a:r>
+          </a:p>
+          <a:p>
+            <a:pPr>
+              <a:defRPr sz="1100">
+                <a:solidFill>
+                  <a:srgbClr val="38BDF8"/>
+                </a:solidFill>
+              </a:defRPr>
+            </a:pPr>
+            <a:r>
+              <a:t>Machine Learning PBL Project (100 Marks)</a:t>
+            </a:r>
+          </a:p>
+        </p:txBody>
+      </p:sp>
+      <p:sp>
+        <p:nvSpPr>
+          <p:cNvPr id="6" name="Rounded Rectangle 5"/>
+          <p:cNvSpPr/>
+          <p:nvPr/>
+        </p:nvSpPr>
+        <p:spPr>
+          <a:xfrm>
+            <a:off x="5120640" y="4846320"/>
+            <a:ext cx="6309360" cy="1371600"/>
+          </a:xfrm>
+          <a:prstGeom prst="roundRect">
+            <a:avLst/>
+          </a:prstGeom>
+          <a:solidFill>
+            <a:srgbClr val="15203F"/>
+          </a:solidFill>
+          <a:ln w="12700">
+            <a:solidFill>
+              <a:srgbClr val="26345C"/>
+            </a:solidFill>
+          </a:ln>
+        </p:spPr>
+        <p:style>
+          <a:lnRef idx="1">
+            <a:schemeClr val="accent1"/>
+          </a:lnRef>
+          <a:fillRef idx="3">
+            <a:schemeClr val="accent1"/>
+          </a:fillRef>
+          <a:effectRef idx="2">
+            <a:schemeClr val="accent1"/>
+          </a:effectRef>
+          <a:fontRef idx="minor">
+            <a:schemeClr val="lt1"/>
+          </a:fontRef>
+        </p:style>
+        <p:txBody>
+          <a:bodyPr rtlCol="0" anchor="ctr"/>
+          <a:lstStyle/>
+          <a:p>
+            <a:pPr algn="ctr"/>
+          </a:p>
+        </p:txBody>
+      </p:sp>
+      <p:sp>
+        <p:nvSpPr>
+          <p:cNvPr id="7" name="TextBox 6"/>
+          <p:cNvSpPr txBox="1"/>
+          <p:nvPr/>
+        </p:nvSpPr>
+        <p:spPr>
+          <a:xfrm>
+            <a:off x="5303520" y="4983480"/>
+            <a:ext cx="5943600" cy="1097280"/>
+          </a:xfrm>
+          <a:prstGeom prst="rect">
+            <a:avLst/>
+          </a:prstGeom>
+          <a:noFill/>
+        </p:spPr>
+        <p:txBody>
+          <a:bodyPr wrap="none">
+            <a:spAutoFit/>
+          </a:bodyPr>
+          <a:lstStyle/>
+          <a:p>
+            <a:pPr>
+              <a:defRPr sz="1000" b="1">
+                <a:solidFill>
+                  <a:srgbClr val="94A3B8"/>
+                </a:solidFill>
+              </a:defRPr>
+            </a:pPr>
+            <a:r>
+              <a:t>PROJECT DELIVERABLES &amp; DEPLOYMENT</a:t>
             </a:r>
           </a:p>
           <a:p>
             <a:pPr>
               <a:defRPr sz="1200" b="1">
                 <a:solidFill>
+                  <a:srgbClr val="FFFFFF"/>
+                </a:solidFill>
+              </a:defRPr>
+            </a:pPr>
+            <a:r>
+              <a:t>💻 Repository: github.com/Manish-Patil33/FraudLens-Al-</a:t>
+            </a:r>
+          </a:p>
+          <a:p>
+            <a:pPr>
+              <a:defRPr sz="1200" b="1">
+                <a:solidFill>
                   <a:srgbClr val="38BDF8"/>
                 </a:solidFill>
               </a:defRPr>
             </a:pPr>
             <a:r>
-              <a:t>🌐 Live Web App: https://fraudlensai1.streamlit.app/ | 💻 GitHub: https://github.com/Manish-Patil33/FraudLens-Al-</a:t>
+              <a:t>🌐 Live Web App: fraudlensai1.streamlit.app</a:t>
             </a:r>
           </a:p>
         </p:txBody>
@@ -4312,7 +3873,7 @@
             <a:avLst/>
           </a:prstGeom>
           <a:solidFill>
-            <a:srgbClr val="0F172A"/>
+            <a:srgbClr val="F8FAFC"/>
           </a:solidFill>
           <a:ln>
             <a:noFill/>
@@ -4348,8 +3909,103 @@
         </p:nvSpPr>
         <p:spPr>
           <a:xfrm>
-            <a:off x="914400" y="1645920"/>
-            <a:ext cx="10332720" cy="4114800"/>
+            <a:off x="731520" y="457200"/>
+            <a:ext cx="10698480" cy="1005840"/>
+          </a:xfrm>
+          <a:prstGeom prst="rect">
+            <a:avLst/>
+          </a:prstGeom>
+          <a:noFill/>
+        </p:spPr>
+        <p:txBody>
+          <a:bodyPr wrap="square" lIns="0" tIns="0" rIns="0" bIns="0">
+            <a:spAutoFit/>
+          </a:bodyPr>
+          <a:lstStyle/>
+          <a:p>
+            <a:pPr>
+              <a:defRPr sz="1000" b="1">
+                <a:solidFill>
+                  <a:srgbClr val="2563EB"/>
+                </a:solidFill>
+              </a:defRPr>
+            </a:pPr>
+            <a:r>
+              <a:t>ERROR ANALYSIS</a:t>
+            </a:r>
+          </a:p>
+          <a:p>
+            <a:pPr>
+              <a:spcBef>
+                <a:spcPts val="400"/>
+              </a:spcBef>
+              <a:defRPr sz="2400" b="1">
+                <a:solidFill>
+                  <a:srgbClr val="0F172A"/>
+                </a:solidFill>
+              </a:defRPr>
+            </a:pPr>
+            <a:r>
+              <a:t>Trade-Off Analysis &amp; Adaptive Thresholding</a:t>
+            </a:r>
+          </a:p>
+        </p:txBody>
+      </p:sp>
+      <p:sp>
+        <p:nvSpPr>
+          <p:cNvPr id="4" name="Rounded Rectangle 3"/>
+          <p:cNvSpPr/>
+          <p:nvPr/>
+        </p:nvSpPr>
+        <p:spPr>
+          <a:xfrm>
+            <a:off x="731520" y="1828800"/>
+            <a:ext cx="5212080" cy="2560320"/>
+          </a:xfrm>
+          <a:prstGeom prst="roundRect">
+            <a:avLst/>
+          </a:prstGeom>
+          <a:solidFill>
+            <a:srgbClr val="FEF2F2"/>
+          </a:solidFill>
+          <a:ln w="12700">
+            <a:solidFill>
+              <a:srgbClr val="FECACA"/>
+            </a:solidFill>
+          </a:ln>
+        </p:spPr>
+        <p:style>
+          <a:lnRef idx="1">
+            <a:schemeClr val="accent1"/>
+          </a:lnRef>
+          <a:fillRef idx="3">
+            <a:schemeClr val="accent1"/>
+          </a:fillRef>
+          <a:effectRef idx="2">
+            <a:schemeClr val="accent1"/>
+          </a:effectRef>
+          <a:fontRef idx="minor">
+            <a:schemeClr val="lt1"/>
+          </a:fontRef>
+        </p:style>
+        <p:txBody>
+          <a:bodyPr rtlCol="0" anchor="ctr"/>
+          <a:lstStyle/>
+          <a:p>
+            <a:pPr algn="ctr"/>
+          </a:p>
+        </p:txBody>
+      </p:sp>
+      <p:sp>
+        <p:nvSpPr>
+          <p:cNvPr id="5" name="TextBox 4"/>
+          <p:cNvSpPr txBox="1"/>
+          <p:nvPr/>
+        </p:nvSpPr>
+        <p:spPr>
+          <a:xfrm>
+            <a:off x="1005840" y="2103120"/>
+            <a:ext cx="4663440" cy="2103120"/>
           </a:xfrm>
           <a:prstGeom prst="rect">
             <a:avLst/>
@@ -4363,116 +4019,1853 @@
           <a:lstStyle/>
           <a:p>
             <a:pPr>
-              <a:defRPr sz="1400" b="1">
+              <a:defRPr b="1" sz="1600">
+                <a:solidFill>
+                  <a:srgbClr val="EF4444"/>
+                </a:solidFill>
+              </a:defRPr>
+            </a:pPr>
+            <a:r>
+              <a:t>⚠️ False Alarms (Customer Friction)</a:t>
+            </a:r>
+          </a:p>
+          <a:p>
+            <a:br/>
+            <a:pPr>
+              <a:defRPr sz="1150">
+                <a:solidFill>
+                  <a:srgbClr val="475569"/>
+                </a:solidFill>
+              </a:defRPr>
+            </a:pPr>
+            <a:r>
+              <a:t>Consumes bank operational investigator hours and causes customer churn by needlessly declining legitimate transactions.</a:t>
+            </a:r>
+            <a:br/>
+            <a:br/>
+            <a:r>
+              <a:t>FraudLens AI reduces False Positive Rate to 0.0000% on the benchmark stream.</a:t>
+            </a:r>
+          </a:p>
+        </p:txBody>
+      </p:sp>
+      <p:sp>
+        <p:nvSpPr>
+          <p:cNvPr id="6" name="Rounded Rectangle 5"/>
+          <p:cNvSpPr/>
+          <p:nvPr/>
+        </p:nvSpPr>
+        <p:spPr>
+          <a:xfrm>
+            <a:off x="6217920" y="1828800"/>
+            <a:ext cx="5212080" cy="2560320"/>
+          </a:xfrm>
+          <a:prstGeom prst="roundRect">
+            <a:avLst/>
+          </a:prstGeom>
+          <a:solidFill>
+            <a:srgbClr val="FEF2F2"/>
+          </a:solidFill>
+          <a:ln w="12700">
+            <a:solidFill>
+              <a:srgbClr val="FECACA"/>
+            </a:solidFill>
+          </a:ln>
+        </p:spPr>
+        <p:style>
+          <a:lnRef idx="1">
+            <a:schemeClr val="accent1"/>
+          </a:lnRef>
+          <a:fillRef idx="3">
+            <a:schemeClr val="accent1"/>
+          </a:fillRef>
+          <a:effectRef idx="2">
+            <a:schemeClr val="accent1"/>
+          </a:effectRef>
+          <a:fontRef idx="minor">
+            <a:schemeClr val="lt1"/>
+          </a:fontRef>
+        </p:style>
+        <p:txBody>
+          <a:bodyPr rtlCol="0" anchor="ctr"/>
+          <a:lstStyle/>
+          <a:p>
+            <a:pPr algn="ctr"/>
+          </a:p>
+        </p:txBody>
+      </p:sp>
+      <p:sp>
+        <p:nvSpPr>
+          <p:cNvPr id="7" name="TextBox 6"/>
+          <p:cNvSpPr txBox="1"/>
+          <p:nvPr/>
+        </p:nvSpPr>
+        <p:spPr>
+          <a:xfrm>
+            <a:off x="6492240" y="2103120"/>
+            <a:ext cx="4663440" cy="2103120"/>
+          </a:xfrm>
+          <a:prstGeom prst="rect">
+            <a:avLst/>
+          </a:prstGeom>
+          <a:noFill/>
+        </p:spPr>
+        <p:txBody>
+          <a:bodyPr wrap="square">
+            <a:spAutoFit/>
+          </a:bodyPr>
+          <a:lstStyle/>
+          <a:p>
+            <a:pPr>
+              <a:defRPr b="1" sz="1600">
+                <a:solidFill>
+                  <a:srgbClr val="EF4444"/>
+                </a:solidFill>
+              </a:defRPr>
+            </a:pPr>
+            <a:r>
+              <a:t>🚨 Missed Fraud (Capital Drain)</a:t>
+            </a:r>
+          </a:p>
+          <a:p>
+            <a:br/>
+            <a:pPr>
+              <a:defRPr sz="1150">
+                <a:solidFill>
+                  <a:srgbClr val="475569"/>
+                </a:solidFill>
+              </a:defRPr>
+            </a:pPr>
+            <a:r>
+              <a:t>High-value account siphons bypass filters unflagged, resulting in permanent financial loss and regulatory penalties.</a:t>
+            </a:r>
+            <a:br/>
+            <a:br/>
+            <a:r>
+              <a:t>FraudLens AI achieved 100% recall, preventing $1.56M in fraudulent losses.</a:t>
+            </a:r>
+          </a:p>
+        </p:txBody>
+      </p:sp>
+      <p:sp>
+        <p:nvSpPr>
+          <p:cNvPr id="8" name="Rounded Rectangle 7"/>
+          <p:cNvSpPr/>
+          <p:nvPr/>
+        </p:nvSpPr>
+        <p:spPr>
+          <a:xfrm>
+            <a:off x="731520" y="4663440"/>
+            <a:ext cx="10728655" cy="1097280"/>
+          </a:xfrm>
+          <a:prstGeom prst="roundRect">
+            <a:avLst/>
+          </a:prstGeom>
+          <a:solidFill>
+            <a:srgbClr val="FFFFFF"/>
+          </a:solidFill>
+          <a:ln w="12700">
+            <a:solidFill>
+              <a:srgbClr val="E2E8F0"/>
+            </a:solidFill>
+          </a:ln>
+        </p:spPr>
+        <p:style>
+          <a:lnRef idx="1">
+            <a:schemeClr val="accent1"/>
+          </a:lnRef>
+          <a:fillRef idx="3">
+            <a:schemeClr val="accent1"/>
+          </a:fillRef>
+          <a:effectRef idx="2">
+            <a:schemeClr val="accent1"/>
+          </a:effectRef>
+          <a:fontRef idx="minor">
+            <a:schemeClr val="lt1"/>
+          </a:fontRef>
+        </p:style>
+        <p:txBody>
+          <a:bodyPr rtlCol="0" anchor="ctr"/>
+          <a:lstStyle/>
+          <a:p>
+            <a:pPr algn="ctr"/>
+          </a:p>
+        </p:txBody>
+      </p:sp>
+      <p:sp>
+        <p:nvSpPr>
+          <p:cNvPr id="9" name="TextBox 8"/>
+          <p:cNvSpPr txBox="1"/>
+          <p:nvPr/>
+        </p:nvSpPr>
+        <p:spPr>
+          <a:xfrm>
+            <a:off x="1005840" y="4800600"/>
+            <a:ext cx="10149840" cy="822960"/>
+          </a:xfrm>
+          <a:prstGeom prst="rect">
+            <a:avLst/>
+          </a:prstGeom>
+          <a:noFill/>
+        </p:spPr>
+        <p:txBody>
+          <a:bodyPr wrap="square">
+            <a:spAutoFit/>
+          </a:bodyPr>
+          <a:lstStyle/>
+          <a:p>
+            <a:pPr>
+              <a:defRPr b="1" sz="1300">
+                <a:solidFill>
+                  <a:srgbClr val="0F172A"/>
+                </a:solidFill>
+              </a:defRPr>
+            </a:pPr>
+            <a:r>
+              <a:t>🤝 Stakeholder Threshold Alignment</a:t>
+            </a:r>
+          </a:p>
+          <a:p>
+            <a:pPr>
+              <a:defRPr sz="1100">
+                <a:solidFill>
+                  <a:srgbClr val="475569"/>
+                </a:solidFill>
+              </a:defRPr>
+            </a:pPr>
+            <a:r>
+              <a:t>Operating classification threshold is calibrated at 0.125 to balance investigator labor vs fraud loss. Borderline transactions (scores 35-75) trigger step-up biometric challenges rather than outright declines.</a:t>
+            </a:r>
+          </a:p>
+        </p:txBody>
+      </p:sp>
+      <p:sp>
+        <p:nvSpPr>
+          <p:cNvPr id="10" name="Rounded Rectangle 9"/>
+          <p:cNvSpPr/>
+          <p:nvPr/>
+        </p:nvSpPr>
+        <p:spPr>
+          <a:xfrm>
+            <a:off x="731520" y="5943600"/>
+            <a:ext cx="10728655" cy="502920"/>
+          </a:xfrm>
+          <a:prstGeom prst="roundRect">
+            <a:avLst/>
+          </a:prstGeom>
+          <a:solidFill>
+            <a:srgbClr val="EEF2FF"/>
+          </a:solidFill>
+          <a:ln w="12700">
+            <a:solidFill>
+              <a:srgbClr val="6366F1"/>
+            </a:solidFill>
+          </a:ln>
+        </p:spPr>
+        <p:style>
+          <a:lnRef idx="1">
+            <a:schemeClr val="accent1"/>
+          </a:lnRef>
+          <a:fillRef idx="3">
+            <a:schemeClr val="accent1"/>
+          </a:fillRef>
+          <a:effectRef idx="2">
+            <a:schemeClr val="accent1"/>
+          </a:effectRef>
+          <a:fontRef idx="minor">
+            <a:schemeClr val="lt1"/>
+          </a:fontRef>
+        </p:style>
+        <p:txBody>
+          <a:bodyPr rtlCol="0" anchor="ctr"/>
+          <a:lstStyle/>
+          <a:p>
+            <a:pPr algn="ctr"/>
+          </a:p>
+        </p:txBody>
+      </p:sp>
+      <p:sp>
+        <p:nvSpPr>
+          <p:cNvPr id="11" name="Rectangle 10"/>
+          <p:cNvSpPr/>
+          <p:nvPr/>
+        </p:nvSpPr>
+        <p:spPr>
+          <a:xfrm>
+            <a:off x="731520" y="5943600"/>
+            <a:ext cx="73152" cy="502920"/>
+          </a:xfrm>
+          <a:prstGeom prst="rect">
+            <a:avLst/>
+          </a:prstGeom>
+          <a:solidFill>
+            <a:srgbClr val="6366F1"/>
+          </a:solidFill>
+          <a:ln>
+            <a:noFill/>
+          </a:ln>
+        </p:spPr>
+        <p:style>
+          <a:lnRef idx="1">
+            <a:schemeClr val="accent1"/>
+          </a:lnRef>
+          <a:fillRef idx="3">
+            <a:schemeClr val="accent1"/>
+          </a:fillRef>
+          <a:effectRef idx="2">
+            <a:schemeClr val="accent1"/>
+          </a:effectRef>
+          <a:fontRef idx="minor">
+            <a:schemeClr val="lt1"/>
+          </a:fontRef>
+        </p:style>
+        <p:txBody>
+          <a:bodyPr rtlCol="0" anchor="ctr"/>
+          <a:lstStyle/>
+          <a:p>
+            <a:pPr algn="ctr"/>
+          </a:p>
+        </p:txBody>
+      </p:sp>
+      <p:sp>
+        <p:nvSpPr>
+          <p:cNvPr id="12" name="TextBox 11"/>
+          <p:cNvSpPr txBox="1"/>
+          <p:nvPr/>
+        </p:nvSpPr>
+        <p:spPr>
+          <a:xfrm>
+            <a:off x="960120" y="5961888"/>
+            <a:ext cx="10332720" cy="457200"/>
+          </a:xfrm>
+          <a:prstGeom prst="rect">
+            <a:avLst/>
+          </a:prstGeom>
+          <a:noFill/>
+        </p:spPr>
+        <p:txBody>
+          <a:bodyPr wrap="square" lIns="0" tIns="0" rIns="0" bIns="0">
+            <a:spAutoFit/>
+          </a:bodyPr>
+          <a:lstStyle/>
+          <a:p>
+            <a:r>
+              <a:rPr b="1" sz="1100">
+                <a:solidFill>
+                  <a:srgbClr val="6366F1"/>
+                </a:solidFill>
+              </a:rPr>
+              <a:t>Operational Takeaway: </a:t>
+            </a:r>
+            <a:r>
+              <a:rPr sz="1100">
+                <a:solidFill>
+                  <a:srgbClr val="0F172A"/>
+                </a:solidFill>
+              </a:rPr>
+              <a:t>Calibrated routing stops bot liquidations while protecting user checkout conversion.</a:t>
+            </a:r>
+          </a:p>
+        </p:txBody>
+      </p:sp>
+    </p:spTree>
+  </p:cSld>
+  <p:clrMapOvr>
+    <a:masterClrMapping/>
+  </p:clrMapOvr>
+</p:sld>
+</file>
+
+<file path=ppt/slides/slide11.xml><?xml version="1.0" encoding="utf-8"?>
+<p:sld xmlns:a="http://schemas.openxmlformats.org/drawingml/2006/main" xmlns:p="http://schemas.openxmlformats.org/presentationml/2006/main" xmlns:r="http://schemas.openxmlformats.org/officeDocument/2006/relationships">
+  <p:cSld>
+    <p:spTree>
+      <p:nvGrpSpPr>
+        <p:cNvPr id="1" name=""/>
+        <p:cNvGrpSpPr/>
+        <p:nvPr/>
+      </p:nvGrpSpPr>
+      <p:grpSpPr/>
+      <p:sp>
+        <p:nvSpPr>
+          <p:cNvPr id="2" name="Rectangle 1"/>
+          <p:cNvSpPr/>
+          <p:nvPr/>
+        </p:nvSpPr>
+        <p:spPr>
+          <a:xfrm>
+            <a:off x="0" y="0"/>
+            <a:ext cx="12191695" cy="6858000"/>
+          </a:xfrm>
+          <a:prstGeom prst="rect">
+            <a:avLst/>
+          </a:prstGeom>
+          <a:solidFill>
+            <a:srgbClr val="F8FAFC"/>
+          </a:solidFill>
+          <a:ln>
+            <a:noFill/>
+          </a:ln>
+        </p:spPr>
+        <p:style>
+          <a:lnRef idx="1">
+            <a:schemeClr val="accent1"/>
+          </a:lnRef>
+          <a:fillRef idx="3">
+            <a:schemeClr val="accent1"/>
+          </a:fillRef>
+          <a:effectRef idx="2">
+            <a:schemeClr val="accent1"/>
+          </a:effectRef>
+          <a:fontRef idx="minor">
+            <a:schemeClr val="lt1"/>
+          </a:fontRef>
+        </p:style>
+        <p:txBody>
+          <a:bodyPr rtlCol="0" anchor="ctr"/>
+          <a:lstStyle/>
+          <a:p>
+            <a:pPr algn="ctr"/>
+          </a:p>
+        </p:txBody>
+      </p:sp>
+      <p:sp>
+        <p:nvSpPr>
+          <p:cNvPr id="3" name="TextBox 2"/>
+          <p:cNvSpPr txBox="1"/>
+          <p:nvPr/>
+        </p:nvSpPr>
+        <p:spPr>
+          <a:xfrm>
+            <a:off x="731520" y="457200"/>
+            <a:ext cx="10698480" cy="1005840"/>
+          </a:xfrm>
+          <a:prstGeom prst="rect">
+            <a:avLst/>
+          </a:prstGeom>
+          <a:noFill/>
+        </p:spPr>
+        <p:txBody>
+          <a:bodyPr wrap="square" lIns="0" tIns="0" rIns="0" bIns="0">
+            <a:spAutoFit/>
+          </a:bodyPr>
+          <a:lstStyle/>
+          <a:p>
+            <a:pPr>
+              <a:defRPr sz="1000" b="1">
+                <a:solidFill>
+                  <a:srgbClr val="2563EB"/>
+                </a:solidFill>
+              </a:defRPr>
+            </a:pPr>
+            <a:r>
+              <a:t>FINANCIAL IMPACT</a:t>
+            </a:r>
+          </a:p>
+          <a:p>
+            <a:pPr>
+              <a:spcBef>
+                <a:spcPts val="400"/>
+              </a:spcBef>
+              <a:defRPr sz="2400" b="1">
+                <a:solidFill>
+                  <a:srgbClr val="0F172A"/>
+                </a:solidFill>
+              </a:defRPr>
+            </a:pPr>
+            <a:r>
+              <a:t>Executive Balance Sheet &amp; Dollar ROI</a:t>
+            </a:r>
+          </a:p>
+        </p:txBody>
+      </p:sp>
+      <p:sp>
+        <p:nvSpPr>
+          <p:cNvPr id="4" name="Rounded Rectangle 3"/>
+          <p:cNvSpPr/>
+          <p:nvPr/>
+        </p:nvSpPr>
+        <p:spPr>
+          <a:xfrm>
+            <a:off x="731520" y="1737360"/>
+            <a:ext cx="2496312" cy="1463040"/>
+          </a:xfrm>
+          <a:prstGeom prst="roundRect">
+            <a:avLst/>
+          </a:prstGeom>
+          <a:solidFill>
+            <a:srgbClr val="FFFFFF"/>
+          </a:solidFill>
+          <a:ln w="12700">
+            <a:solidFill>
+              <a:srgbClr val="E2E8F0"/>
+            </a:solidFill>
+          </a:ln>
+        </p:spPr>
+        <p:style>
+          <a:lnRef idx="1">
+            <a:schemeClr val="accent1"/>
+          </a:lnRef>
+          <a:fillRef idx="3">
+            <a:schemeClr val="accent1"/>
+          </a:fillRef>
+          <a:effectRef idx="2">
+            <a:schemeClr val="accent1"/>
+          </a:effectRef>
+          <a:fontRef idx="minor">
+            <a:schemeClr val="lt1"/>
+          </a:fontRef>
+        </p:style>
+        <p:txBody>
+          <a:bodyPr rtlCol="0" anchor="ctr"/>
+          <a:lstStyle/>
+          <a:p>
+            <a:pPr algn="ctr"/>
+          </a:p>
+        </p:txBody>
+      </p:sp>
+      <p:sp>
+        <p:nvSpPr>
+          <p:cNvPr id="5" name="TextBox 4"/>
+          <p:cNvSpPr txBox="1"/>
+          <p:nvPr/>
+        </p:nvSpPr>
+        <p:spPr>
+          <a:xfrm>
+            <a:off x="731520" y="1874519"/>
+            <a:ext cx="2496312" cy="1188720"/>
+          </a:xfrm>
+          <a:prstGeom prst="rect">
+            <a:avLst/>
+          </a:prstGeom>
+          <a:noFill/>
+        </p:spPr>
+        <p:txBody>
+          <a:bodyPr wrap="square">
+            <a:spAutoFit/>
+          </a:bodyPr>
+          <a:lstStyle/>
+          <a:p>
+            <a:pPr algn="ctr">
+              <a:defRPr sz="2400" b="1">
+                <a:solidFill>
+                  <a:srgbClr val="475569"/>
+                </a:solidFill>
+              </a:defRPr>
+            </a:pPr>
+            <a:r>
+              <a:t>$1,567,200</a:t>
+            </a:r>
+          </a:p>
+          <a:p>
+            <a:pPr algn="ctr">
+              <a:defRPr sz="1050">
+                <a:solidFill>
+                  <a:srgbClr val="475569"/>
+                </a:solidFill>
+              </a:defRPr>
+            </a:pPr>
+            <a:r>
+              <a:t>Total Fraud at Risk</a:t>
+            </a:r>
+          </a:p>
+        </p:txBody>
+      </p:sp>
+      <p:sp>
+        <p:nvSpPr>
+          <p:cNvPr id="6" name="Rounded Rectangle 5"/>
+          <p:cNvSpPr/>
+          <p:nvPr/>
+        </p:nvSpPr>
+        <p:spPr>
+          <a:xfrm>
+            <a:off x="3474720" y="1737360"/>
+            <a:ext cx="2496312" cy="1463040"/>
+          </a:xfrm>
+          <a:prstGeom prst="roundRect">
+            <a:avLst/>
+          </a:prstGeom>
+          <a:solidFill>
+            <a:srgbClr val="FFFFFF"/>
+          </a:solidFill>
+          <a:ln w="12700">
+            <a:solidFill>
+              <a:srgbClr val="E2E8F0"/>
+            </a:solidFill>
+          </a:ln>
+        </p:spPr>
+        <p:style>
+          <a:lnRef idx="1">
+            <a:schemeClr val="accent1"/>
+          </a:lnRef>
+          <a:fillRef idx="3">
+            <a:schemeClr val="accent1"/>
+          </a:fillRef>
+          <a:effectRef idx="2">
+            <a:schemeClr val="accent1"/>
+          </a:effectRef>
+          <a:fontRef idx="minor">
+            <a:schemeClr val="lt1"/>
+          </a:fontRef>
+        </p:style>
+        <p:txBody>
+          <a:bodyPr rtlCol="0" anchor="ctr"/>
+          <a:lstStyle/>
+          <a:p>
+            <a:pPr algn="ctr"/>
+          </a:p>
+        </p:txBody>
+      </p:sp>
+      <p:sp>
+        <p:nvSpPr>
+          <p:cNvPr id="7" name="TextBox 6"/>
+          <p:cNvSpPr txBox="1"/>
+          <p:nvPr/>
+        </p:nvSpPr>
+        <p:spPr>
+          <a:xfrm>
+            <a:off x="3474720" y="1874519"/>
+            <a:ext cx="2496312" cy="1188720"/>
+          </a:xfrm>
+          <a:prstGeom prst="rect">
+            <a:avLst/>
+          </a:prstGeom>
+          <a:noFill/>
+        </p:spPr>
+        <p:txBody>
+          <a:bodyPr wrap="square">
+            <a:spAutoFit/>
+          </a:bodyPr>
+          <a:lstStyle/>
+          <a:p>
+            <a:pPr algn="ctr">
+              <a:defRPr sz="2400" b="1">
+                <a:solidFill>
+                  <a:srgbClr val="10B981"/>
+                </a:solidFill>
+              </a:defRPr>
+            </a:pPr>
+            <a:r>
+              <a:t>$1,567,200</a:t>
+            </a:r>
+          </a:p>
+          <a:p>
+            <a:pPr algn="ctr">
+              <a:defRPr sz="1050">
+                <a:solidFill>
+                  <a:srgbClr val="475569"/>
+                </a:solidFill>
+              </a:defRPr>
+            </a:pPr>
+            <a:r>
+              <a:t>Fraud Losses Intercepted</a:t>
+            </a:r>
+          </a:p>
+        </p:txBody>
+      </p:sp>
+      <p:sp>
+        <p:nvSpPr>
+          <p:cNvPr id="8" name="Rounded Rectangle 7"/>
+          <p:cNvSpPr/>
+          <p:nvPr/>
+        </p:nvSpPr>
+        <p:spPr>
+          <a:xfrm>
+            <a:off x="6217920" y="1737360"/>
+            <a:ext cx="2496312" cy="1463040"/>
+          </a:xfrm>
+          <a:prstGeom prst="roundRect">
+            <a:avLst/>
+          </a:prstGeom>
+          <a:solidFill>
+            <a:srgbClr val="FFFFFF"/>
+          </a:solidFill>
+          <a:ln w="12700">
+            <a:solidFill>
+              <a:srgbClr val="E2E8F0"/>
+            </a:solidFill>
+          </a:ln>
+        </p:spPr>
+        <p:style>
+          <a:lnRef idx="1">
+            <a:schemeClr val="accent1"/>
+          </a:lnRef>
+          <a:fillRef idx="3">
+            <a:schemeClr val="accent1"/>
+          </a:fillRef>
+          <a:effectRef idx="2">
+            <a:schemeClr val="accent1"/>
+          </a:effectRef>
+          <a:fontRef idx="minor">
+            <a:schemeClr val="lt1"/>
+          </a:fontRef>
+        </p:style>
+        <p:txBody>
+          <a:bodyPr rtlCol="0" anchor="ctr"/>
+          <a:lstStyle/>
+          <a:p>
+            <a:pPr algn="ctr"/>
+          </a:p>
+        </p:txBody>
+      </p:sp>
+      <p:sp>
+        <p:nvSpPr>
+          <p:cNvPr id="9" name="TextBox 8"/>
+          <p:cNvSpPr txBox="1"/>
+          <p:nvPr/>
+        </p:nvSpPr>
+        <p:spPr>
+          <a:xfrm>
+            <a:off x="6217920" y="1874519"/>
+            <a:ext cx="2496312" cy="1188720"/>
+          </a:xfrm>
+          <a:prstGeom prst="rect">
+            <a:avLst/>
+          </a:prstGeom>
+          <a:noFill/>
+        </p:spPr>
+        <p:txBody>
+          <a:bodyPr wrap="square">
+            <a:spAutoFit/>
+          </a:bodyPr>
+          <a:lstStyle/>
+          <a:p>
+            <a:pPr algn="ctr">
+              <a:defRPr sz="2400" b="1">
+                <a:solidFill>
+                  <a:srgbClr val="EF4444"/>
+                </a:solidFill>
+              </a:defRPr>
+            </a:pPr>
+            <a:r>
+              <a:t>$1,500</a:t>
+            </a:r>
+          </a:p>
+          <a:p>
+            <a:pPr algn="ctr">
+              <a:defRPr sz="1050">
+                <a:solidFill>
+                  <a:srgbClr val="475569"/>
+                </a:solidFill>
+              </a:defRPr>
+            </a:pPr>
+            <a:r>
+              <a:t>Operational Review Cost</a:t>
+            </a:r>
+          </a:p>
+        </p:txBody>
+      </p:sp>
+      <p:sp>
+        <p:nvSpPr>
+          <p:cNvPr id="10" name="Rounded Rectangle 9"/>
+          <p:cNvSpPr/>
+          <p:nvPr/>
+        </p:nvSpPr>
+        <p:spPr>
+          <a:xfrm>
+            <a:off x="8961120" y="1737360"/>
+            <a:ext cx="2496312" cy="1463040"/>
+          </a:xfrm>
+          <a:prstGeom prst="roundRect">
+            <a:avLst/>
+          </a:prstGeom>
+          <a:solidFill>
+            <a:srgbClr val="FFFFFF"/>
+          </a:solidFill>
+          <a:ln w="12700">
+            <a:solidFill>
+              <a:srgbClr val="E2E8F0"/>
+            </a:solidFill>
+          </a:ln>
+        </p:spPr>
+        <p:style>
+          <a:lnRef idx="1">
+            <a:schemeClr val="accent1"/>
+          </a:lnRef>
+          <a:fillRef idx="3">
+            <a:schemeClr val="accent1"/>
+          </a:fillRef>
+          <a:effectRef idx="2">
+            <a:schemeClr val="accent1"/>
+          </a:effectRef>
+          <a:fontRef idx="minor">
+            <a:schemeClr val="lt1"/>
+          </a:fontRef>
+        </p:style>
+        <p:txBody>
+          <a:bodyPr rtlCol="0" anchor="ctr"/>
+          <a:lstStyle/>
+          <a:p>
+            <a:pPr algn="ctr"/>
+          </a:p>
+        </p:txBody>
+      </p:sp>
+      <p:sp>
+        <p:nvSpPr>
+          <p:cNvPr id="11" name="TextBox 10"/>
+          <p:cNvSpPr txBox="1"/>
+          <p:nvPr/>
+        </p:nvSpPr>
+        <p:spPr>
+          <a:xfrm>
+            <a:off x="8961120" y="1874519"/>
+            <a:ext cx="2496312" cy="1188720"/>
+          </a:xfrm>
+          <a:prstGeom prst="rect">
+            <a:avLst/>
+          </a:prstGeom>
+          <a:noFill/>
+        </p:spPr>
+        <p:txBody>
+          <a:bodyPr wrap="square">
+            <a:spAutoFit/>
+          </a:bodyPr>
+          <a:lstStyle/>
+          <a:p>
+            <a:pPr algn="ctr">
+              <a:defRPr sz="2400" b="1">
+                <a:solidFill>
+                  <a:srgbClr val="2563EB"/>
+                </a:solidFill>
+              </a:defRPr>
+            </a:pPr>
+            <a:r>
+              <a:t>$1,565,700</a:t>
+            </a:r>
+          </a:p>
+          <a:p>
+            <a:pPr algn="ctr">
+              <a:defRPr sz="1050">
+                <a:solidFill>
+                  <a:srgbClr val="475569"/>
+                </a:solidFill>
+              </a:defRPr>
+            </a:pPr>
+            <a:r>
+              <a:t>Net Financial Savings</a:t>
+            </a:r>
+          </a:p>
+        </p:txBody>
+      </p:sp>
+      <p:sp>
+        <p:nvSpPr>
+          <p:cNvPr id="12" name="Rounded Rectangle 11"/>
+          <p:cNvSpPr/>
+          <p:nvPr/>
+        </p:nvSpPr>
+        <p:spPr>
+          <a:xfrm>
+            <a:off x="731520" y="3474720"/>
+            <a:ext cx="10728655" cy="2194560"/>
+          </a:xfrm>
+          <a:prstGeom prst="roundRect">
+            <a:avLst/>
+          </a:prstGeom>
+          <a:solidFill>
+            <a:srgbClr val="FFFFFF"/>
+          </a:solidFill>
+          <a:ln w="12700">
+            <a:solidFill>
+              <a:srgbClr val="E2E8F0"/>
+            </a:solidFill>
+          </a:ln>
+        </p:spPr>
+        <p:style>
+          <a:lnRef idx="1">
+            <a:schemeClr val="accent1"/>
+          </a:lnRef>
+          <a:fillRef idx="3">
+            <a:schemeClr val="accent1"/>
+          </a:fillRef>
+          <a:effectRef idx="2">
+            <a:schemeClr val="accent1"/>
+          </a:effectRef>
+          <a:fontRef idx="minor">
+            <a:schemeClr val="lt1"/>
+          </a:fontRef>
+        </p:style>
+        <p:txBody>
+          <a:bodyPr rtlCol="0" anchor="ctr"/>
+          <a:lstStyle/>
+          <a:p>
+            <a:pPr algn="ctr"/>
+          </a:p>
+        </p:txBody>
+      </p:sp>
+      <p:sp>
+        <p:nvSpPr>
+          <p:cNvPr id="13" name="TextBox 12"/>
+          <p:cNvSpPr txBox="1"/>
+          <p:nvPr/>
+        </p:nvSpPr>
+        <p:spPr>
+          <a:xfrm>
+            <a:off x="1005840" y="3657600"/>
+            <a:ext cx="10149840" cy="1828800"/>
+          </a:xfrm>
+          <a:prstGeom prst="rect">
+            <a:avLst/>
+          </a:prstGeom>
+          <a:noFill/>
+        </p:spPr>
+        <p:txBody>
+          <a:bodyPr wrap="square">
+            <a:spAutoFit/>
+          </a:bodyPr>
+          <a:lstStyle/>
+          <a:p>
+            <a:pPr>
+              <a:defRPr b="1" sz="1700">
+                <a:solidFill>
+                  <a:srgbClr val="10B981"/>
+                </a:solidFill>
+              </a:defRPr>
+            </a:pPr>
+            <a:r>
+              <a:t>📈 Executive Return on Investment: 104,380.0%</a:t>
+            </a:r>
+          </a:p>
+          <a:p>
+            <a:br/>
+            <a:pPr>
+              <a:defRPr sz="1200">
+                <a:solidFill>
+                  <a:srgbClr val="475569"/>
+                </a:solidFill>
+              </a:defRPr>
+            </a:pPr>
+            <a:r>
+              <a:t>• Net Dollars Saved: $1,565,700.22 on 12,000 test transactions alone.</a:t>
+            </a:r>
+            <a:br/>
+            <a:r>
+              <a:t>• Cost-Benefit Formulation: (Fraud Prevented - Review Overhead) / Review Overhead * 100%.</a:t>
+            </a:r>
+            <a:br/>
+            <a:r>
+              <a:t>• Efficiency Ratio: $1,044 in fraud losses prevented for every $1 spent on alert verification.</a:t>
+            </a:r>
+          </a:p>
+        </p:txBody>
+      </p:sp>
+      <p:sp>
+        <p:nvSpPr>
+          <p:cNvPr id="14" name="Rounded Rectangle 13"/>
+          <p:cNvSpPr/>
+          <p:nvPr/>
+        </p:nvSpPr>
+        <p:spPr>
+          <a:xfrm>
+            <a:off x="731520" y="5943600"/>
+            <a:ext cx="10728655" cy="502920"/>
+          </a:xfrm>
+          <a:prstGeom prst="roundRect">
+            <a:avLst/>
+          </a:prstGeom>
+          <a:solidFill>
+            <a:srgbClr val="EEF2FF"/>
+          </a:solidFill>
+          <a:ln w="12700">
+            <a:solidFill>
+              <a:srgbClr val="6366F1"/>
+            </a:solidFill>
+          </a:ln>
+        </p:spPr>
+        <p:style>
+          <a:lnRef idx="1">
+            <a:schemeClr val="accent1"/>
+          </a:lnRef>
+          <a:fillRef idx="3">
+            <a:schemeClr val="accent1"/>
+          </a:fillRef>
+          <a:effectRef idx="2">
+            <a:schemeClr val="accent1"/>
+          </a:effectRef>
+          <a:fontRef idx="minor">
+            <a:schemeClr val="lt1"/>
+          </a:fontRef>
+        </p:style>
+        <p:txBody>
+          <a:bodyPr rtlCol="0" anchor="ctr"/>
+          <a:lstStyle/>
+          <a:p>
+            <a:pPr algn="ctr"/>
+          </a:p>
+        </p:txBody>
+      </p:sp>
+      <p:sp>
+        <p:nvSpPr>
+          <p:cNvPr id="15" name="Rectangle 14"/>
+          <p:cNvSpPr/>
+          <p:nvPr/>
+        </p:nvSpPr>
+        <p:spPr>
+          <a:xfrm>
+            <a:off x="731520" y="5943600"/>
+            <a:ext cx="73152" cy="502920"/>
+          </a:xfrm>
+          <a:prstGeom prst="rect">
+            <a:avLst/>
+          </a:prstGeom>
+          <a:solidFill>
+            <a:srgbClr val="6366F1"/>
+          </a:solidFill>
+          <a:ln>
+            <a:noFill/>
+          </a:ln>
+        </p:spPr>
+        <p:style>
+          <a:lnRef idx="1">
+            <a:schemeClr val="accent1"/>
+          </a:lnRef>
+          <a:fillRef idx="3">
+            <a:schemeClr val="accent1"/>
+          </a:fillRef>
+          <a:effectRef idx="2">
+            <a:schemeClr val="accent1"/>
+          </a:effectRef>
+          <a:fontRef idx="minor">
+            <a:schemeClr val="lt1"/>
+          </a:fontRef>
+        </p:style>
+        <p:txBody>
+          <a:bodyPr rtlCol="0" anchor="ctr"/>
+          <a:lstStyle/>
+          <a:p>
+            <a:pPr algn="ctr"/>
+          </a:p>
+        </p:txBody>
+      </p:sp>
+      <p:sp>
+        <p:nvSpPr>
+          <p:cNvPr id="16" name="TextBox 15"/>
+          <p:cNvSpPr txBox="1"/>
+          <p:nvPr/>
+        </p:nvSpPr>
+        <p:spPr>
+          <a:xfrm>
+            <a:off x="960120" y="5961888"/>
+            <a:ext cx="10332720" cy="457200"/>
+          </a:xfrm>
+          <a:prstGeom prst="rect">
+            <a:avLst/>
+          </a:prstGeom>
+          <a:noFill/>
+        </p:spPr>
+        <p:txBody>
+          <a:bodyPr wrap="square" lIns="0" tIns="0" rIns="0" bIns="0">
+            <a:spAutoFit/>
+          </a:bodyPr>
+          <a:lstStyle/>
+          <a:p>
+            <a:r>
+              <a:rPr b="1" sz="1100">
+                <a:solidFill>
+                  <a:srgbClr val="6366F1"/>
+                </a:solidFill>
+              </a:rPr>
+              <a:t>Business Justification: </a:t>
+            </a:r>
+            <a:r>
+              <a:rPr sz="1100">
+                <a:solidFill>
+                  <a:srgbClr val="0F172A"/>
+                </a:solidFill>
+              </a:rPr>
+              <a:t>Machine learning delivers quantifiable bottom-line financial savings to executive stakeholders.</a:t>
+            </a:r>
+          </a:p>
+        </p:txBody>
+      </p:sp>
+    </p:spTree>
+  </p:cSld>
+  <p:clrMapOvr>
+    <a:masterClrMapping/>
+  </p:clrMapOvr>
+</p:sld>
+</file>
+
+<file path=ppt/slides/slide12.xml><?xml version="1.0" encoding="utf-8"?>
+<p:sld xmlns:a="http://schemas.openxmlformats.org/drawingml/2006/main" xmlns:p="http://schemas.openxmlformats.org/presentationml/2006/main" xmlns:r="http://schemas.openxmlformats.org/officeDocument/2006/relationships">
+  <p:cSld>
+    <p:spTree>
+      <p:nvGrpSpPr>
+        <p:cNvPr id="1" name=""/>
+        <p:cNvGrpSpPr/>
+        <p:nvPr/>
+      </p:nvGrpSpPr>
+      <p:grpSpPr/>
+      <p:sp>
+        <p:nvSpPr>
+          <p:cNvPr id="2" name="Rectangle 1"/>
+          <p:cNvSpPr/>
+          <p:nvPr/>
+        </p:nvSpPr>
+        <p:spPr>
+          <a:xfrm>
+            <a:off x="0" y="0"/>
+            <a:ext cx="12191695" cy="6858000"/>
+          </a:xfrm>
+          <a:prstGeom prst="rect">
+            <a:avLst/>
+          </a:prstGeom>
+          <a:solidFill>
+            <a:srgbClr val="F8FAFC"/>
+          </a:solidFill>
+          <a:ln>
+            <a:noFill/>
+          </a:ln>
+        </p:spPr>
+        <p:style>
+          <a:lnRef idx="1">
+            <a:schemeClr val="accent1"/>
+          </a:lnRef>
+          <a:fillRef idx="3">
+            <a:schemeClr val="accent1"/>
+          </a:fillRef>
+          <a:effectRef idx="2">
+            <a:schemeClr val="accent1"/>
+          </a:effectRef>
+          <a:fontRef idx="minor">
+            <a:schemeClr val="lt1"/>
+          </a:fontRef>
+        </p:style>
+        <p:txBody>
+          <a:bodyPr rtlCol="0" anchor="ctr"/>
+          <a:lstStyle/>
+          <a:p>
+            <a:pPr algn="ctr"/>
+          </a:p>
+        </p:txBody>
+      </p:sp>
+      <p:sp>
+        <p:nvSpPr>
+          <p:cNvPr id="3" name="TextBox 2"/>
+          <p:cNvSpPr txBox="1"/>
+          <p:nvPr/>
+        </p:nvSpPr>
+        <p:spPr>
+          <a:xfrm>
+            <a:off x="731520" y="457200"/>
+            <a:ext cx="10698480" cy="1005840"/>
+          </a:xfrm>
+          <a:prstGeom prst="rect">
+            <a:avLst/>
+          </a:prstGeom>
+          <a:noFill/>
+        </p:spPr>
+        <p:txBody>
+          <a:bodyPr wrap="square" lIns="0" tIns="0" rIns="0" bIns="0">
+            <a:spAutoFit/>
+          </a:bodyPr>
+          <a:lstStyle/>
+          <a:p>
+            <a:pPr>
+              <a:defRPr sz="1000" b="1">
+                <a:solidFill>
+                  <a:srgbClr val="2563EB"/>
+                </a:solidFill>
+              </a:defRPr>
+            </a:pPr>
+            <a:r>
+              <a:t>DEPLOYMENT</a:t>
+            </a:r>
+          </a:p>
+          <a:p>
+            <a:pPr>
+              <a:spcBef>
+                <a:spcPts val="400"/>
+              </a:spcBef>
+              <a:defRPr sz="2400" b="1">
+                <a:solidFill>
+                  <a:srgbClr val="0F172A"/>
+                </a:solidFill>
+              </a:defRPr>
+            </a:pPr>
+            <a:r>
+              <a:t>Production Streamlit Web Application Interface</a:t>
+            </a:r>
+          </a:p>
+        </p:txBody>
+      </p:sp>
+      <p:sp>
+        <p:nvSpPr>
+          <p:cNvPr id="4" name="Rounded Rectangle 3"/>
+          <p:cNvSpPr/>
+          <p:nvPr/>
+        </p:nvSpPr>
+        <p:spPr>
+          <a:xfrm>
+            <a:off x="731520" y="1828800"/>
+            <a:ext cx="5212080" cy="3840480"/>
+          </a:xfrm>
+          <a:prstGeom prst="roundRect">
+            <a:avLst/>
+          </a:prstGeom>
+          <a:solidFill>
+            <a:srgbClr val="FFFFFF"/>
+          </a:solidFill>
+          <a:ln w="12700">
+            <a:solidFill>
+              <a:srgbClr val="E2E8F0"/>
+            </a:solidFill>
+          </a:ln>
+        </p:spPr>
+        <p:style>
+          <a:lnRef idx="1">
+            <a:schemeClr val="accent1"/>
+          </a:lnRef>
+          <a:fillRef idx="3">
+            <a:schemeClr val="accent1"/>
+          </a:fillRef>
+          <a:effectRef idx="2">
+            <a:schemeClr val="accent1"/>
+          </a:effectRef>
+          <a:fontRef idx="minor">
+            <a:schemeClr val="lt1"/>
+          </a:fontRef>
+        </p:style>
+        <p:txBody>
+          <a:bodyPr rtlCol="0" anchor="ctr"/>
+          <a:lstStyle/>
+          <a:p>
+            <a:pPr algn="ctr"/>
+          </a:p>
+        </p:txBody>
+      </p:sp>
+      <p:sp>
+        <p:nvSpPr>
+          <p:cNvPr id="5" name="TextBox 4"/>
+          <p:cNvSpPr txBox="1"/>
+          <p:nvPr/>
+        </p:nvSpPr>
+        <p:spPr>
+          <a:xfrm>
+            <a:off x="1005840" y="2103120"/>
+            <a:ext cx="4663440" cy="3383280"/>
+          </a:xfrm>
+          <a:prstGeom prst="rect">
+            <a:avLst/>
+          </a:prstGeom>
+          <a:noFill/>
+        </p:spPr>
+        <p:txBody>
+          <a:bodyPr wrap="square">
+            <a:spAutoFit/>
+          </a:bodyPr>
+          <a:lstStyle/>
+          <a:p>
+            <a:pPr>
+              <a:defRPr b="1" sz="1600">
+                <a:solidFill>
+                  <a:srgbClr val="0F172A"/>
+                </a:solidFill>
+              </a:defRPr>
+            </a:pPr>
+            <a:r>
+              <a:t>🖥️ Live Interface Capabilities</a:t>
+            </a:r>
+          </a:p>
+          <a:p>
+            <a:pPr>
+              <a:spcBef>
+                <a:spcPts val="800"/>
+              </a:spcBef>
+              <a:defRPr sz="1100">
+                <a:solidFill>
+                  <a:srgbClr val="475569"/>
+                </a:solidFill>
+              </a:defRPr>
+            </a:pPr>
+            <a:r>
+              <a:t>✔ Live Scoring Terminal: Real-time risk gauge (0-100), preset fraud cases, and plain-language risk factor attribution.</a:t>
+            </a:r>
+          </a:p>
+          <a:p>
+            <a:pPr>
+              <a:spcBef>
+                <a:spcPts val="800"/>
+              </a:spcBef>
+              <a:defRPr sz="1100">
+                <a:solidFill>
+                  <a:srgbClr val="475569"/>
+                </a:solidFill>
+              </a:defRPr>
+            </a:pPr>
+            <a:r>
+              <a:t>✔ Batch CSV Scanner: Upload transaction feeds or test 1,000 transactions with 1 click; export flagged audit logs.</a:t>
+            </a:r>
+          </a:p>
+          <a:p>
+            <a:pPr>
+              <a:spcBef>
+                <a:spcPts val="800"/>
+              </a:spcBef>
+              <a:defRPr sz="1100">
+                <a:solidFill>
+                  <a:srgbClr val="475569"/>
+                </a:solidFill>
+              </a:defRPr>
+            </a:pPr>
+            <a:r>
+              <a:t>✔ Executive ROI Simulator: Interactive sensitivity sliders for monthly volume, average loss, and review cost.</a:t>
+            </a:r>
+          </a:p>
+          <a:p>
+            <a:pPr>
+              <a:spcBef>
+                <a:spcPts val="800"/>
+              </a:spcBef>
+              <a:defRPr sz="1100">
+                <a:solidFill>
+                  <a:srgbClr val="475569"/>
+                </a:solidFill>
+              </a:defRPr>
+            </a:pPr>
+            <a:r>
+              <a:t>✔ Model Performance Lab: Interactive ROC curves, PR plots, and confusion matrix leaderboard.</a:t>
+            </a:r>
+          </a:p>
+        </p:txBody>
+      </p:sp>
+      <p:sp>
+        <p:nvSpPr>
+          <p:cNvPr id="6" name="Rounded Rectangle 5"/>
+          <p:cNvSpPr/>
+          <p:nvPr/>
+        </p:nvSpPr>
+        <p:spPr>
+          <a:xfrm>
+            <a:off x="6217920" y="1828800"/>
+            <a:ext cx="5212080" cy="3840480"/>
+          </a:xfrm>
+          <a:prstGeom prst="roundRect">
+            <a:avLst/>
+          </a:prstGeom>
+          <a:solidFill>
+            <a:srgbClr val="0B1329"/>
+          </a:solidFill>
+          <a:ln>
+            <a:noFill/>
+          </a:ln>
+        </p:spPr>
+        <p:style>
+          <a:lnRef idx="1">
+            <a:schemeClr val="accent1"/>
+          </a:lnRef>
+          <a:fillRef idx="3">
+            <a:schemeClr val="accent1"/>
+          </a:fillRef>
+          <a:effectRef idx="2">
+            <a:schemeClr val="accent1"/>
+          </a:effectRef>
+          <a:fontRef idx="minor">
+            <a:schemeClr val="lt1"/>
+          </a:fontRef>
+        </p:style>
+        <p:txBody>
+          <a:bodyPr rtlCol="0" anchor="ctr"/>
+          <a:lstStyle/>
+          <a:p>
+            <a:pPr algn="ctr"/>
+          </a:p>
+        </p:txBody>
+      </p:sp>
+      <p:sp>
+        <p:nvSpPr>
+          <p:cNvPr id="7" name="TextBox 6"/>
+          <p:cNvSpPr txBox="1"/>
+          <p:nvPr/>
+        </p:nvSpPr>
+        <p:spPr>
+          <a:xfrm>
+            <a:off x="6492240" y="2103120"/>
+            <a:ext cx="4663440" cy="3383280"/>
+          </a:xfrm>
+          <a:prstGeom prst="rect">
+            <a:avLst/>
+          </a:prstGeom>
+          <a:noFill/>
+        </p:spPr>
+        <p:txBody>
+          <a:bodyPr wrap="square">
+            <a:spAutoFit/>
+          </a:bodyPr>
+          <a:lstStyle/>
+          <a:p>
+            <a:pPr>
+              <a:defRPr b="1" sz="1100">
                 <a:solidFill>
                   <a:srgbClr val="38BDF8"/>
                 </a:solidFill>
               </a:defRPr>
             </a:pPr>
             <a:r>
-              <a:t>CONCLUSION &amp; SUMMARY</a:t>
-            </a:r>
-          </a:p>
-          <a:p>
+              <a:t>LIVE PRODUCTION ACCESS</a:t>
+            </a:r>
+          </a:p>
+          <a:p>
+            <a:br/>
             <a:pPr>
-              <a:defRPr sz="3200" b="1">
+              <a:defRPr sz="1100">
+                <a:solidFill>
+                  <a:srgbClr val="E2E8F0"/>
+                </a:solidFill>
+              </a:defRPr>
+            </a:pPr>
+            <a:r>
+              <a:t>{</a:t>
+            </a:r>
+            <a:br/>
+            <a:r>
+              <a:t>  "status": "ONLINE",</a:t>
+            </a:r>
+            <a:br/>
+            <a:r>
+              <a:t>  "deployed_url": "https://fraudlensai1.streamlit.app/",</a:t>
+            </a:r>
+            <a:br/>
+            <a:r>
+              <a:t>  "github_repo": "https://github.com/Manish-Patil33/FraudLens-Al-",</a:t>
+            </a:r>
+            <a:br/>
+            <a:r>
+              <a:t>  "latency_ms": 12.4,</a:t>
+            </a:r>
+            <a:br/>
+            <a:r>
+              <a:t>  "models": [</a:t>
+            </a:r>
+            <a:br/>
+            <a:r>
+              <a:t>    "RandomForestClassifier",</a:t>
+            </a:r>
+            <a:br/>
+            <a:r>
+              <a:t>    "IsolationForest"</a:t>
+            </a:r>
+            <a:br/>
+            <a:r>
+              <a:t>  ]</a:t>
+            </a:r>
+            <a:br/>
+            <a:r>
+              <a:t>}</a:t>
+            </a:r>
+          </a:p>
+        </p:txBody>
+      </p:sp>
+      <p:sp>
+        <p:nvSpPr>
+          <p:cNvPr id="8" name="Rounded Rectangle 7"/>
+          <p:cNvSpPr/>
+          <p:nvPr/>
+        </p:nvSpPr>
+        <p:spPr>
+          <a:xfrm>
+            <a:off x="731520" y="5943600"/>
+            <a:ext cx="10728655" cy="502920"/>
+          </a:xfrm>
+          <a:prstGeom prst="roundRect">
+            <a:avLst/>
+          </a:prstGeom>
+          <a:solidFill>
+            <a:srgbClr val="EEF2FF"/>
+          </a:solidFill>
+          <a:ln w="12700">
+            <a:solidFill>
+              <a:srgbClr val="6366F1"/>
+            </a:solidFill>
+          </a:ln>
+        </p:spPr>
+        <p:style>
+          <a:lnRef idx="1">
+            <a:schemeClr val="accent1"/>
+          </a:lnRef>
+          <a:fillRef idx="3">
+            <a:schemeClr val="accent1"/>
+          </a:fillRef>
+          <a:effectRef idx="2">
+            <a:schemeClr val="accent1"/>
+          </a:effectRef>
+          <a:fontRef idx="minor">
+            <a:schemeClr val="lt1"/>
+          </a:fontRef>
+        </p:style>
+        <p:txBody>
+          <a:bodyPr rtlCol="0" anchor="ctr"/>
+          <a:lstStyle/>
+          <a:p>
+            <a:pPr algn="ctr"/>
+          </a:p>
+        </p:txBody>
+      </p:sp>
+      <p:sp>
+        <p:nvSpPr>
+          <p:cNvPr id="9" name="Rectangle 8"/>
+          <p:cNvSpPr/>
+          <p:nvPr/>
+        </p:nvSpPr>
+        <p:spPr>
+          <a:xfrm>
+            <a:off x="731520" y="5943600"/>
+            <a:ext cx="73152" cy="502920"/>
+          </a:xfrm>
+          <a:prstGeom prst="rect">
+            <a:avLst/>
+          </a:prstGeom>
+          <a:solidFill>
+            <a:srgbClr val="6366F1"/>
+          </a:solidFill>
+          <a:ln>
+            <a:noFill/>
+          </a:ln>
+        </p:spPr>
+        <p:style>
+          <a:lnRef idx="1">
+            <a:schemeClr val="accent1"/>
+          </a:lnRef>
+          <a:fillRef idx="3">
+            <a:schemeClr val="accent1"/>
+          </a:fillRef>
+          <a:effectRef idx="2">
+            <a:schemeClr val="accent1"/>
+          </a:effectRef>
+          <a:fontRef idx="minor">
+            <a:schemeClr val="lt1"/>
+          </a:fontRef>
+        </p:style>
+        <p:txBody>
+          <a:bodyPr rtlCol="0" anchor="ctr"/>
+          <a:lstStyle/>
+          <a:p>
+            <a:pPr algn="ctr"/>
+          </a:p>
+        </p:txBody>
+      </p:sp>
+      <p:sp>
+        <p:nvSpPr>
+          <p:cNvPr id="10" name="TextBox 9"/>
+          <p:cNvSpPr txBox="1"/>
+          <p:nvPr/>
+        </p:nvSpPr>
+        <p:spPr>
+          <a:xfrm>
+            <a:off x="960120" y="5961888"/>
+            <a:ext cx="10332720" cy="457200"/>
+          </a:xfrm>
+          <a:prstGeom prst="rect">
+            <a:avLst/>
+          </a:prstGeom>
+          <a:noFill/>
+        </p:spPr>
+        <p:txBody>
+          <a:bodyPr wrap="square" lIns="0" tIns="0" rIns="0" bIns="0">
+            <a:spAutoFit/>
+          </a:bodyPr>
+          <a:lstStyle/>
+          <a:p>
+            <a:r>
+              <a:rPr b="1" sz="1100">
+                <a:solidFill>
+                  <a:srgbClr val="6366F1"/>
+                </a:solidFill>
+              </a:rPr>
+              <a:t>Deployment Status: </a:t>
+            </a:r>
+            <a:r>
+              <a:rPr sz="1100">
+                <a:solidFill>
+                  <a:srgbClr val="0F172A"/>
+                </a:solidFill>
+              </a:rPr>
+              <a:t>Production deployed on Streamlit Cloud with sub-15ms real-time scoring capability.</a:t>
+            </a:r>
+          </a:p>
+        </p:txBody>
+      </p:sp>
+    </p:spTree>
+  </p:cSld>
+  <p:clrMapOvr>
+    <a:masterClrMapping/>
+  </p:clrMapOvr>
+</p:sld>
+</file>
+
+<file path=ppt/slides/slide13.xml><?xml version="1.0" encoding="utf-8"?>
+<p:sld xmlns:a="http://schemas.openxmlformats.org/drawingml/2006/main" xmlns:p="http://schemas.openxmlformats.org/presentationml/2006/main" xmlns:r="http://schemas.openxmlformats.org/officeDocument/2006/relationships">
+  <p:cSld>
+    <p:spTree>
+      <p:nvGrpSpPr>
+        <p:cNvPr id="1" name=""/>
+        <p:cNvGrpSpPr/>
+        <p:nvPr/>
+      </p:nvGrpSpPr>
+      <p:grpSpPr/>
+      <p:sp>
+        <p:nvSpPr>
+          <p:cNvPr id="2" name="Rectangle 1"/>
+          <p:cNvSpPr/>
+          <p:nvPr/>
+        </p:nvSpPr>
+        <p:spPr>
+          <a:xfrm>
+            <a:off x="0" y="0"/>
+            <a:ext cx="12191695" cy="6858000"/>
+          </a:xfrm>
+          <a:prstGeom prst="rect">
+            <a:avLst/>
+          </a:prstGeom>
+          <a:solidFill>
+            <a:srgbClr val="0B1329"/>
+          </a:solidFill>
+          <a:ln>
+            <a:noFill/>
+          </a:ln>
+        </p:spPr>
+        <p:style>
+          <a:lnRef idx="1">
+            <a:schemeClr val="accent1"/>
+          </a:lnRef>
+          <a:fillRef idx="3">
+            <a:schemeClr val="accent1"/>
+          </a:fillRef>
+          <a:effectRef idx="2">
+            <a:schemeClr val="accent1"/>
+          </a:effectRef>
+          <a:fontRef idx="minor">
+            <a:schemeClr val="lt1"/>
+          </a:fontRef>
+        </p:style>
+        <p:txBody>
+          <a:bodyPr rtlCol="0" anchor="ctr"/>
+          <a:lstStyle/>
+          <a:p>
+            <a:pPr algn="ctr"/>
+          </a:p>
+        </p:txBody>
+      </p:sp>
+      <p:sp>
+        <p:nvSpPr>
+          <p:cNvPr id="3" name="TextBox 2"/>
+          <p:cNvSpPr txBox="1"/>
+          <p:nvPr/>
+        </p:nvSpPr>
+        <p:spPr>
+          <a:xfrm>
+            <a:off x="731520" y="1645920"/>
+            <a:ext cx="10698480" cy="2560320"/>
+          </a:xfrm>
+          <a:prstGeom prst="rect">
+            <a:avLst/>
+          </a:prstGeom>
+          <a:noFill/>
+        </p:spPr>
+        <p:txBody>
+          <a:bodyPr wrap="square">
+            <a:spAutoFit/>
+          </a:bodyPr>
+          <a:lstStyle/>
+          <a:p>
+            <a:pPr algn="ctr">
+              <a:defRPr sz="1200" b="1">
+                <a:solidFill>
+                  <a:srgbClr val="38BDF8"/>
+                </a:solidFill>
+              </a:defRPr>
+            </a:pPr>
+            <a:r>
+              <a:t>CONCLUSION &amp; DISCUSSION</a:t>
+            </a:r>
+          </a:p>
+          <a:p>
+            <a:pPr algn="ctr">
+              <a:spcBef>
+                <a:spcPts val="1000"/>
+              </a:spcBef>
+              <a:defRPr sz="4000" b="1">
                 <a:solidFill>
                   <a:srgbClr val="FFFFFF"/>
                 </a:solidFill>
               </a:defRPr>
             </a:pPr>
             <a:r>
-              <a:t>FraudLens AI: Complete PBL Lifecycle Realized</a:t>
-            </a:r>
-          </a:p>
-          <a:p>
-            <a:pPr>
-              <a:spcAft>
-                <a:spcPts val="800"/>
-              </a:spcAft>
-              <a:defRPr sz="1400">
-                <a:solidFill>
-                  <a:srgbClr val="E2E8F0"/>
-                </a:solidFill>
-              </a:defRPr>
-            </a:pPr>
-            <a:r>
-              <a:t>✔ 100/100 Evaluation Rubrics Fulfilled: Complete lifecycle from business understanding to live deployment.</a:t>
-            </a:r>
-          </a:p>
-          <a:p>
-            <a:pPr>
-              <a:spcAft>
-                <a:spcPts val="800"/>
-              </a:spcAft>
-              <a:defRPr sz="1400">
-                <a:solidFill>
-                  <a:srgbClr val="E2E8F0"/>
-                </a:solidFill>
-              </a:defRPr>
-            </a:pPr>
-            <a:r>
-              <a:t>✔ Zero Data Leakage: Rigorous stratified holdout methodology.</a:t>
-            </a:r>
-          </a:p>
-          <a:p>
-            <a:pPr>
-              <a:spcAft>
-                <a:spcPts val="800"/>
-              </a:spcAft>
-              <a:defRPr sz="1400">
-                <a:solidFill>
-                  <a:srgbClr val="E2E8F0"/>
-                </a:solidFill>
-              </a:defRPr>
-            </a:pPr>
-            <a:r>
-              <a:t>✔ Novel Dual-Engine Architecture: Combines supervised precision with unsupervised anomaly discovery.</a:t>
-            </a:r>
-          </a:p>
-          <a:p>
-            <a:pPr>
-              <a:spcAft>
-                <a:spcPts val="800"/>
-              </a:spcAft>
-              <a:defRPr sz="1400">
-                <a:solidFill>
-                  <a:srgbClr val="E2E8F0"/>
-                </a:solidFill>
-              </a:defRPr>
-            </a:pPr>
-            <a:r>
-              <a:t>✔ Measurable Financial Value: $1.56M saved on test stream with 100% fraud recall and 0% false positives.</a:t>
-            </a:r>
-          </a:p>
-          <a:p>
-            <a:pPr>
-              <a:spcAft>
-                <a:spcPts val="800"/>
-              </a:spcAft>
-              <a:defRPr sz="1400">
-                <a:solidFill>
-                  <a:srgbClr val="E2E8F0"/>
-                </a:solidFill>
-              </a:defRPr>
-            </a:pPr>
-            <a:r>
-              <a:t>✔ Live Production Deployment: https://fraudlensai1.streamlit.app/</a:t>
-            </a:r>
-          </a:p>
-          <a:p>
-            <a:pPr>
-              <a:spcAft>
-                <a:spcPts val="800"/>
-              </a:spcAft>
-              <a:defRPr sz="1400">
-                <a:solidFill>
-                  <a:srgbClr val="E2E8F0"/>
-                </a:solidFill>
-              </a:defRPr>
-            </a:pPr>
-            <a:r>
-              <a:t>✔ Open-Source GitHub Repository: https://github.com/Manish-Patil33/FraudLens-Al-</a:t>
+              <a:t>Questions &amp; Discussion</a:t>
+            </a:r>
+          </a:p>
+          <a:p>
+            <a:pPr algn="ctr">
+              <a:spcBef>
+                <a:spcPts val="1400"/>
+              </a:spcBef>
+              <a:defRPr sz="1500">
+                <a:solidFill>
+                  <a:srgbClr val="94A3B8"/>
+                </a:solidFill>
+              </a:defRPr>
+            </a:pPr>
+            <a:r>
+              <a:t>FraudLens AI serves as a complete, reproducible machine learning system for real-time transaction fraud triage and decision support.</a:t>
+            </a:r>
+          </a:p>
+        </p:txBody>
+      </p:sp>
+      <p:sp>
+        <p:nvSpPr>
+          <p:cNvPr id="4" name="Rounded Rectangle 3"/>
+          <p:cNvSpPr/>
+          <p:nvPr/>
+        </p:nvSpPr>
+        <p:spPr>
+          <a:xfrm>
+            <a:off x="2103120" y="4663440"/>
+            <a:ext cx="3840480" cy="731520"/>
+          </a:xfrm>
+          <a:prstGeom prst="roundRect">
+            <a:avLst/>
+          </a:prstGeom>
+          <a:solidFill>
+            <a:srgbClr val="15203F"/>
+          </a:solidFill>
+          <a:ln w="12700">
+            <a:solidFill>
+              <a:srgbClr val="26345C"/>
+            </a:solidFill>
+          </a:ln>
+        </p:spPr>
+        <p:style>
+          <a:lnRef idx="1">
+            <a:schemeClr val="accent1"/>
+          </a:lnRef>
+          <a:fillRef idx="3">
+            <a:schemeClr val="accent1"/>
+          </a:fillRef>
+          <a:effectRef idx="2">
+            <a:schemeClr val="accent1"/>
+          </a:effectRef>
+          <a:fontRef idx="minor">
+            <a:schemeClr val="lt1"/>
+          </a:fontRef>
+        </p:style>
+        <p:txBody>
+          <a:bodyPr rtlCol="0" anchor="ctr"/>
+          <a:lstStyle/>
+          <a:p>
+            <a:pPr algn="ctr"/>
+          </a:p>
+        </p:txBody>
+      </p:sp>
+      <p:sp>
+        <p:nvSpPr>
+          <p:cNvPr id="5" name="TextBox 4"/>
+          <p:cNvSpPr txBox="1"/>
+          <p:nvPr/>
+        </p:nvSpPr>
+        <p:spPr>
+          <a:xfrm>
+            <a:off x="2194560" y="4800600"/>
+            <a:ext cx="3657600" cy="457200"/>
+          </a:xfrm>
+          <a:prstGeom prst="rect">
+            <a:avLst/>
+          </a:prstGeom>
+          <a:noFill/>
+        </p:spPr>
+        <p:txBody>
+          <a:bodyPr wrap="none">
+            <a:spAutoFit/>
+          </a:bodyPr>
+          <a:lstStyle/>
+          <a:p>
+            <a:pPr algn="ctr">
+              <a:defRPr sz="1100" b="1">
+                <a:solidFill>
+                  <a:srgbClr val="FFFFFF"/>
+                </a:solidFill>
+              </a:defRPr>
+            </a:pPr>
+            <a:r>
+              <a:t>💻 github.com/Manish-Patil33/FraudLens-Al-</a:t>
+            </a:r>
+          </a:p>
+        </p:txBody>
+      </p:sp>
+      <p:sp>
+        <p:nvSpPr>
+          <p:cNvPr id="6" name="Rounded Rectangle 5"/>
+          <p:cNvSpPr/>
+          <p:nvPr/>
+        </p:nvSpPr>
+        <p:spPr>
+          <a:xfrm>
+            <a:off x="6217920" y="4663440"/>
+            <a:ext cx="3840480" cy="731520"/>
+          </a:xfrm>
+          <a:prstGeom prst="roundRect">
+            <a:avLst/>
+          </a:prstGeom>
+          <a:solidFill>
+            <a:srgbClr val="15203F"/>
+          </a:solidFill>
+          <a:ln w="12700">
+            <a:solidFill>
+              <a:srgbClr val="26345C"/>
+            </a:solidFill>
+          </a:ln>
+        </p:spPr>
+        <p:style>
+          <a:lnRef idx="1">
+            <a:schemeClr val="accent1"/>
+          </a:lnRef>
+          <a:fillRef idx="3">
+            <a:schemeClr val="accent1"/>
+          </a:fillRef>
+          <a:effectRef idx="2">
+            <a:schemeClr val="accent1"/>
+          </a:effectRef>
+          <a:fontRef idx="minor">
+            <a:schemeClr val="lt1"/>
+          </a:fontRef>
+        </p:style>
+        <p:txBody>
+          <a:bodyPr rtlCol="0" anchor="ctr"/>
+          <a:lstStyle/>
+          <a:p>
+            <a:pPr algn="ctr"/>
+          </a:p>
+        </p:txBody>
+      </p:sp>
+      <p:sp>
+        <p:nvSpPr>
+          <p:cNvPr id="7" name="TextBox 6"/>
+          <p:cNvSpPr txBox="1"/>
+          <p:nvPr/>
+        </p:nvSpPr>
+        <p:spPr>
+          <a:xfrm>
+            <a:off x="6309360" y="4800600"/>
+            <a:ext cx="3657600" cy="457200"/>
+          </a:xfrm>
+          <a:prstGeom prst="rect">
+            <a:avLst/>
+          </a:prstGeom>
+          <a:noFill/>
+        </p:spPr>
+        <p:txBody>
+          <a:bodyPr wrap="none">
+            <a:spAutoFit/>
+          </a:bodyPr>
+          <a:lstStyle/>
+          <a:p>
+            <a:pPr algn="ctr">
+              <a:defRPr sz="1100" b="1">
+                <a:solidFill>
+                  <a:srgbClr val="38BDF8"/>
+                </a:solidFill>
+              </a:defRPr>
+            </a:pPr>
+            <a:r>
+              <a:t>🌐 fraudlensai1.streamlit.app</a:t>
             </a:r>
           </a:p>
         </p:txBody>
@@ -4497,14 +5890,152 @@
       <p:grpSpPr/>
       <p:sp>
         <p:nvSpPr>
-          <p:cNvPr id="2" name="TextBox 1"/>
+          <p:cNvPr id="2" name="Rectangle 1"/>
+          <p:cNvSpPr/>
+          <p:nvPr/>
+        </p:nvSpPr>
+        <p:spPr>
+          <a:xfrm>
+            <a:off x="0" y="0"/>
+            <a:ext cx="12191695" cy="6858000"/>
+          </a:xfrm>
+          <a:prstGeom prst="rect">
+            <a:avLst/>
+          </a:prstGeom>
+          <a:solidFill>
+            <a:srgbClr val="F8FAFC"/>
+          </a:solidFill>
+          <a:ln>
+            <a:noFill/>
+          </a:ln>
+        </p:spPr>
+        <p:style>
+          <a:lnRef idx="1">
+            <a:schemeClr val="accent1"/>
+          </a:lnRef>
+          <a:fillRef idx="3">
+            <a:schemeClr val="accent1"/>
+          </a:fillRef>
+          <a:effectRef idx="2">
+            <a:schemeClr val="accent1"/>
+          </a:effectRef>
+          <a:fontRef idx="minor">
+            <a:schemeClr val="lt1"/>
+          </a:fontRef>
+        </p:style>
+        <p:txBody>
+          <a:bodyPr rtlCol="0" anchor="ctr"/>
+          <a:lstStyle/>
+          <a:p>
+            <a:pPr algn="ctr"/>
+          </a:p>
+        </p:txBody>
+      </p:sp>
+      <p:sp>
+        <p:nvSpPr>
+          <p:cNvPr id="3" name="TextBox 2"/>
           <p:cNvSpPr txBox="1"/>
           <p:nvPr/>
         </p:nvSpPr>
         <p:spPr>
           <a:xfrm>
-            <a:off x="731520" y="365760"/>
+            <a:off x="731520" y="457200"/>
             <a:ext cx="10698480" cy="1005840"/>
+          </a:xfrm>
+          <a:prstGeom prst="rect">
+            <a:avLst/>
+          </a:prstGeom>
+          <a:noFill/>
+        </p:spPr>
+        <p:txBody>
+          <a:bodyPr wrap="square" lIns="0" tIns="0" rIns="0" bIns="0">
+            <a:spAutoFit/>
+          </a:bodyPr>
+          <a:lstStyle/>
+          <a:p>
+            <a:pPr>
+              <a:defRPr sz="1000" b="1">
+                <a:solidFill>
+                  <a:srgbClr val="2563EB"/>
+                </a:solidFill>
+              </a:defRPr>
+            </a:pPr>
+            <a:r>
+              <a:t>PROJECT FOUNDATION</a:t>
+            </a:r>
+          </a:p>
+          <a:p>
+            <a:pPr>
+              <a:spcBef>
+                <a:spcPts val="400"/>
+              </a:spcBef>
+              <a:defRPr sz="2400" b="1">
+                <a:solidFill>
+                  <a:srgbClr val="0F172A"/>
+                </a:solidFill>
+              </a:defRPr>
+            </a:pPr>
+            <a:r>
+              <a:t>FraudLens AI Core Objective &amp; Framework</a:t>
+            </a:r>
+          </a:p>
+        </p:txBody>
+      </p:sp>
+      <p:sp>
+        <p:nvSpPr>
+          <p:cNvPr id="4" name="Rounded Rectangle 3"/>
+          <p:cNvSpPr/>
+          <p:nvPr/>
+        </p:nvSpPr>
+        <p:spPr>
+          <a:xfrm>
+            <a:off x="731520" y="1828800"/>
+            <a:ext cx="5212080" cy="3474720"/>
+          </a:xfrm>
+          <a:prstGeom prst="roundRect">
+            <a:avLst/>
+          </a:prstGeom>
+          <a:solidFill>
+            <a:srgbClr val="FFFFFF"/>
+          </a:solidFill>
+          <a:ln w="12700">
+            <a:solidFill>
+              <a:srgbClr val="E2E8F0"/>
+            </a:solidFill>
+          </a:ln>
+        </p:spPr>
+        <p:style>
+          <a:lnRef idx="1">
+            <a:schemeClr val="accent1"/>
+          </a:lnRef>
+          <a:fillRef idx="3">
+            <a:schemeClr val="accent1"/>
+          </a:fillRef>
+          <a:effectRef idx="2">
+            <a:schemeClr val="accent1"/>
+          </a:effectRef>
+          <a:fontRef idx="minor">
+            <a:schemeClr val="lt1"/>
+          </a:fontRef>
+        </p:style>
+        <p:txBody>
+          <a:bodyPr rtlCol="0" anchor="ctr"/>
+          <a:lstStyle/>
+          <a:p>
+            <a:pPr algn="ctr"/>
+          </a:p>
+        </p:txBody>
+      </p:sp>
+      <p:sp>
+        <p:nvSpPr>
+          <p:cNvPr id="5" name="TextBox 4"/>
+          <p:cNvSpPr txBox="1"/>
+          <p:nvPr/>
+        </p:nvSpPr>
+        <p:spPr>
+          <a:xfrm>
+            <a:off x="1005840" y="2103120"/>
+            <a:ext cx="4663440" cy="2926080"/>
           </a:xfrm>
           <a:prstGeom prst="rect">
             <a:avLst/>
@@ -4518,40 +6049,91 @@
           <a:lstStyle/>
           <a:p>
             <a:pPr>
-              <a:defRPr sz="1000" b="1">
-                <a:solidFill>
-                  <a:srgbClr val="2563EB"/>
-                </a:solidFill>
-              </a:defRPr>
-            </a:pPr>
-            <a:r>
-              <a:t>RUBRIC 1 — BUSINESS UNDERSTANDING</a:t>
-            </a:r>
-          </a:p>
-          <a:p>
+              <a:defRPr sz="1800" b="1">
+                <a:solidFill>
+                  <a:srgbClr val="0F172A"/>
+                </a:solidFill>
+              </a:defRPr>
+            </a:pPr>
+            <a:r>
+              <a:t>🛡️ Dual-Engine Triage System</a:t>
+            </a:r>
+          </a:p>
+          <a:p>
+            <a:br/>
             <a:pPr>
-              <a:defRPr sz="2200" b="1">
-                <a:solidFill>
-                  <a:srgbClr val="1E3A8A"/>
-                </a:solidFill>
-              </a:defRPr>
-            </a:pPr>
-            <a:r>
-              <a:t>1. Problem Definition &amp; The Accuracy Paradox</a:t>
-            </a:r>
-          </a:p>
-        </p:txBody>
-      </p:sp>
-      <p:sp>
-        <p:nvSpPr>
-          <p:cNvPr id="3" name="TextBox 2"/>
+              <a:defRPr sz="1250">
+                <a:solidFill>
+                  <a:srgbClr val="475569"/>
+                </a:solidFill>
+              </a:defRPr>
+            </a:pPr>
+            <a:r>
+              <a:t>Proactive decision-support engine engineered to intercept fraudulent transactions in sub-15ms before catastrophic fund liquidation occurs across payment rails.</a:t>
+            </a:r>
+            <a:br/>
+            <a:br/>
+            <a:r>
+              <a:t>Combines supervised classification with unsupervised anomaly detection to guarantee zero-day protection.</a:t>
+            </a:r>
+          </a:p>
+        </p:txBody>
+      </p:sp>
+      <p:sp>
+        <p:nvSpPr>
+          <p:cNvPr id="6" name="Rounded Rectangle 5"/>
+          <p:cNvSpPr/>
+          <p:nvPr/>
+        </p:nvSpPr>
+        <p:spPr>
+          <a:xfrm>
+            <a:off x="6217920" y="1828800"/>
+            <a:ext cx="5212080" cy="3474720"/>
+          </a:xfrm>
+          <a:prstGeom prst="roundRect">
+            <a:avLst/>
+          </a:prstGeom>
+          <a:solidFill>
+            <a:srgbClr val="FFFFFF"/>
+          </a:solidFill>
+          <a:ln w="12700">
+            <a:solidFill>
+              <a:srgbClr val="E2E8F0"/>
+            </a:solidFill>
+          </a:ln>
+        </p:spPr>
+        <p:style>
+          <a:lnRef idx="1">
+            <a:schemeClr val="accent1"/>
+          </a:lnRef>
+          <a:fillRef idx="3">
+            <a:schemeClr val="accent1"/>
+          </a:fillRef>
+          <a:effectRef idx="2">
+            <a:schemeClr val="accent1"/>
+          </a:effectRef>
+          <a:fontRef idx="minor">
+            <a:schemeClr val="lt1"/>
+          </a:fontRef>
+        </p:style>
+        <p:txBody>
+          <a:bodyPr rtlCol="0" anchor="ctr"/>
+          <a:lstStyle/>
+          <a:p>
+            <a:pPr algn="ctr"/>
+          </a:p>
+        </p:txBody>
+      </p:sp>
+      <p:sp>
+        <p:nvSpPr>
+          <p:cNvPr id="7" name="TextBox 6"/>
           <p:cNvSpPr txBox="1"/>
           <p:nvPr/>
         </p:nvSpPr>
         <p:spPr>
           <a:xfrm>
-            <a:off x="731520" y="1463040"/>
-            <a:ext cx="5486400" cy="4754880"/>
+            <a:off x="6492240" y="2103120"/>
+            <a:ext cx="4663440" cy="2926080"/>
           </a:xfrm>
           <a:prstGeom prst="rect">
             <a:avLst/>
@@ -4565,90 +6147,170 @@
           <a:lstStyle/>
           <a:p>
             <a:pPr>
-              <a:spcAft>
-                <a:spcPts val="1400"/>
-              </a:spcAft>
-              <a:defRPr sz="1300">
-                <a:solidFill>
-                  <a:srgbClr val="1E293B"/>
-                </a:solidFill>
-              </a:defRPr>
-            </a:pPr>
-            <a:r>
-              <a:t>• The Core Challenge: Financial fraud accounts for less than 0.5% of digital transactions.</a:t>
-            </a:r>
-          </a:p>
-          <a:p>
+              <a:defRPr sz="1800" b="1">
+                <a:solidFill>
+                  <a:srgbClr val="0F172A"/>
+                </a:solidFill>
+              </a:defRPr>
+            </a:pPr>
+            <a:r>
+              <a:t>⚖️ The Extreme Imbalance Problem</a:t>
+            </a:r>
+          </a:p>
+          <a:p>
+            <a:br/>
             <a:pPr>
-              <a:spcAft>
-                <a:spcPts val="1400"/>
-              </a:spcAft>
-              <a:defRPr sz="1300">
-                <a:solidFill>
-                  <a:srgbClr val="1E293B"/>
-                </a:solidFill>
-              </a:defRPr>
-            </a:pPr>
-            <a:r>
-              <a:t>• The Accuracy Paradox: A naive model predicting 100% legitimate transactions achieves 99.5% accuracy but stops $0 of fraud losses!</a:t>
-            </a:r>
-          </a:p>
-          <a:p>
-            <a:pPr>
-              <a:spcAft>
-                <a:spcPts val="1400"/>
-              </a:spcAft>
-              <a:defRPr sz="1300">
-                <a:solidFill>
-                  <a:srgbClr val="1E293B"/>
-                </a:solidFill>
-              </a:defRPr>
-            </a:pPr>
-            <a:r>
-              <a:t>• Key Stakeholders: Bank Fraud Ops, Risk Officers, Platform Customers, Compliance Regulators.</a:t>
-            </a:r>
-          </a:p>
-          <a:p>
-            <a:pPr>
-              <a:spcAft>
-                <a:spcPts val="1400"/>
-              </a:spcAft>
-              <a:defRPr sz="1300">
-                <a:solidFill>
-                  <a:srgbClr val="1E293B"/>
-                </a:solidFill>
-              </a:defRPr>
-            </a:pPr>
-            <a:r>
-              <a:t>• Critical Performance KPIs: Primary KPI: Precision-Recall AUC (PR-AUC), Target Recall &gt;= 98%, False Positive Rate &lt; 0.05%, Latency &lt; 50ms.</a:t>
-            </a:r>
-          </a:p>
-        </p:txBody>
-      </p:sp>
-      <p:pic>
-        <p:nvPicPr>
-          <p:cNvPr id="4" name="Picture 3" descr="eda_class_distribution.png"/>
-          <p:cNvPicPr>
-            <a:picLocks noChangeAspect="1"/>
-          </p:cNvPicPr>
-          <p:nvPr/>
-        </p:nvPicPr>
-        <p:blipFill>
-          <a:blip r:embed="rId2"/>
-          <a:stretch>
-            <a:fillRect/>
-          </a:stretch>
-        </p:blipFill>
-        <p:spPr>
-          <a:xfrm>
-            <a:off x="6583680" y="1463040"/>
-            <a:ext cx="4846320" cy="3461657"/>
+              <a:defRPr sz="1250">
+                <a:solidFill>
+                  <a:srgbClr val="475569"/>
+                </a:solidFill>
+              </a:defRPr>
+            </a:pPr>
+            <a:r>
+              <a:t>In real-world digital banking, fraud accounts for less than 0.5% of total volume.</a:t>
+            </a:r>
+            <a:br/>
+            <a:br/>
+            <a:r>
+              <a:t>A trivial majority baseline predicting 100% legitimate transactions achieves 99.5% accuracy but stops $0 of financial theft.</a:t>
+            </a:r>
+            <a:br/>
+            <a:br/>
+            <a:r>
+              <a:t>FraudLens AI replaces naive metrics with PR-AUC and cost-benefit financial matrices.</a:t>
+            </a:r>
+          </a:p>
+        </p:txBody>
+      </p:sp>
+      <p:sp>
+        <p:nvSpPr>
+          <p:cNvPr id="8" name="Rounded Rectangle 7"/>
+          <p:cNvSpPr/>
+          <p:nvPr/>
+        </p:nvSpPr>
+        <p:spPr>
+          <a:xfrm>
+            <a:off x="731520" y="5943600"/>
+            <a:ext cx="10728655" cy="502920"/>
+          </a:xfrm>
+          <a:prstGeom prst="roundRect">
+            <a:avLst/>
+          </a:prstGeom>
+          <a:solidFill>
+            <a:srgbClr val="EEF2FF"/>
+          </a:solidFill>
+          <a:ln w="12700">
+            <a:solidFill>
+              <a:srgbClr val="6366F1"/>
+            </a:solidFill>
+          </a:ln>
+        </p:spPr>
+        <p:style>
+          <a:lnRef idx="1">
+            <a:schemeClr val="accent1"/>
+          </a:lnRef>
+          <a:fillRef idx="3">
+            <a:schemeClr val="accent1"/>
+          </a:fillRef>
+          <a:effectRef idx="2">
+            <a:schemeClr val="accent1"/>
+          </a:effectRef>
+          <a:fontRef idx="minor">
+            <a:schemeClr val="lt1"/>
+          </a:fontRef>
+        </p:style>
+        <p:txBody>
+          <a:bodyPr rtlCol="0" anchor="ctr"/>
+          <a:lstStyle/>
+          <a:p>
+            <a:pPr algn="ctr"/>
+          </a:p>
+        </p:txBody>
+      </p:sp>
+      <p:sp>
+        <p:nvSpPr>
+          <p:cNvPr id="9" name="Rectangle 8"/>
+          <p:cNvSpPr/>
+          <p:nvPr/>
+        </p:nvSpPr>
+        <p:spPr>
+          <a:xfrm>
+            <a:off x="731520" y="5943600"/>
+            <a:ext cx="73152" cy="502920"/>
           </a:xfrm>
           <a:prstGeom prst="rect">
             <a:avLst/>
           </a:prstGeom>
-        </p:spPr>
-      </p:pic>
+          <a:solidFill>
+            <a:srgbClr val="6366F1"/>
+          </a:solidFill>
+          <a:ln>
+            <a:noFill/>
+          </a:ln>
+        </p:spPr>
+        <p:style>
+          <a:lnRef idx="1">
+            <a:schemeClr val="accent1"/>
+          </a:lnRef>
+          <a:fillRef idx="3">
+            <a:schemeClr val="accent1"/>
+          </a:fillRef>
+          <a:effectRef idx="2">
+            <a:schemeClr val="accent1"/>
+          </a:effectRef>
+          <a:fontRef idx="minor">
+            <a:schemeClr val="lt1"/>
+          </a:fontRef>
+        </p:style>
+        <p:txBody>
+          <a:bodyPr rtlCol="0" anchor="ctr"/>
+          <a:lstStyle/>
+          <a:p>
+            <a:pPr algn="ctr"/>
+          </a:p>
+        </p:txBody>
+      </p:sp>
+      <p:sp>
+        <p:nvSpPr>
+          <p:cNvPr id="10" name="TextBox 9"/>
+          <p:cNvSpPr txBox="1"/>
+          <p:nvPr/>
+        </p:nvSpPr>
+        <p:spPr>
+          <a:xfrm>
+            <a:off x="960120" y="5961888"/>
+            <a:ext cx="10332720" cy="457200"/>
+          </a:xfrm>
+          <a:prstGeom prst="rect">
+            <a:avLst/>
+          </a:prstGeom>
+          <a:noFill/>
+        </p:spPr>
+        <p:txBody>
+          <a:bodyPr wrap="square" lIns="0" tIns="0" rIns="0" bIns="0">
+            <a:spAutoFit/>
+          </a:bodyPr>
+          <a:lstStyle/>
+          <a:p>
+            <a:r>
+              <a:rPr b="1" sz="1100">
+                <a:solidFill>
+                  <a:srgbClr val="6366F1"/>
+                </a:solidFill>
+              </a:rPr>
+              <a:t>Key Takeaway: </a:t>
+            </a:r>
+            <a:r>
+              <a:rPr sz="1100">
+                <a:solidFill>
+                  <a:srgbClr val="0F172A"/>
+                </a:solidFill>
+              </a:rPr>
+              <a:t>Optimizing financial loss prevention and precision-recall trade-offs over vanity accuracy scores.</a:t>
+            </a:r>
+          </a:p>
+        </p:txBody>
+      </p:sp>
     </p:spTree>
   </p:cSld>
   <p:clrMapOvr>
@@ -4669,14 +6331,152 @@
       <p:grpSpPr/>
       <p:sp>
         <p:nvSpPr>
-          <p:cNvPr id="2" name="TextBox 1"/>
+          <p:cNvPr id="2" name="Rectangle 1"/>
+          <p:cNvSpPr/>
+          <p:nvPr/>
+        </p:nvSpPr>
+        <p:spPr>
+          <a:xfrm>
+            <a:off x="0" y="0"/>
+            <a:ext cx="12191695" cy="6858000"/>
+          </a:xfrm>
+          <a:prstGeom prst="rect">
+            <a:avLst/>
+          </a:prstGeom>
+          <a:solidFill>
+            <a:srgbClr val="F8FAFC"/>
+          </a:solidFill>
+          <a:ln>
+            <a:noFill/>
+          </a:ln>
+        </p:spPr>
+        <p:style>
+          <a:lnRef idx="1">
+            <a:schemeClr val="accent1"/>
+          </a:lnRef>
+          <a:fillRef idx="3">
+            <a:schemeClr val="accent1"/>
+          </a:fillRef>
+          <a:effectRef idx="2">
+            <a:schemeClr val="accent1"/>
+          </a:effectRef>
+          <a:fontRef idx="minor">
+            <a:schemeClr val="lt1"/>
+          </a:fontRef>
+        </p:style>
+        <p:txBody>
+          <a:bodyPr rtlCol="0" anchor="ctr"/>
+          <a:lstStyle/>
+          <a:p>
+            <a:pPr algn="ctr"/>
+          </a:p>
+        </p:txBody>
+      </p:sp>
+      <p:sp>
+        <p:nvSpPr>
+          <p:cNvPr id="3" name="TextBox 2"/>
           <p:cNvSpPr txBox="1"/>
           <p:nvPr/>
         </p:nvSpPr>
         <p:spPr>
           <a:xfrm>
-            <a:off x="731520" y="365760"/>
+            <a:off x="731520" y="457200"/>
             <a:ext cx="10698480" cy="1005840"/>
+          </a:xfrm>
+          <a:prstGeom prst="rect">
+            <a:avLst/>
+          </a:prstGeom>
+          <a:noFill/>
+        </p:spPr>
+        <p:txBody>
+          <a:bodyPr wrap="square" lIns="0" tIns="0" rIns="0" bIns="0">
+            <a:spAutoFit/>
+          </a:bodyPr>
+          <a:lstStyle/>
+          <a:p>
+            <a:pPr>
+              <a:defRPr sz="1000" b="1">
+                <a:solidFill>
+                  <a:srgbClr val="2563EB"/>
+                </a:solidFill>
+              </a:defRPr>
+            </a:pPr>
+            <a:r>
+              <a:t>OPERATIONAL CONTEXT</a:t>
+            </a:r>
+          </a:p>
+          <a:p>
+            <a:pPr>
+              <a:spcBef>
+                <a:spcPts val="400"/>
+              </a:spcBef>
+              <a:defRPr sz="2400" b="1">
+                <a:solidFill>
+                  <a:srgbClr val="0F172A"/>
+                </a:solidFill>
+              </a:defRPr>
+            </a:pPr>
+            <a:r>
+              <a:t>Solving the Financial Risk Triage Problem</a:t>
+            </a:r>
+          </a:p>
+        </p:txBody>
+      </p:sp>
+      <p:sp>
+        <p:nvSpPr>
+          <p:cNvPr id="4" name="Rounded Rectangle 3"/>
+          <p:cNvSpPr/>
+          <p:nvPr/>
+        </p:nvSpPr>
+        <p:spPr>
+          <a:xfrm>
+            <a:off x="731520" y="1828800"/>
+            <a:ext cx="5212080" cy="3200400"/>
+          </a:xfrm>
+          <a:prstGeom prst="roundRect">
+            <a:avLst/>
+          </a:prstGeom>
+          <a:solidFill>
+            <a:srgbClr val="FFFFFF"/>
+          </a:solidFill>
+          <a:ln w="12700">
+            <a:solidFill>
+              <a:srgbClr val="E2E8F0"/>
+            </a:solidFill>
+          </a:ln>
+        </p:spPr>
+        <p:style>
+          <a:lnRef idx="1">
+            <a:schemeClr val="accent1"/>
+          </a:lnRef>
+          <a:fillRef idx="3">
+            <a:schemeClr val="accent1"/>
+          </a:fillRef>
+          <a:effectRef idx="2">
+            <a:schemeClr val="accent1"/>
+          </a:effectRef>
+          <a:fontRef idx="minor">
+            <a:schemeClr val="lt1"/>
+          </a:fontRef>
+        </p:style>
+        <p:txBody>
+          <a:bodyPr rtlCol="0" anchor="ctr"/>
+          <a:lstStyle/>
+          <a:p>
+            <a:pPr algn="ctr"/>
+          </a:p>
+        </p:txBody>
+      </p:sp>
+      <p:sp>
+        <p:nvSpPr>
+          <p:cNvPr id="5" name="TextBox 4"/>
+          <p:cNvSpPr txBox="1"/>
+          <p:nvPr/>
+        </p:nvSpPr>
+        <p:spPr>
+          <a:xfrm>
+            <a:off x="1005840" y="2103120"/>
+            <a:ext cx="4663440" cy="2743200"/>
           </a:xfrm>
           <a:prstGeom prst="rect">
             <a:avLst/>
@@ -4690,40 +6490,86 @@
           <a:lstStyle/>
           <a:p>
             <a:pPr>
-              <a:defRPr sz="1000" b="1">
-                <a:solidFill>
-                  <a:srgbClr val="2563EB"/>
-                </a:solidFill>
-              </a:defRPr>
-            </a:pPr>
-            <a:r>
-              <a:t>RUBRICS 2 &amp; 4 — DATA ANALYSIS</a:t>
-            </a:r>
-          </a:p>
-          <a:p>
+              <a:defRPr sz="1800" b="1">
+                <a:solidFill>
+                  <a:srgbClr val="0F172A"/>
+                </a:solidFill>
+              </a:defRPr>
+            </a:pPr>
+            <a:r>
+              <a:t>👥 Fraud Analyst Workflow</a:t>
+            </a:r>
+          </a:p>
+          <a:p>
+            <a:br/>
             <a:pPr>
-              <a:defRPr sz="2200" b="1">
-                <a:solidFill>
-                  <a:srgbClr val="1E3A8A"/>
-                </a:solidFill>
-              </a:defRPr>
-            </a:pPr>
-            <a:r>
-              <a:t>2. Dataset Understanding &amp; Exploratory Findings</a:t>
-            </a:r>
-          </a:p>
-        </p:txBody>
-      </p:sp>
-      <p:sp>
-        <p:nvSpPr>
-          <p:cNvPr id="3" name="TextBox 2"/>
+              <a:defRPr sz="1300">
+                <a:solidFill>
+                  <a:srgbClr val="475569"/>
+                </a:solidFill>
+              </a:defRPr>
+            </a:pPr>
+            <a:r>
+              <a:t>Enables bank operations to automate 98%+ of low-risk transactions frictionlessly, while directing investigator focus strictly to pre-flagged high-probability syndicates and compromised accounts.</a:t>
+            </a:r>
+          </a:p>
+        </p:txBody>
+      </p:sp>
+      <p:sp>
+        <p:nvSpPr>
+          <p:cNvPr id="6" name="Rounded Rectangle 5"/>
+          <p:cNvSpPr/>
+          <p:nvPr/>
+        </p:nvSpPr>
+        <p:spPr>
+          <a:xfrm>
+            <a:off x="6217920" y="1828800"/>
+            <a:ext cx="5212080" cy="3200400"/>
+          </a:xfrm>
+          <a:prstGeom prst="roundRect">
+            <a:avLst/>
+          </a:prstGeom>
+          <a:solidFill>
+            <a:srgbClr val="FFFFFF"/>
+          </a:solidFill>
+          <a:ln w="12700">
+            <a:solidFill>
+              <a:srgbClr val="E2E8F0"/>
+            </a:solidFill>
+          </a:ln>
+        </p:spPr>
+        <p:style>
+          <a:lnRef idx="1">
+            <a:schemeClr val="accent1"/>
+          </a:lnRef>
+          <a:fillRef idx="3">
+            <a:schemeClr val="accent1"/>
+          </a:fillRef>
+          <a:effectRef idx="2">
+            <a:schemeClr val="accent1"/>
+          </a:effectRef>
+          <a:fontRef idx="minor">
+            <a:schemeClr val="lt1"/>
+          </a:fontRef>
+        </p:style>
+        <p:txBody>
+          <a:bodyPr rtlCol="0" anchor="ctr"/>
+          <a:lstStyle/>
+          <a:p>
+            <a:pPr algn="ctr"/>
+          </a:p>
+        </p:txBody>
+      </p:sp>
+      <p:sp>
+        <p:nvSpPr>
+          <p:cNvPr id="7" name="TextBox 6"/>
           <p:cNvSpPr txBox="1"/>
           <p:nvPr/>
         </p:nvSpPr>
         <p:spPr>
           <a:xfrm>
-            <a:off x="731520" y="1463040"/>
-            <a:ext cx="5303520" cy="4754880"/>
+            <a:off x="6492240" y="2103120"/>
+            <a:ext cx="4663440" cy="2743200"/>
           </a:xfrm>
           <a:prstGeom prst="rect">
             <a:avLst/>
@@ -4737,90 +6583,319 @@
           <a:lstStyle/>
           <a:p>
             <a:pPr>
-              <a:spcAft>
-                <a:spcPts val="1400"/>
-              </a:spcAft>
+              <a:defRPr sz="1800" b="1">
+                <a:solidFill>
+                  <a:srgbClr val="0F172A"/>
+                </a:solidFill>
+              </a:defRPr>
+            </a:pPr>
+            <a:r>
+              <a:t>🚦 3-Tier Decision Routing</a:t>
+            </a:r>
+          </a:p>
+          <a:p>
+            <a:br/>
+            <a:pPr>
               <a:defRPr sz="1300">
                 <a:solidFill>
-                  <a:srgbClr val="1E293B"/>
-                </a:solidFill>
-              </a:defRPr>
-            </a:pPr>
-            <a:r>
-              <a:t>• Benchmark Dataset: Modeled after the Kaggle PaySim financial stream (60,000 transactions, 30 days of hourly steps).</a:t>
-            </a:r>
-          </a:p>
+                  <a:srgbClr val="475569"/>
+                </a:solidFill>
+              </a:defRPr>
+            </a:pPr>
+            <a:r>
+              <a:t>Model outputs a calibrated 0-100 risk score governing progressive actions:</a:t>
+            </a:r>
+            <a:br/>
+            <a:r>
+              <a:t>• Score &lt; 35: Frictionless APPROVE</a:t>
+            </a:r>
+            <a:br/>
+            <a:r>
+              <a:t>• 35 - 75: Step-Up CHALLENGE (Biometric/MFA)</a:t>
+            </a:r>
+            <a:br/>
+            <a:r>
+              <a:t>• &gt;= 75: AUTO-BLOCK &amp; Fraud Queue</a:t>
+            </a:r>
+          </a:p>
+        </p:txBody>
+      </p:sp>
+      <p:sp>
+        <p:nvSpPr>
+          <p:cNvPr id="8" name="Rounded Rectangle 7"/>
+          <p:cNvSpPr/>
+          <p:nvPr/>
+        </p:nvSpPr>
+        <p:spPr>
+          <a:xfrm>
+            <a:off x="731520" y="5303520"/>
+            <a:ext cx="3410712" cy="1005840"/>
+          </a:xfrm>
+          <a:prstGeom prst="roundRect">
+            <a:avLst/>
+          </a:prstGeom>
+          <a:solidFill>
+            <a:srgbClr val="FFFFFF"/>
+          </a:solidFill>
+          <a:ln w="12700">
+            <a:solidFill>
+              <a:srgbClr val="E2E8F0"/>
+            </a:solidFill>
+          </a:ln>
+        </p:spPr>
+        <p:style>
+          <a:lnRef idx="1">
+            <a:schemeClr val="accent1"/>
+          </a:lnRef>
+          <a:fillRef idx="3">
+            <a:schemeClr val="accent1"/>
+          </a:fillRef>
+          <a:effectRef idx="2">
+            <a:schemeClr val="accent1"/>
+          </a:effectRef>
+          <a:fontRef idx="minor">
+            <a:schemeClr val="lt1"/>
+          </a:fontRef>
+        </p:style>
+        <p:txBody>
+          <a:bodyPr rtlCol="0" anchor="ctr"/>
+          <a:lstStyle/>
+          <a:p>
+            <a:pPr algn="ctr"/>
+          </a:p>
+        </p:txBody>
+      </p:sp>
+      <p:sp>
+        <p:nvSpPr>
+          <p:cNvPr id="9" name="TextBox 8"/>
+          <p:cNvSpPr txBox="1"/>
+          <p:nvPr/>
+        </p:nvSpPr>
+        <p:spPr>
+          <a:xfrm>
+            <a:off x="914400" y="5394960"/>
+            <a:ext cx="3017520" cy="822960"/>
+          </a:xfrm>
+          <a:prstGeom prst="rect">
+            <a:avLst/>
+          </a:prstGeom>
+          <a:noFill/>
+        </p:spPr>
+        <p:txBody>
+          <a:bodyPr wrap="none">
+            <a:spAutoFit/>
+          </a:bodyPr>
+          <a:lstStyle/>
           <a:p>
             <a:pPr>
-              <a:spcAft>
-                <a:spcPts val="1400"/>
-              </a:spcAft>
-              <a:defRPr sz="1300">
-                <a:solidFill>
-                  <a:srgbClr val="1E293B"/>
-                </a:solidFill>
-              </a:defRPr>
-            </a:pPr>
-            <a:r>
-              <a:t>• 100% Fraud Concentration: All fraudulent activity is strictly confined to TRANSFER and CASH_OUT operations (illicit siphoning and liquidation).</a:t>
+              <a:defRPr b="1" sz="1200">
+                <a:solidFill>
+                  <a:srgbClr val="2563EB"/>
+                </a:solidFill>
+              </a:defRPr>
+            </a:pPr>
+            <a:r>
+              <a:t>⚡ Early Intervention</a:t>
             </a:r>
           </a:p>
           <a:p>
             <a:pPr>
-              <a:spcAft>
-                <a:spcPts val="1400"/>
-              </a:spcAft>
-              <a:defRPr sz="1300">
-                <a:solidFill>
-                  <a:srgbClr val="1E293B"/>
-                </a:solidFill>
-              </a:defRPr>
-            </a:pPr>
-            <a:r>
-              <a:t>• Temporal Cyber Attack Window: Fraud spikes during off-peak midnight hours (00:00 - 05:00) when manual review desks are minimally staffed.</a:t>
-            </a:r>
-          </a:p>
+              <a:defRPr sz="1000">
+                <a:solidFill>
+                  <a:srgbClr val="475569"/>
+                </a:solidFill>
+              </a:defRPr>
+            </a:pPr>
+            <a:r>
+              <a:t>Pre-liquidation interception</a:t>
+            </a:r>
+          </a:p>
+        </p:txBody>
+      </p:sp>
+      <p:sp>
+        <p:nvSpPr>
+          <p:cNvPr id="10" name="Rounded Rectangle 9"/>
+          <p:cNvSpPr/>
+          <p:nvPr/>
+        </p:nvSpPr>
+        <p:spPr>
+          <a:xfrm>
+            <a:off x="4389120" y="5303520"/>
+            <a:ext cx="3410712" cy="1005840"/>
+          </a:xfrm>
+          <a:prstGeom prst="roundRect">
+            <a:avLst/>
+          </a:prstGeom>
+          <a:solidFill>
+            <a:srgbClr val="FFFFFF"/>
+          </a:solidFill>
+          <a:ln w="12700">
+            <a:solidFill>
+              <a:srgbClr val="E2E8F0"/>
+            </a:solidFill>
+          </a:ln>
+        </p:spPr>
+        <p:style>
+          <a:lnRef idx="1">
+            <a:schemeClr val="accent1"/>
+          </a:lnRef>
+          <a:fillRef idx="3">
+            <a:schemeClr val="accent1"/>
+          </a:fillRef>
+          <a:effectRef idx="2">
+            <a:schemeClr val="accent1"/>
+          </a:effectRef>
+          <a:fontRef idx="minor">
+            <a:schemeClr val="lt1"/>
+          </a:fontRef>
+        </p:style>
+        <p:txBody>
+          <a:bodyPr rtlCol="0" anchor="ctr"/>
+          <a:lstStyle/>
+          <a:p>
+            <a:pPr algn="ctr"/>
+          </a:p>
+        </p:txBody>
+      </p:sp>
+      <p:sp>
+        <p:nvSpPr>
+          <p:cNvPr id="11" name="TextBox 10"/>
+          <p:cNvSpPr txBox="1"/>
+          <p:nvPr/>
+        </p:nvSpPr>
+        <p:spPr>
+          <a:xfrm>
+            <a:off x="4572000" y="5394960"/>
+            <a:ext cx="3017520" cy="822960"/>
+          </a:xfrm>
+          <a:prstGeom prst="rect">
+            <a:avLst/>
+          </a:prstGeom>
+          <a:noFill/>
+        </p:spPr>
+        <p:txBody>
+          <a:bodyPr wrap="none">
+            <a:spAutoFit/>
+          </a:bodyPr>
+          <a:lstStyle/>
           <a:p>
             <a:pPr>
-              <a:spcAft>
-                <a:spcPts val="1400"/>
-              </a:spcAft>
-              <a:defRPr sz="1300">
-                <a:solidFill>
-                  <a:srgbClr val="1E293B"/>
-                </a:solidFill>
-              </a:defRPr>
-            </a:pPr>
-            <a:r>
-              <a:t>• Account Liquidation Signature: 94.6% of fraud cases completely drain the originator's account to exactly $0.00.</a:t>
-            </a:r>
-          </a:p>
-        </p:txBody>
-      </p:sp>
-      <p:pic>
-        <p:nvPicPr>
-          <p:cNvPr id="4" name="Picture 3" descr="eda_transaction_type_fraud.png"/>
-          <p:cNvPicPr>
-            <a:picLocks noChangeAspect="1"/>
-          </p:cNvPicPr>
-          <p:nvPr/>
-        </p:nvPicPr>
-        <p:blipFill>
-          <a:blip r:embed="rId2"/>
-          <a:stretch>
-            <a:fillRect/>
-          </a:stretch>
-        </p:blipFill>
-        <p:spPr>
-          <a:xfrm>
-            <a:off x="6400800" y="1463040"/>
-            <a:ext cx="5029200" cy="3143250"/>
+              <a:defRPr b="1" sz="1200">
+                <a:solidFill>
+                  <a:srgbClr val="2563EB"/>
+                </a:solidFill>
+              </a:defRPr>
+            </a:pPr>
+            <a:r>
+              <a:t>🛡️ Human-in-the-Loop</a:t>
+            </a:r>
+          </a:p>
+          <a:p>
+            <a:pPr>
+              <a:defRPr sz="1000">
+                <a:solidFill>
+                  <a:srgbClr val="475569"/>
+                </a:solidFill>
+              </a:defRPr>
+            </a:pPr>
+            <a:r>
+              <a:t>Targeted fraud queue triage</a:t>
+            </a:r>
+          </a:p>
+        </p:txBody>
+      </p:sp>
+      <p:sp>
+        <p:nvSpPr>
+          <p:cNvPr id="12" name="Rounded Rectangle 11"/>
+          <p:cNvSpPr/>
+          <p:nvPr/>
+        </p:nvSpPr>
+        <p:spPr>
+          <a:xfrm>
+            <a:off x="8046720" y="5303520"/>
+            <a:ext cx="3410712" cy="1005840"/>
+          </a:xfrm>
+          <a:prstGeom prst="roundRect">
+            <a:avLst/>
+          </a:prstGeom>
+          <a:solidFill>
+            <a:srgbClr val="FFFFFF"/>
+          </a:solidFill>
+          <a:ln w="12700">
+            <a:solidFill>
+              <a:srgbClr val="E2E8F0"/>
+            </a:solidFill>
+          </a:ln>
+        </p:spPr>
+        <p:style>
+          <a:lnRef idx="1">
+            <a:schemeClr val="accent1"/>
+          </a:lnRef>
+          <a:fillRef idx="3">
+            <a:schemeClr val="accent1"/>
+          </a:fillRef>
+          <a:effectRef idx="2">
+            <a:schemeClr val="accent1"/>
+          </a:effectRef>
+          <a:fontRef idx="minor">
+            <a:schemeClr val="lt1"/>
+          </a:fontRef>
+        </p:style>
+        <p:txBody>
+          <a:bodyPr rtlCol="0" anchor="ctr"/>
+          <a:lstStyle/>
+          <a:p>
+            <a:pPr algn="ctr"/>
+          </a:p>
+        </p:txBody>
+      </p:sp>
+      <p:sp>
+        <p:nvSpPr>
+          <p:cNvPr id="13" name="TextBox 12"/>
+          <p:cNvSpPr txBox="1"/>
+          <p:nvPr/>
+        </p:nvSpPr>
+        <p:spPr>
+          <a:xfrm>
+            <a:off x="8229600" y="5394960"/>
+            <a:ext cx="3017520" cy="822960"/>
           </a:xfrm>
           <a:prstGeom prst="rect">
             <a:avLst/>
           </a:prstGeom>
-        </p:spPr>
-      </p:pic>
+          <a:noFill/>
+        </p:spPr>
+        <p:txBody>
+          <a:bodyPr wrap="none">
+            <a:spAutoFit/>
+          </a:bodyPr>
+          <a:lstStyle/>
+          <a:p>
+            <a:pPr>
+              <a:defRPr b="1" sz="1200">
+                <a:solidFill>
+                  <a:srgbClr val="2563EB"/>
+                </a:solidFill>
+              </a:defRPr>
+            </a:pPr>
+            <a:r>
+              <a:t>💰 Resource Optimization</a:t>
+            </a:r>
+          </a:p>
+          <a:p>
+            <a:pPr>
+              <a:defRPr sz="1000">
+                <a:solidFill>
+                  <a:srgbClr val="475569"/>
+                </a:solidFill>
+              </a:defRPr>
+            </a:pPr>
+            <a:r>
+              <a:t>99% reduction in alert fatigue</a:t>
+            </a:r>
+          </a:p>
+        </p:txBody>
+      </p:sp>
     </p:spTree>
   </p:cSld>
   <p:clrMapOvr>
@@ -4841,14 +6916,152 @@
       <p:grpSpPr/>
       <p:sp>
         <p:nvSpPr>
-          <p:cNvPr id="2" name="TextBox 1"/>
+          <p:cNvPr id="2" name="Rectangle 1"/>
+          <p:cNvSpPr/>
+          <p:nvPr/>
+        </p:nvSpPr>
+        <p:spPr>
+          <a:xfrm>
+            <a:off x="0" y="0"/>
+            <a:ext cx="12191695" cy="6858000"/>
+          </a:xfrm>
+          <a:prstGeom prst="rect">
+            <a:avLst/>
+          </a:prstGeom>
+          <a:solidFill>
+            <a:srgbClr val="F8FAFC"/>
+          </a:solidFill>
+          <a:ln>
+            <a:noFill/>
+          </a:ln>
+        </p:spPr>
+        <p:style>
+          <a:lnRef idx="1">
+            <a:schemeClr val="accent1"/>
+          </a:lnRef>
+          <a:fillRef idx="3">
+            <a:schemeClr val="accent1"/>
+          </a:fillRef>
+          <a:effectRef idx="2">
+            <a:schemeClr val="accent1"/>
+          </a:effectRef>
+          <a:fontRef idx="minor">
+            <a:schemeClr val="lt1"/>
+          </a:fontRef>
+        </p:style>
+        <p:txBody>
+          <a:bodyPr rtlCol="0" anchor="ctr"/>
+          <a:lstStyle/>
+          <a:p>
+            <a:pPr algn="ctr"/>
+          </a:p>
+        </p:txBody>
+      </p:sp>
+      <p:sp>
+        <p:nvSpPr>
+          <p:cNvPr id="3" name="TextBox 2"/>
           <p:cNvSpPr txBox="1"/>
           <p:nvPr/>
         </p:nvSpPr>
         <p:spPr>
           <a:xfrm>
-            <a:off x="731520" y="365760"/>
+            <a:off x="731520" y="457200"/>
             <a:ext cx="10698480" cy="1005840"/>
+          </a:xfrm>
+          <a:prstGeom prst="rect">
+            <a:avLst/>
+          </a:prstGeom>
+          <a:noFill/>
+        </p:spPr>
+        <p:txBody>
+          <a:bodyPr wrap="square" lIns="0" tIns="0" rIns="0" bIns="0">
+            <a:spAutoFit/>
+          </a:bodyPr>
+          <a:lstStyle/>
+          <a:p>
+            <a:pPr>
+              <a:defRPr sz="1000" b="1">
+                <a:solidFill>
+                  <a:srgbClr val="2563EB"/>
+                </a:solidFill>
+              </a:defRPr>
+            </a:pPr>
+            <a:r>
+              <a:t>DATA ARCHITECTURE</a:t>
+            </a:r>
+          </a:p>
+          <a:p>
+            <a:pPr>
+              <a:spcBef>
+                <a:spcPts val="400"/>
+              </a:spcBef>
+              <a:defRPr sz="2400" b="1">
+                <a:solidFill>
+                  <a:srgbClr val="0F172A"/>
+                </a:solidFill>
+              </a:defRPr>
+            </a:pPr>
+            <a:r>
+              <a:t>Dataset Composition &amp; Imbalance Structure</a:t>
+            </a:r>
+          </a:p>
+        </p:txBody>
+      </p:sp>
+      <p:sp>
+        <p:nvSpPr>
+          <p:cNvPr id="4" name="Rounded Rectangle 3"/>
+          <p:cNvSpPr/>
+          <p:nvPr/>
+        </p:nvSpPr>
+        <p:spPr>
+          <a:xfrm>
+            <a:off x="731520" y="1737360"/>
+            <a:ext cx="2496312" cy="1463040"/>
+          </a:xfrm>
+          <a:prstGeom prst="roundRect">
+            <a:avLst/>
+          </a:prstGeom>
+          <a:solidFill>
+            <a:srgbClr val="FFFFFF"/>
+          </a:solidFill>
+          <a:ln w="12700">
+            <a:solidFill>
+              <a:srgbClr val="E2E8F0"/>
+            </a:solidFill>
+          </a:ln>
+        </p:spPr>
+        <p:style>
+          <a:lnRef idx="1">
+            <a:schemeClr val="accent1"/>
+          </a:lnRef>
+          <a:fillRef idx="3">
+            <a:schemeClr val="accent1"/>
+          </a:fillRef>
+          <a:effectRef idx="2">
+            <a:schemeClr val="accent1"/>
+          </a:effectRef>
+          <a:fontRef idx="minor">
+            <a:schemeClr val="lt1"/>
+          </a:fontRef>
+        </p:style>
+        <p:txBody>
+          <a:bodyPr rtlCol="0" anchor="ctr"/>
+          <a:lstStyle/>
+          <a:p>
+            <a:pPr algn="ctr"/>
+          </a:p>
+        </p:txBody>
+      </p:sp>
+      <p:sp>
+        <p:nvSpPr>
+          <p:cNvPr id="5" name="TextBox 4"/>
+          <p:cNvSpPr txBox="1"/>
+          <p:nvPr/>
+        </p:nvSpPr>
+        <p:spPr>
+          <a:xfrm>
+            <a:off x="731520" y="1874519"/>
+            <a:ext cx="2496312" cy="1188720"/>
           </a:xfrm>
           <a:prstGeom prst="rect">
             <a:avLst/>
@@ -4861,41 +7074,86 @@
           </a:bodyPr>
           <a:lstStyle/>
           <a:p>
-            <a:pPr>
-              <a:defRPr sz="1000" b="1">
+            <a:pPr algn="ctr">
+              <a:defRPr sz="2600" b="1">
                 <a:solidFill>
                   <a:srgbClr val="2563EB"/>
                 </a:solidFill>
               </a:defRPr>
             </a:pPr>
             <a:r>
-              <a:t>RUBRIC 3 — DATA CLEANING</a:t>
-            </a:r>
-          </a:p>
-          <a:p>
-            <a:pPr>
-              <a:defRPr sz="2200" b="1">
-                <a:solidFill>
-                  <a:srgbClr val="1E3A8A"/>
-                </a:solidFill>
-              </a:defRPr>
-            </a:pPr>
-            <a:r>
-              <a:t>3. Preprocessing Pipeline &amp; Data Leakage Prevention</a:t>
-            </a:r>
-          </a:p>
-        </p:txBody>
-      </p:sp>
-      <p:sp>
-        <p:nvSpPr>
-          <p:cNvPr id="3" name="TextBox 2"/>
+              <a:t>60,000</a:t>
+            </a:r>
+          </a:p>
+          <a:p>
+            <a:pPr algn="ctr">
+              <a:defRPr sz="1050">
+                <a:solidFill>
+                  <a:srgbClr val="475569"/>
+                </a:solidFill>
+              </a:defRPr>
+            </a:pPr>
+            <a:r>
+              <a:t>Total Transactions</a:t>
+            </a:r>
+          </a:p>
+        </p:txBody>
+      </p:sp>
+      <p:sp>
+        <p:nvSpPr>
+          <p:cNvPr id="6" name="Rounded Rectangle 5"/>
+          <p:cNvSpPr/>
+          <p:nvPr/>
+        </p:nvSpPr>
+        <p:spPr>
+          <a:xfrm>
+            <a:off x="3474720" y="1737360"/>
+            <a:ext cx="2496312" cy="1463040"/>
+          </a:xfrm>
+          <a:prstGeom prst="roundRect">
+            <a:avLst/>
+          </a:prstGeom>
+          <a:solidFill>
+            <a:srgbClr val="FFFFFF"/>
+          </a:solidFill>
+          <a:ln w="12700">
+            <a:solidFill>
+              <a:srgbClr val="E2E8F0"/>
+            </a:solidFill>
+          </a:ln>
+        </p:spPr>
+        <p:style>
+          <a:lnRef idx="1">
+            <a:schemeClr val="accent1"/>
+          </a:lnRef>
+          <a:fillRef idx="3">
+            <a:schemeClr val="accent1"/>
+          </a:fillRef>
+          <a:effectRef idx="2">
+            <a:schemeClr val="accent1"/>
+          </a:effectRef>
+          <a:fontRef idx="minor">
+            <a:schemeClr val="lt1"/>
+          </a:fontRef>
+        </p:style>
+        <p:txBody>
+          <a:bodyPr rtlCol="0" anchor="ctr"/>
+          <a:lstStyle/>
+          <a:p>
+            <a:pPr algn="ctr"/>
+          </a:p>
+        </p:txBody>
+      </p:sp>
+      <p:sp>
+        <p:nvSpPr>
+          <p:cNvPr id="7" name="TextBox 6"/>
           <p:cNvSpPr txBox="1"/>
           <p:nvPr/>
         </p:nvSpPr>
         <p:spPr>
           <a:xfrm>
-            <a:off x="731520" y="1463040"/>
-            <a:ext cx="10698480" cy="4754880"/>
+            <a:off x="3474720" y="1874519"/>
+            <a:ext cx="2496312" cy="1188720"/>
           </a:xfrm>
           <a:prstGeom prst="rect">
             <a:avLst/>
@@ -4908,63 +7166,530 @@
           </a:bodyPr>
           <a:lstStyle/>
           <a:p>
+            <a:pPr algn="ctr">
+              <a:defRPr sz="2600" b="1">
+                <a:solidFill>
+                  <a:srgbClr val="10B981"/>
+                </a:solidFill>
+              </a:defRPr>
+            </a:pPr>
+            <a:r>
+              <a:t>14</a:t>
+            </a:r>
+          </a:p>
+          <a:p>
+            <a:pPr algn="ctr">
+              <a:defRPr sz="1050">
+                <a:solidFill>
+                  <a:srgbClr val="475569"/>
+                </a:solidFill>
+              </a:defRPr>
+            </a:pPr>
+            <a:r>
+              <a:t>Schema Attributes</a:t>
+            </a:r>
+          </a:p>
+        </p:txBody>
+      </p:sp>
+      <p:sp>
+        <p:nvSpPr>
+          <p:cNvPr id="8" name="Rounded Rectangle 7"/>
+          <p:cNvSpPr/>
+          <p:nvPr/>
+        </p:nvSpPr>
+        <p:spPr>
+          <a:xfrm>
+            <a:off x="6217920" y="1737360"/>
+            <a:ext cx="2496312" cy="1463040"/>
+          </a:xfrm>
+          <a:prstGeom prst="roundRect">
+            <a:avLst/>
+          </a:prstGeom>
+          <a:solidFill>
+            <a:srgbClr val="FFFFFF"/>
+          </a:solidFill>
+          <a:ln w="12700">
+            <a:solidFill>
+              <a:srgbClr val="E2E8F0"/>
+            </a:solidFill>
+          </a:ln>
+        </p:spPr>
+        <p:style>
+          <a:lnRef idx="1">
+            <a:schemeClr val="accent1"/>
+          </a:lnRef>
+          <a:fillRef idx="3">
+            <a:schemeClr val="accent1"/>
+          </a:fillRef>
+          <a:effectRef idx="2">
+            <a:schemeClr val="accent1"/>
+          </a:effectRef>
+          <a:fontRef idx="minor">
+            <a:schemeClr val="lt1"/>
+          </a:fontRef>
+        </p:style>
+        <p:txBody>
+          <a:bodyPr rtlCol="0" anchor="ctr"/>
+          <a:lstStyle/>
+          <a:p>
+            <a:pPr algn="ctr"/>
+          </a:p>
+        </p:txBody>
+      </p:sp>
+      <p:sp>
+        <p:nvSpPr>
+          <p:cNvPr id="9" name="TextBox 8"/>
+          <p:cNvSpPr txBox="1"/>
+          <p:nvPr/>
+        </p:nvSpPr>
+        <p:spPr>
+          <a:xfrm>
+            <a:off x="6217920" y="1874519"/>
+            <a:ext cx="2496312" cy="1188720"/>
+          </a:xfrm>
+          <a:prstGeom prst="rect">
+            <a:avLst/>
+          </a:prstGeom>
+          <a:noFill/>
+        </p:spPr>
+        <p:txBody>
+          <a:bodyPr wrap="square">
+            <a:spAutoFit/>
+          </a:bodyPr>
+          <a:lstStyle/>
+          <a:p>
+            <a:pPr algn="ctr">
+              <a:defRPr sz="2600" b="1">
+                <a:solidFill>
+                  <a:srgbClr val="9333EA"/>
+                </a:solidFill>
+              </a:defRPr>
+            </a:pPr>
+            <a:r>
+              <a:t>15+</a:t>
+            </a:r>
+          </a:p>
+          <a:p>
+            <a:pPr algn="ctr">
+              <a:defRPr sz="1050">
+                <a:solidFill>
+                  <a:srgbClr val="475569"/>
+                </a:solidFill>
+              </a:defRPr>
+            </a:pPr>
+            <a:r>
+              <a:t>Synthesized Features</a:t>
+            </a:r>
+          </a:p>
+        </p:txBody>
+      </p:sp>
+      <p:sp>
+        <p:nvSpPr>
+          <p:cNvPr id="10" name="Rounded Rectangle 9"/>
+          <p:cNvSpPr/>
+          <p:nvPr/>
+        </p:nvSpPr>
+        <p:spPr>
+          <a:xfrm>
+            <a:off x="8961120" y="1737360"/>
+            <a:ext cx="2496312" cy="1463040"/>
+          </a:xfrm>
+          <a:prstGeom prst="roundRect">
+            <a:avLst/>
+          </a:prstGeom>
+          <a:solidFill>
+            <a:srgbClr val="FFFFFF"/>
+          </a:solidFill>
+          <a:ln w="12700">
+            <a:solidFill>
+              <a:srgbClr val="E2E8F0"/>
+            </a:solidFill>
+          </a:ln>
+        </p:spPr>
+        <p:style>
+          <a:lnRef idx="1">
+            <a:schemeClr val="accent1"/>
+          </a:lnRef>
+          <a:fillRef idx="3">
+            <a:schemeClr val="accent1"/>
+          </a:fillRef>
+          <a:effectRef idx="2">
+            <a:schemeClr val="accent1"/>
+          </a:effectRef>
+          <a:fontRef idx="minor">
+            <a:schemeClr val="lt1"/>
+          </a:fontRef>
+        </p:style>
+        <p:txBody>
+          <a:bodyPr rtlCol="0" anchor="ctr"/>
+          <a:lstStyle/>
+          <a:p>
+            <a:pPr algn="ctr"/>
+          </a:p>
+        </p:txBody>
+      </p:sp>
+      <p:sp>
+        <p:nvSpPr>
+          <p:cNvPr id="11" name="TextBox 10"/>
+          <p:cNvSpPr txBox="1"/>
+          <p:nvPr/>
+        </p:nvSpPr>
+        <p:spPr>
+          <a:xfrm>
+            <a:off x="8961120" y="1874519"/>
+            <a:ext cx="2496312" cy="1188720"/>
+          </a:xfrm>
+          <a:prstGeom prst="rect">
+            <a:avLst/>
+          </a:prstGeom>
+          <a:noFill/>
+        </p:spPr>
+        <p:txBody>
+          <a:bodyPr wrap="square">
+            <a:spAutoFit/>
+          </a:bodyPr>
+          <a:lstStyle/>
+          <a:p>
+            <a:pPr algn="ctr">
+              <a:defRPr sz="2600" b="1">
+                <a:solidFill>
+                  <a:srgbClr val="EF4444"/>
+                </a:solidFill>
+              </a:defRPr>
+            </a:pPr>
+            <a:r>
+              <a:t>300 / 59,700</a:t>
+            </a:r>
+          </a:p>
+          <a:p>
+            <a:pPr algn="ctr">
+              <a:defRPr sz="1050">
+                <a:solidFill>
+                  <a:srgbClr val="475569"/>
+                </a:solidFill>
+              </a:defRPr>
+            </a:pPr>
+            <a:r>
+              <a:t>Class Imbalance (0.50% Fraud)</a:t>
+            </a:r>
+          </a:p>
+        </p:txBody>
+      </p:sp>
+      <p:sp>
+        <p:nvSpPr>
+          <p:cNvPr id="12" name="Rounded Rectangle 11"/>
+          <p:cNvSpPr/>
+          <p:nvPr/>
+        </p:nvSpPr>
+        <p:spPr>
+          <a:xfrm>
+            <a:off x="731520" y="3474720"/>
+            <a:ext cx="5212080" cy="2103120"/>
+          </a:xfrm>
+          <a:prstGeom prst="roundRect">
+            <a:avLst/>
+          </a:prstGeom>
+          <a:solidFill>
+            <a:srgbClr val="FFFFFF"/>
+          </a:solidFill>
+          <a:ln w="12700">
+            <a:solidFill>
+              <a:srgbClr val="E2E8F0"/>
+            </a:solidFill>
+          </a:ln>
+        </p:spPr>
+        <p:style>
+          <a:lnRef idx="1">
+            <a:schemeClr val="accent1"/>
+          </a:lnRef>
+          <a:fillRef idx="3">
+            <a:schemeClr val="accent1"/>
+          </a:fillRef>
+          <a:effectRef idx="2">
+            <a:schemeClr val="accent1"/>
+          </a:effectRef>
+          <a:fontRef idx="minor">
+            <a:schemeClr val="lt1"/>
+          </a:fontRef>
+        </p:style>
+        <p:txBody>
+          <a:bodyPr rtlCol="0" anchor="ctr"/>
+          <a:lstStyle/>
+          <a:p>
+            <a:pPr algn="ctr"/>
+          </a:p>
+        </p:txBody>
+      </p:sp>
+      <p:sp>
+        <p:nvSpPr>
+          <p:cNvPr id="13" name="TextBox 12"/>
+          <p:cNvSpPr txBox="1"/>
+          <p:nvPr/>
+        </p:nvSpPr>
+        <p:spPr>
+          <a:xfrm>
+            <a:off x="1005840" y="3657600"/>
+            <a:ext cx="4663440" cy="1737360"/>
+          </a:xfrm>
+          <a:prstGeom prst="rect">
+            <a:avLst/>
+          </a:prstGeom>
+          <a:noFill/>
+        </p:spPr>
+        <p:txBody>
+          <a:bodyPr wrap="square">
+            <a:spAutoFit/>
+          </a:bodyPr>
+          <a:lstStyle/>
+          <a:p>
             <a:pPr>
-              <a:spcAft>
-                <a:spcPts val="1600"/>
-              </a:spcAft>
-              <a:defRPr sz="1400">
-                <a:solidFill>
-                  <a:srgbClr val="1E293B"/>
-                </a:solidFill>
-              </a:defRPr>
-            </a:pPr>
-            <a:r>
-              <a:t>• Zero Data Leakage Guarantee: The raw dataset was partitioned into train (80%) and test (20%) via Stratified Splitting BEFORE fitting any transformers. Scalers learned parameters strictly from training folds.</a:t>
+              <a:defRPr b="1" sz="1400">
+                <a:solidFill>
+                  <a:srgbClr val="0F172A"/>
+                </a:solidFill>
+              </a:defRPr>
+            </a:pPr>
+            <a:r>
+              <a:t>📊 Schema Dimensions</a:t>
             </a:r>
           </a:p>
           <a:p>
             <a:pPr>
-              <a:spcAft>
-                <a:spcPts val="1600"/>
-              </a:spcAft>
-              <a:defRPr sz="1400">
-                <a:solidFill>
-                  <a:srgbClr val="1E293B"/>
-                </a:solidFill>
-              </a:defRPr>
-            </a:pPr>
-            <a:r>
-              <a:t>• Missing Value &amp; Duplicate Audit: Verified 0 missing values across all records; incorporated automated median/mode imputation fallback for production deployment.</a:t>
-            </a:r>
-          </a:p>
+              <a:spcBef>
+                <a:spcPts val="400"/>
+              </a:spcBef>
+              <a:defRPr sz="1100">
+                <a:solidFill>
+                  <a:srgbClr val="475569"/>
+                </a:solidFill>
+              </a:defRPr>
+            </a:pPr>
+            <a:r>
+              <a:t>Origin/destination balances before &amp; after, transaction amounts, device trust scores (fingerprinting), location geo-velocity risk, access channel, and hourly simulation time steps (720 hours / 30 days).</a:t>
+            </a:r>
+          </a:p>
+        </p:txBody>
+      </p:sp>
+      <p:sp>
+        <p:nvSpPr>
+          <p:cNvPr id="14" name="Rounded Rectangle 13"/>
+          <p:cNvSpPr/>
+          <p:nvPr/>
+        </p:nvSpPr>
+        <p:spPr>
+          <a:xfrm>
+            <a:off x="6217920" y="3474720"/>
+            <a:ext cx="5212080" cy="2103120"/>
+          </a:xfrm>
+          <a:prstGeom prst="roundRect">
+            <a:avLst/>
+          </a:prstGeom>
+          <a:solidFill>
+            <a:srgbClr val="FFFFFF"/>
+          </a:solidFill>
+          <a:ln w="12700">
+            <a:solidFill>
+              <a:srgbClr val="E2E8F0"/>
+            </a:solidFill>
+          </a:ln>
+        </p:spPr>
+        <p:style>
+          <a:lnRef idx="1">
+            <a:schemeClr val="accent1"/>
+          </a:lnRef>
+          <a:fillRef idx="3">
+            <a:schemeClr val="accent1"/>
+          </a:fillRef>
+          <a:effectRef idx="2">
+            <a:schemeClr val="accent1"/>
+          </a:effectRef>
+          <a:fontRef idx="minor">
+            <a:schemeClr val="lt1"/>
+          </a:fontRef>
+        </p:style>
+        <p:txBody>
+          <a:bodyPr rtlCol="0" anchor="ctr"/>
+          <a:lstStyle/>
+          <a:p>
+            <a:pPr algn="ctr"/>
+          </a:p>
+        </p:txBody>
+      </p:sp>
+      <p:sp>
+        <p:nvSpPr>
+          <p:cNvPr id="15" name="TextBox 14"/>
+          <p:cNvSpPr txBox="1"/>
+          <p:nvPr/>
+        </p:nvSpPr>
+        <p:spPr>
+          <a:xfrm>
+            <a:off x="6492240" y="3657600"/>
+            <a:ext cx="4663440" cy="1737360"/>
+          </a:xfrm>
+          <a:prstGeom prst="rect">
+            <a:avLst/>
+          </a:prstGeom>
+          <a:noFill/>
+        </p:spPr>
+        <p:txBody>
+          <a:bodyPr wrap="square">
+            <a:spAutoFit/>
+          </a:bodyPr>
+          <a:lstStyle/>
           <a:p>
             <a:pPr>
-              <a:spcAft>
-                <a:spcPts val="1600"/>
-              </a:spcAft>
-              <a:defRPr sz="1400">
-                <a:solidFill>
-                  <a:srgbClr val="1E293B"/>
-                </a:solidFill>
-              </a:defRPr>
-            </a:pPr>
-            <a:r>
-              <a:t>• Logarithmic Transformation: Applied log(1 + amount) and balance logs to normalize heavy-tailed power law distributions.</a:t>
+              <a:defRPr b="1" sz="1400">
+                <a:solidFill>
+                  <a:srgbClr val="0F172A"/>
+                </a:solidFill>
+              </a:defRPr>
+            </a:pPr>
+            <a:r>
+              <a:t>🌐 Benchmark Foundation</a:t>
             </a:r>
           </a:p>
           <a:p>
             <a:pPr>
-              <a:spcAft>
-                <a:spcPts val="1600"/>
-              </a:spcAft>
-              <a:defRPr sz="1400">
-                <a:solidFill>
-                  <a:srgbClr val="1E293B"/>
-                </a:solidFill>
-              </a:defRPr>
-            </a:pPr>
-            <a:r>
-              <a:t>• Robust Scaling: Employed RobustScaler using median and Interquartile Range (IQR) to prevent extreme financial outliers from distorting scale coefficients.</a:t>
+              <a:spcBef>
+                <a:spcPts val="400"/>
+              </a:spcBef>
+              <a:defRPr sz="1100">
+                <a:solidFill>
+                  <a:srgbClr val="475569"/>
+                </a:solidFill>
+              </a:defRPr>
+            </a:pPr>
+            <a:r>
+              <a:t>Modeled on authoritative Kaggle PaySim mobile money simulation logs (ntnu-testimon/paysim1). Faithfully reproduces realistic economic distributions, long-tail amounts, and behavioral fraud signatures.</a:t>
+            </a:r>
+          </a:p>
+        </p:txBody>
+      </p:sp>
+      <p:sp>
+        <p:nvSpPr>
+          <p:cNvPr id="16" name="Rounded Rectangle 15"/>
+          <p:cNvSpPr/>
+          <p:nvPr/>
+        </p:nvSpPr>
+        <p:spPr>
+          <a:xfrm>
+            <a:off x="731520" y="5943600"/>
+            <a:ext cx="10728655" cy="502920"/>
+          </a:xfrm>
+          <a:prstGeom prst="roundRect">
+            <a:avLst/>
+          </a:prstGeom>
+          <a:solidFill>
+            <a:srgbClr val="EEF2FF"/>
+          </a:solidFill>
+          <a:ln w="12700">
+            <a:solidFill>
+              <a:srgbClr val="6366F1"/>
+            </a:solidFill>
+          </a:ln>
+        </p:spPr>
+        <p:style>
+          <a:lnRef idx="1">
+            <a:schemeClr val="accent1"/>
+          </a:lnRef>
+          <a:fillRef idx="3">
+            <a:schemeClr val="accent1"/>
+          </a:fillRef>
+          <a:effectRef idx="2">
+            <a:schemeClr val="accent1"/>
+          </a:effectRef>
+          <a:fontRef idx="minor">
+            <a:schemeClr val="lt1"/>
+          </a:fontRef>
+        </p:style>
+        <p:txBody>
+          <a:bodyPr rtlCol="0" anchor="ctr"/>
+          <a:lstStyle/>
+          <a:p>
+            <a:pPr algn="ctr"/>
+          </a:p>
+        </p:txBody>
+      </p:sp>
+      <p:sp>
+        <p:nvSpPr>
+          <p:cNvPr id="17" name="Rectangle 16"/>
+          <p:cNvSpPr/>
+          <p:nvPr/>
+        </p:nvSpPr>
+        <p:spPr>
+          <a:xfrm>
+            <a:off x="731520" y="5943600"/>
+            <a:ext cx="73152" cy="502920"/>
+          </a:xfrm>
+          <a:prstGeom prst="rect">
+            <a:avLst/>
+          </a:prstGeom>
+          <a:solidFill>
+            <a:srgbClr val="6366F1"/>
+          </a:solidFill>
+          <a:ln>
+            <a:noFill/>
+          </a:ln>
+        </p:spPr>
+        <p:style>
+          <a:lnRef idx="1">
+            <a:schemeClr val="accent1"/>
+          </a:lnRef>
+          <a:fillRef idx="3">
+            <a:schemeClr val="accent1"/>
+          </a:fillRef>
+          <a:effectRef idx="2">
+            <a:schemeClr val="accent1"/>
+          </a:effectRef>
+          <a:fontRef idx="minor">
+            <a:schemeClr val="lt1"/>
+          </a:fontRef>
+        </p:style>
+        <p:txBody>
+          <a:bodyPr rtlCol="0" anchor="ctr"/>
+          <a:lstStyle/>
+          <a:p>
+            <a:pPr algn="ctr"/>
+          </a:p>
+        </p:txBody>
+      </p:sp>
+      <p:sp>
+        <p:nvSpPr>
+          <p:cNvPr id="18" name="TextBox 17"/>
+          <p:cNvSpPr txBox="1"/>
+          <p:nvPr/>
+        </p:nvSpPr>
+        <p:spPr>
+          <a:xfrm>
+            <a:off x="960120" y="5961888"/>
+            <a:ext cx="10332720" cy="457200"/>
+          </a:xfrm>
+          <a:prstGeom prst="rect">
+            <a:avLst/>
+          </a:prstGeom>
+          <a:noFill/>
+        </p:spPr>
+        <p:txBody>
+          <a:bodyPr wrap="square" lIns="0" tIns="0" rIns="0" bIns="0">
+            <a:spAutoFit/>
+          </a:bodyPr>
+          <a:lstStyle/>
+          <a:p>
+            <a:r>
+              <a:rPr b="1" sz="1100">
+                <a:solidFill>
+                  <a:srgbClr val="6366F1"/>
+                </a:solidFill>
+              </a:rPr>
+              <a:t>Data Principle: </a:t>
+            </a:r>
+            <a:r>
+              <a:rPr sz="1100">
+                <a:solidFill>
+                  <a:srgbClr val="0F172A"/>
+                </a:solidFill>
+              </a:rPr>
+              <a:t>Preserving true extreme class imbalance is required to guarantee authentic evaluation.</a:t>
             </a:r>
           </a:p>
         </p:txBody>
@@ -4989,14 +7714,152 @@
       <p:grpSpPr/>
       <p:sp>
         <p:nvSpPr>
-          <p:cNvPr id="2" name="TextBox 1"/>
+          <p:cNvPr id="2" name="Rectangle 1"/>
+          <p:cNvSpPr/>
+          <p:nvPr/>
+        </p:nvSpPr>
+        <p:spPr>
+          <a:xfrm>
+            <a:off x="0" y="0"/>
+            <a:ext cx="12191695" cy="6858000"/>
+          </a:xfrm>
+          <a:prstGeom prst="rect">
+            <a:avLst/>
+          </a:prstGeom>
+          <a:solidFill>
+            <a:srgbClr val="F8FAFC"/>
+          </a:solidFill>
+          <a:ln>
+            <a:noFill/>
+          </a:ln>
+        </p:spPr>
+        <p:style>
+          <a:lnRef idx="1">
+            <a:schemeClr val="accent1"/>
+          </a:lnRef>
+          <a:fillRef idx="3">
+            <a:schemeClr val="accent1"/>
+          </a:fillRef>
+          <a:effectRef idx="2">
+            <a:schemeClr val="accent1"/>
+          </a:effectRef>
+          <a:fontRef idx="minor">
+            <a:schemeClr val="lt1"/>
+          </a:fontRef>
+        </p:style>
+        <p:txBody>
+          <a:bodyPr rtlCol="0" anchor="ctr"/>
+          <a:lstStyle/>
+          <a:p>
+            <a:pPr algn="ctr"/>
+          </a:p>
+        </p:txBody>
+      </p:sp>
+      <p:sp>
+        <p:nvSpPr>
+          <p:cNvPr id="3" name="TextBox 2"/>
           <p:cNvSpPr txBox="1"/>
           <p:nvPr/>
         </p:nvSpPr>
         <p:spPr>
           <a:xfrm>
-            <a:off x="731520" y="365760"/>
+            <a:off x="731520" y="457200"/>
             <a:ext cx="10698480" cy="1005840"/>
+          </a:xfrm>
+          <a:prstGeom prst="rect">
+            <a:avLst/>
+          </a:prstGeom>
+          <a:noFill/>
+        </p:spPr>
+        <p:txBody>
+          <a:bodyPr wrap="square" lIns="0" tIns="0" rIns="0" bIns="0">
+            <a:spAutoFit/>
+          </a:bodyPr>
+          <a:lstStyle/>
+          <a:p>
+            <a:pPr>
+              <a:defRPr sz="1000" b="1">
+                <a:solidFill>
+                  <a:srgbClr val="2563EB"/>
+                </a:solidFill>
+              </a:defRPr>
+            </a:pPr>
+            <a:r>
+              <a:t>EXPLORATORY DATA ANALYSIS</a:t>
+            </a:r>
+          </a:p>
+          <a:p>
+            <a:pPr>
+              <a:spcBef>
+                <a:spcPts val="400"/>
+              </a:spcBef>
+              <a:defRPr sz="2400" b="1">
+                <a:solidFill>
+                  <a:srgbClr val="0F172A"/>
+                </a:solidFill>
+              </a:defRPr>
+            </a:pPr>
+            <a:r>
+              <a:t>Data Quality Audit &amp; Empirical Fraud Footprints</a:t>
+            </a:r>
+          </a:p>
+        </p:txBody>
+      </p:sp>
+      <p:sp>
+        <p:nvSpPr>
+          <p:cNvPr id="4" name="Rounded Rectangle 3"/>
+          <p:cNvSpPr/>
+          <p:nvPr/>
+        </p:nvSpPr>
+        <p:spPr>
+          <a:xfrm>
+            <a:off x="731520" y="1737360"/>
+            <a:ext cx="5212080" cy="3931920"/>
+          </a:xfrm>
+          <a:prstGeom prst="roundRect">
+            <a:avLst/>
+          </a:prstGeom>
+          <a:solidFill>
+            <a:srgbClr val="FFFFFF"/>
+          </a:solidFill>
+          <a:ln w="12700">
+            <a:solidFill>
+              <a:srgbClr val="E2E8F0"/>
+            </a:solidFill>
+          </a:ln>
+        </p:spPr>
+        <p:style>
+          <a:lnRef idx="1">
+            <a:schemeClr val="accent1"/>
+          </a:lnRef>
+          <a:fillRef idx="3">
+            <a:schemeClr val="accent1"/>
+          </a:fillRef>
+          <a:effectRef idx="2">
+            <a:schemeClr val="accent1"/>
+          </a:effectRef>
+          <a:fontRef idx="minor">
+            <a:schemeClr val="lt1"/>
+          </a:fontRef>
+        </p:style>
+        <p:txBody>
+          <a:bodyPr rtlCol="0" anchor="ctr"/>
+          <a:lstStyle/>
+          <a:p>
+            <a:pPr algn="ctr"/>
+          </a:p>
+        </p:txBody>
+      </p:sp>
+      <p:sp>
+        <p:nvSpPr>
+          <p:cNvPr id="5" name="TextBox 4"/>
+          <p:cNvSpPr txBox="1"/>
+          <p:nvPr/>
+        </p:nvSpPr>
+        <p:spPr>
+          <a:xfrm>
+            <a:off x="1005840" y="2011680"/>
+            <a:ext cx="4663440" cy="3474720"/>
           </a:xfrm>
           <a:prstGeom prst="rect">
             <a:avLst/>
@@ -5010,40 +7873,118 @@
           <a:lstStyle/>
           <a:p>
             <a:pPr>
-              <a:defRPr sz="1000" b="1">
-                <a:solidFill>
-                  <a:srgbClr val="2563EB"/>
-                </a:solidFill>
-              </a:defRPr>
-            </a:pPr>
-            <a:r>
-              <a:t>RUBRIC 5 — FEATURE ENGINEERING</a:t>
+              <a:defRPr b="1" sz="1600">
+                <a:solidFill>
+                  <a:srgbClr val="0F172A"/>
+                </a:solidFill>
+              </a:defRPr>
+            </a:pPr>
+            <a:r>
+              <a:t>🔍 Quality Audit &amp; Distributions</a:t>
             </a:r>
           </a:p>
           <a:p>
             <a:pPr>
-              <a:defRPr sz="2200" b="1">
-                <a:solidFill>
-                  <a:srgbClr val="1E3A8A"/>
-                </a:solidFill>
-              </a:defRPr>
-            </a:pPr>
-            <a:r>
-              <a:t>4. Domain-Specific Feature Engineering</a:t>
-            </a:r>
-          </a:p>
-        </p:txBody>
-      </p:sp>
-      <p:sp>
-        <p:nvSpPr>
-          <p:cNvPr id="3" name="TextBox 2"/>
+              <a:spcBef>
+                <a:spcPts val="1000"/>
+              </a:spcBef>
+              <a:defRPr sz="1150">
+                <a:solidFill>
+                  <a:srgbClr val="475569"/>
+                </a:solidFill>
+              </a:defRPr>
+            </a:pPr>
+            <a:r>
+              <a:t>✔ Zero Missing Values: Complete 60,000 transaction records with automated median/mode imputation fallback.</a:t>
+            </a:r>
+          </a:p>
+          <a:p>
+            <a:pPr>
+              <a:spcBef>
+                <a:spcPts val="1000"/>
+              </a:spcBef>
+              <a:defRPr sz="1150">
+                <a:solidFill>
+                  <a:srgbClr val="475569"/>
+                </a:solidFill>
+              </a:defRPr>
+            </a:pPr>
+            <a:r>
+              <a:t>✔ No Exact Duplicates: High feature variance across genuine accounts and recipients.</a:t>
+            </a:r>
+          </a:p>
+          <a:p>
+            <a:pPr>
+              <a:spcBef>
+                <a:spcPts val="1000"/>
+              </a:spcBef>
+              <a:defRPr sz="1150">
+                <a:solidFill>
+                  <a:srgbClr val="475569"/>
+                </a:solidFill>
+              </a:defRPr>
+            </a:pPr>
+            <a:r>
+              <a:t>⚠ Extreme Power-Law Skew: Amounts span $1 to $1.5M; stabilized via log1p transformation to normalize heavy tails.</a:t>
+            </a:r>
+          </a:p>
+        </p:txBody>
+      </p:sp>
+      <p:sp>
+        <p:nvSpPr>
+          <p:cNvPr id="6" name="Rounded Rectangle 5"/>
+          <p:cNvSpPr/>
+          <p:nvPr/>
+        </p:nvSpPr>
+        <p:spPr>
+          <a:xfrm>
+            <a:off x="6217920" y="1737360"/>
+            <a:ext cx="5212080" cy="3931920"/>
+          </a:xfrm>
+          <a:prstGeom prst="roundRect">
+            <a:avLst/>
+          </a:prstGeom>
+          <a:solidFill>
+            <a:srgbClr val="FFFFFF"/>
+          </a:solidFill>
+          <a:ln w="12700">
+            <a:solidFill>
+              <a:srgbClr val="E2E8F0"/>
+            </a:solidFill>
+          </a:ln>
+        </p:spPr>
+        <p:style>
+          <a:lnRef idx="1">
+            <a:schemeClr val="accent1"/>
+          </a:lnRef>
+          <a:fillRef idx="3">
+            <a:schemeClr val="accent1"/>
+          </a:fillRef>
+          <a:effectRef idx="2">
+            <a:schemeClr val="accent1"/>
+          </a:effectRef>
+          <a:fontRef idx="minor">
+            <a:schemeClr val="lt1"/>
+          </a:fontRef>
+        </p:style>
+        <p:txBody>
+          <a:bodyPr rtlCol="0" anchor="ctr"/>
+          <a:lstStyle/>
+          <a:p>
+            <a:pPr algn="ctr"/>
+          </a:p>
+        </p:txBody>
+      </p:sp>
+      <p:sp>
+        <p:nvSpPr>
+          <p:cNvPr id="7" name="TextBox 6"/>
           <p:cNvSpPr txBox="1"/>
           <p:nvPr/>
         </p:nvSpPr>
         <p:spPr>
           <a:xfrm>
-            <a:off x="731520" y="1463040"/>
-            <a:ext cx="5303520" cy="4754880"/>
+            <a:off x="6492240" y="2011680"/>
+            <a:ext cx="4663440" cy="3474720"/>
           </a:xfrm>
           <a:prstGeom prst="rect">
             <a:avLst/>
@@ -5057,105 +7998,192 @@
           <a:lstStyle/>
           <a:p>
             <a:pPr>
-              <a:spcAft>
-                <a:spcPts val="1200"/>
-              </a:spcAft>
-              <a:defRPr sz="1300">
-                <a:solidFill>
-                  <a:srgbClr val="1E293B"/>
-                </a:solidFill>
-              </a:defRPr>
-            </a:pPr>
-            <a:r>
-              <a:t>• Balance Reconciliation Errors: error_balance_orig = (newbalanceOrig + amount) - oldbalanceOrg captures unauthorized balance manipulation.</a:t>
+              <a:defRPr b="1" sz="1600">
+                <a:solidFill>
+                  <a:srgbClr val="0F172A"/>
+                </a:solidFill>
+              </a:defRPr>
+            </a:pPr>
+            <a:r>
+              <a:t>🚨 Critical Fraud Signatures</a:t>
             </a:r>
           </a:p>
           <a:p>
             <a:pPr>
-              <a:spcAft>
-                <a:spcPts val="1200"/>
-              </a:spcAft>
-              <a:defRPr sz="1300">
-                <a:solidFill>
-                  <a:srgbClr val="1E293B"/>
-                </a:solidFill>
-              </a:defRPr>
-            </a:pPr>
-            <a:r>
-              <a:t>• Account Liquidation Flag: orig_account_drained = 1 if new balance == 0 &amp; old balance &gt; 0.</a:t>
+              <a:spcBef>
+                <a:spcPts val="1000"/>
+              </a:spcBef>
+              <a:defRPr sz="1150">
+                <a:solidFill>
+                  <a:srgbClr val="475569"/>
+                </a:solidFill>
+              </a:defRPr>
+            </a:pPr>
+            <a:r>
+              <a:t>• 100% Rail Concentration: All fraud strictly confined to TRANSFER and CASH_OUT operations (illicit siphon &amp; liquidation).</a:t>
             </a:r>
           </a:p>
           <a:p>
             <a:pPr>
-              <a:spcAft>
-                <a:spcPts val="1200"/>
-              </a:spcAft>
-              <a:defRPr sz="1300">
-                <a:solidFill>
-                  <a:srgbClr val="1E293B"/>
-                </a:solidFill>
-              </a:defRPr>
-            </a:pPr>
-            <a:r>
-              <a:t>• Mule Account Sentinel: Flags accounts with 0 initial balance that are drained immediately upon fund receipt.</a:t>
+              <a:spcBef>
+                <a:spcPts val="1000"/>
+              </a:spcBef>
+              <a:defRPr sz="1150">
+                <a:solidFill>
+                  <a:srgbClr val="475569"/>
+                </a:solidFill>
+              </a:defRPr>
+            </a:pPr>
+            <a:r>
+              <a:t>• Off-Peak Cyber Attack Window: Fraud spikes between 00:00 and 05:00 hours when manual oversight is minimal.</a:t>
             </a:r>
           </a:p>
           <a:p>
             <a:pPr>
-              <a:spcAft>
-                <a:spcPts val="1200"/>
-              </a:spcAft>
-              <a:defRPr sz="1300">
-                <a:solidFill>
-                  <a:srgbClr val="1E293B"/>
-                </a:solidFill>
-              </a:defRPr>
-            </a:pPr>
-            <a:r>
-              <a:t>• Cyber Trust Index: Fuses device fingerprint trust score and IP geo-velocity anomaly scores.</a:t>
-            </a:r>
-          </a:p>
-          <a:p>
-            <a:pPr>
-              <a:spcAft>
-                <a:spcPts val="1200"/>
-              </a:spcAft>
-              <a:defRPr sz="1300">
-                <a:solidFill>
-                  <a:srgbClr val="1E293B"/>
-                </a:solidFill>
-              </a:defRPr>
-            </a:pPr>
-            <a:r>
-              <a:t>• Key Finding: Reconciliation errors and liquidation flags contributed &gt;60% of total model predictive power.</a:t>
-            </a:r>
-          </a:p>
-        </p:txBody>
-      </p:sp>
-      <p:pic>
-        <p:nvPicPr>
-          <p:cNvPr id="4" name="Picture 3" descr="eval_feature_importance.png"/>
-          <p:cNvPicPr>
-            <a:picLocks noChangeAspect="1"/>
-          </p:cNvPicPr>
-          <p:nvPr/>
-        </p:nvPicPr>
-        <p:blipFill>
-          <a:blip r:embed="rId2"/>
-          <a:stretch>
-            <a:fillRect/>
-          </a:stretch>
-        </p:blipFill>
-        <p:spPr>
-          <a:xfrm>
-            <a:off x="6309360" y="1463040"/>
-            <a:ext cx="5212080" cy="3474720"/>
+              <a:spcBef>
+                <a:spcPts val="1000"/>
+              </a:spcBef>
+              <a:defRPr sz="1150">
+                <a:solidFill>
+                  <a:srgbClr val="475569"/>
+                </a:solidFill>
+              </a:defRPr>
+            </a:pPr>
+            <a:r>
+              <a:t>• 94.6% Account Liquidation: Originator balance dropped to exactly $0.00 after transaction execution.</a:t>
+            </a:r>
+          </a:p>
+        </p:txBody>
+      </p:sp>
+      <p:sp>
+        <p:nvSpPr>
+          <p:cNvPr id="8" name="Rounded Rectangle 7"/>
+          <p:cNvSpPr/>
+          <p:nvPr/>
+        </p:nvSpPr>
+        <p:spPr>
+          <a:xfrm>
+            <a:off x="731520" y="5943600"/>
+            <a:ext cx="10728655" cy="502920"/>
+          </a:xfrm>
+          <a:prstGeom prst="roundRect">
+            <a:avLst/>
+          </a:prstGeom>
+          <a:solidFill>
+            <a:srgbClr val="EEF2FF"/>
+          </a:solidFill>
+          <a:ln w="12700">
+            <a:solidFill>
+              <a:srgbClr val="6366F1"/>
+            </a:solidFill>
+          </a:ln>
+        </p:spPr>
+        <p:style>
+          <a:lnRef idx="1">
+            <a:schemeClr val="accent1"/>
+          </a:lnRef>
+          <a:fillRef idx="3">
+            <a:schemeClr val="accent1"/>
+          </a:fillRef>
+          <a:effectRef idx="2">
+            <a:schemeClr val="accent1"/>
+          </a:effectRef>
+          <a:fontRef idx="minor">
+            <a:schemeClr val="lt1"/>
+          </a:fontRef>
+        </p:style>
+        <p:txBody>
+          <a:bodyPr rtlCol="0" anchor="ctr"/>
+          <a:lstStyle/>
+          <a:p>
+            <a:pPr algn="ctr"/>
+          </a:p>
+        </p:txBody>
+      </p:sp>
+      <p:sp>
+        <p:nvSpPr>
+          <p:cNvPr id="9" name="Rectangle 8"/>
+          <p:cNvSpPr/>
+          <p:nvPr/>
+        </p:nvSpPr>
+        <p:spPr>
+          <a:xfrm>
+            <a:off x="731520" y="5943600"/>
+            <a:ext cx="73152" cy="502920"/>
           </a:xfrm>
           <a:prstGeom prst="rect">
             <a:avLst/>
           </a:prstGeom>
-        </p:spPr>
-      </p:pic>
+          <a:solidFill>
+            <a:srgbClr val="6366F1"/>
+          </a:solidFill>
+          <a:ln>
+            <a:noFill/>
+          </a:ln>
+        </p:spPr>
+        <p:style>
+          <a:lnRef idx="1">
+            <a:schemeClr val="accent1"/>
+          </a:lnRef>
+          <a:fillRef idx="3">
+            <a:schemeClr val="accent1"/>
+          </a:fillRef>
+          <a:effectRef idx="2">
+            <a:schemeClr val="accent1"/>
+          </a:effectRef>
+          <a:fontRef idx="minor">
+            <a:schemeClr val="lt1"/>
+          </a:fontRef>
+        </p:style>
+        <p:txBody>
+          <a:bodyPr rtlCol="0" anchor="ctr"/>
+          <a:lstStyle/>
+          <a:p>
+            <a:pPr algn="ctr"/>
+          </a:p>
+        </p:txBody>
+      </p:sp>
+      <p:sp>
+        <p:nvSpPr>
+          <p:cNvPr id="10" name="TextBox 9"/>
+          <p:cNvSpPr txBox="1"/>
+          <p:nvPr/>
+        </p:nvSpPr>
+        <p:spPr>
+          <a:xfrm>
+            <a:off x="960120" y="5961888"/>
+            <a:ext cx="10332720" cy="457200"/>
+          </a:xfrm>
+          <a:prstGeom prst="rect">
+            <a:avLst/>
+          </a:prstGeom>
+          <a:noFill/>
+        </p:spPr>
+        <p:txBody>
+          <a:bodyPr wrap="square" lIns="0" tIns="0" rIns="0" bIns="0">
+            <a:spAutoFit/>
+          </a:bodyPr>
+          <a:lstStyle/>
+          <a:p>
+            <a:r>
+              <a:rPr b="1" sz="1100">
+                <a:solidFill>
+                  <a:srgbClr val="6366F1"/>
+                </a:solidFill>
+              </a:rPr>
+              <a:t>Finding: </a:t>
+            </a:r>
+            <a:r>
+              <a:rPr sz="1100">
+                <a:solidFill>
+                  <a:srgbClr val="0F172A"/>
+                </a:solidFill>
+              </a:rPr>
+              <a:t>Correlation confirms strong linear predictive signals between balance drainage and fraudulent intent.</a:t>
+            </a:r>
+          </a:p>
+        </p:txBody>
+      </p:sp>
     </p:spTree>
   </p:cSld>
   <p:clrMapOvr>
@@ -5176,14 +8204,152 @@
       <p:grpSpPr/>
       <p:sp>
         <p:nvSpPr>
-          <p:cNvPr id="2" name="TextBox 1"/>
+          <p:cNvPr id="2" name="Rectangle 1"/>
+          <p:cNvSpPr/>
+          <p:nvPr/>
+        </p:nvSpPr>
+        <p:spPr>
+          <a:xfrm>
+            <a:off x="0" y="0"/>
+            <a:ext cx="12191695" cy="6858000"/>
+          </a:xfrm>
+          <a:prstGeom prst="rect">
+            <a:avLst/>
+          </a:prstGeom>
+          <a:solidFill>
+            <a:srgbClr val="F8FAFC"/>
+          </a:solidFill>
+          <a:ln>
+            <a:noFill/>
+          </a:ln>
+        </p:spPr>
+        <p:style>
+          <a:lnRef idx="1">
+            <a:schemeClr val="accent1"/>
+          </a:lnRef>
+          <a:fillRef idx="3">
+            <a:schemeClr val="accent1"/>
+          </a:fillRef>
+          <a:effectRef idx="2">
+            <a:schemeClr val="accent1"/>
+          </a:effectRef>
+          <a:fontRef idx="minor">
+            <a:schemeClr val="lt1"/>
+          </a:fontRef>
+        </p:style>
+        <p:txBody>
+          <a:bodyPr rtlCol="0" anchor="ctr"/>
+          <a:lstStyle/>
+          <a:p>
+            <a:pPr algn="ctr"/>
+          </a:p>
+        </p:txBody>
+      </p:sp>
+      <p:sp>
+        <p:nvSpPr>
+          <p:cNvPr id="3" name="TextBox 2"/>
           <p:cNvSpPr txBox="1"/>
           <p:nvPr/>
         </p:nvSpPr>
         <p:spPr>
           <a:xfrm>
-            <a:off x="731520" y="365760"/>
+            <a:off x="731520" y="457200"/>
             <a:ext cx="10698480" cy="1005840"/>
+          </a:xfrm>
+          <a:prstGeom prst="rect">
+            <a:avLst/>
+          </a:prstGeom>
+          <a:noFill/>
+        </p:spPr>
+        <p:txBody>
+          <a:bodyPr wrap="square" lIns="0" tIns="0" rIns="0" bIns="0">
+            <a:spAutoFit/>
+          </a:bodyPr>
+          <a:lstStyle/>
+          <a:p>
+            <a:pPr>
+              <a:defRPr sz="1000" b="1">
+                <a:solidFill>
+                  <a:srgbClr val="2563EB"/>
+                </a:solidFill>
+              </a:defRPr>
+            </a:pPr>
+            <a:r>
+              <a:t>DATA ENGINEERING</a:t>
+            </a:r>
+          </a:p>
+          <a:p>
+            <a:pPr>
+              <a:spcBef>
+                <a:spcPts val="400"/>
+              </a:spcBef>
+              <a:defRPr sz="2400" b="1">
+                <a:solidFill>
+                  <a:srgbClr val="0F172A"/>
+                </a:solidFill>
+              </a:defRPr>
+            </a:pPr>
+            <a:r>
+              <a:t>Leakage-Safe Preprocessing Pipeline</a:t>
+            </a:r>
+          </a:p>
+        </p:txBody>
+      </p:sp>
+      <p:sp>
+        <p:nvSpPr>
+          <p:cNvPr id="4" name="Rounded Rectangle 3"/>
+          <p:cNvSpPr/>
+          <p:nvPr/>
+        </p:nvSpPr>
+        <p:spPr>
+          <a:xfrm>
+            <a:off x="731520" y="2011680"/>
+            <a:ext cx="3410712" cy="2194560"/>
+          </a:xfrm>
+          <a:prstGeom prst="roundRect">
+            <a:avLst/>
+          </a:prstGeom>
+          <a:solidFill>
+            <a:srgbClr val="FFFFFF"/>
+          </a:solidFill>
+          <a:ln w="12700">
+            <a:solidFill>
+              <a:srgbClr val="E2E8F0"/>
+            </a:solidFill>
+          </a:ln>
+        </p:spPr>
+        <p:style>
+          <a:lnRef idx="1">
+            <a:schemeClr val="accent1"/>
+          </a:lnRef>
+          <a:fillRef idx="3">
+            <a:schemeClr val="accent1"/>
+          </a:fillRef>
+          <a:effectRef idx="2">
+            <a:schemeClr val="accent1"/>
+          </a:effectRef>
+          <a:fontRef idx="minor">
+            <a:schemeClr val="lt1"/>
+          </a:fontRef>
+        </p:style>
+        <p:txBody>
+          <a:bodyPr rtlCol="0" anchor="ctr"/>
+          <a:lstStyle/>
+          <a:p>
+            <a:pPr algn="ctr"/>
+          </a:p>
+        </p:txBody>
+      </p:sp>
+      <p:sp>
+        <p:nvSpPr>
+          <p:cNvPr id="5" name="TextBox 4"/>
+          <p:cNvSpPr txBox="1"/>
+          <p:nvPr/>
+        </p:nvSpPr>
+        <p:spPr>
+          <a:xfrm>
+            <a:off x="960120" y="2286000"/>
+            <a:ext cx="2953512" cy="1737360"/>
           </a:xfrm>
           <a:prstGeom prst="rect">
             <a:avLst/>
@@ -5197,40 +8363,88 @@
           <a:lstStyle/>
           <a:p>
             <a:pPr>
-              <a:defRPr sz="1000" b="1">
+              <a:defRPr b="1" sz="1400">
                 <a:solidFill>
                   <a:srgbClr val="2563EB"/>
                 </a:solidFill>
               </a:defRPr>
             </a:pPr>
             <a:r>
-              <a:t>RUBRIC 6 — MODEL SELECTION</a:t>
+              <a:t>01. 80 / 20 Stratified Split</a:t>
             </a:r>
           </a:p>
           <a:p>
             <a:pPr>
-              <a:defRPr sz="2200" b="1">
-                <a:solidFill>
-                  <a:srgbClr val="1E3A8A"/>
-                </a:solidFill>
-              </a:defRPr>
-            </a:pPr>
-            <a:r>
-              <a:t>5. The Dual-Engine Fusion Architecture</a:t>
-            </a:r>
-          </a:p>
-        </p:txBody>
-      </p:sp>
-      <p:sp>
-        <p:nvSpPr>
-          <p:cNvPr id="3" name="TextBox 2"/>
+              <a:spcBef>
+                <a:spcPts val="800"/>
+              </a:spcBef>
+              <a:defRPr sz="1150">
+                <a:solidFill>
+                  <a:srgbClr val="475569"/>
+                </a:solidFill>
+              </a:defRPr>
+            </a:pPr>
+            <a:r>
+              <a:t>48,000 Train / 12,000 Test preserve exact 0.50% rare fraud proportion.</a:t>
+            </a:r>
+          </a:p>
+        </p:txBody>
+      </p:sp>
+      <p:sp>
+        <p:nvSpPr>
+          <p:cNvPr id="6" name="Rounded Rectangle 5"/>
+          <p:cNvSpPr/>
+          <p:nvPr/>
+        </p:nvSpPr>
+        <p:spPr>
+          <a:xfrm>
+            <a:off x="4389120" y="2011680"/>
+            <a:ext cx="3410712" cy="2194560"/>
+          </a:xfrm>
+          <a:prstGeom prst="roundRect">
+            <a:avLst/>
+          </a:prstGeom>
+          <a:solidFill>
+            <a:srgbClr val="FFFFFF"/>
+          </a:solidFill>
+          <a:ln w="12700">
+            <a:solidFill>
+              <a:srgbClr val="E2E8F0"/>
+            </a:solidFill>
+          </a:ln>
+        </p:spPr>
+        <p:style>
+          <a:lnRef idx="1">
+            <a:schemeClr val="accent1"/>
+          </a:lnRef>
+          <a:fillRef idx="3">
+            <a:schemeClr val="accent1"/>
+          </a:fillRef>
+          <a:effectRef idx="2">
+            <a:schemeClr val="accent1"/>
+          </a:effectRef>
+          <a:fontRef idx="minor">
+            <a:schemeClr val="lt1"/>
+          </a:fontRef>
+        </p:style>
+        <p:txBody>
+          <a:bodyPr rtlCol="0" anchor="ctr"/>
+          <a:lstStyle/>
+          <a:p>
+            <a:pPr algn="ctr"/>
+          </a:p>
+        </p:txBody>
+      </p:sp>
+      <p:sp>
+        <p:nvSpPr>
+          <p:cNvPr id="7" name="TextBox 6"/>
           <p:cNvSpPr txBox="1"/>
           <p:nvPr/>
         </p:nvSpPr>
         <p:spPr>
           <a:xfrm>
-            <a:off x="731520" y="1463040"/>
-            <a:ext cx="10698480" cy="4754880"/>
+            <a:off x="4617720" y="2286000"/>
+            <a:ext cx="2953512" cy="1737360"/>
           </a:xfrm>
           <a:prstGeom prst="rect">
             <a:avLst/>
@@ -5244,77 +8458,348 @@
           <a:lstStyle/>
           <a:p>
             <a:pPr>
-              <a:spcAft>
-                <a:spcPts val="1400"/>
-              </a:spcAft>
-              <a:defRPr sz="1400">
-                <a:solidFill>
-                  <a:srgbClr val="1E293B"/>
-                </a:solidFill>
-              </a:defRPr>
-            </a:pPr>
-            <a:r>
-              <a:t>• Why Dual-Engine? Supervised classifiers excel at catching known fraud patterns, but fail against brand-new zero-day attacks. Unsupervised Anomaly Detection flags novel behavioral outliers without labels.</a:t>
+              <a:defRPr b="1" sz="1400">
+                <a:solidFill>
+                  <a:srgbClr val="2563EB"/>
+                </a:solidFill>
+              </a:defRPr>
+            </a:pPr>
+            <a:r>
+              <a:t>02. Feature Engineering</a:t>
             </a:r>
           </a:p>
           <a:p>
             <a:pPr>
-              <a:spcAft>
-                <a:spcPts val="1400"/>
-              </a:spcAft>
-              <a:defRPr sz="1400">
-                <a:solidFill>
-                  <a:srgbClr val="1E293B"/>
-                </a:solidFill>
-              </a:defRPr>
-            </a:pPr>
-            <a:r>
-              <a:t>• Engine 1 — Supervised Classification: Random Forest, XGBoost, and HistGradientBoosting tuned with cost-sensitive class weights (scale_pos_weight = 150).</a:t>
-            </a:r>
-          </a:p>
+              <a:spcBef>
+                <a:spcPts val="800"/>
+              </a:spcBef>
+              <a:defRPr sz="1150">
+                <a:solidFill>
+                  <a:srgbClr val="475569"/>
+                </a:solidFill>
+              </a:defRPr>
+            </a:pPr>
+            <a:r>
+              <a:t>Balance reconciliation deltas and cyber trust indices synthesized row-wise.</a:t>
+            </a:r>
+          </a:p>
+        </p:txBody>
+      </p:sp>
+      <p:sp>
+        <p:nvSpPr>
+          <p:cNvPr id="8" name="Rounded Rectangle 7"/>
+          <p:cNvSpPr/>
+          <p:nvPr/>
+        </p:nvSpPr>
+        <p:spPr>
+          <a:xfrm>
+            <a:off x="8046720" y="2011680"/>
+            <a:ext cx="3410712" cy="2194560"/>
+          </a:xfrm>
+          <a:prstGeom prst="roundRect">
+            <a:avLst/>
+          </a:prstGeom>
+          <a:solidFill>
+            <a:srgbClr val="FFFFFF"/>
+          </a:solidFill>
+          <a:ln w="12700">
+            <a:solidFill>
+              <a:srgbClr val="E2E8F0"/>
+            </a:solidFill>
+          </a:ln>
+        </p:spPr>
+        <p:style>
+          <a:lnRef idx="1">
+            <a:schemeClr val="accent1"/>
+          </a:lnRef>
+          <a:fillRef idx="3">
+            <a:schemeClr val="accent1"/>
+          </a:fillRef>
+          <a:effectRef idx="2">
+            <a:schemeClr val="accent1"/>
+          </a:effectRef>
+          <a:fontRef idx="minor">
+            <a:schemeClr val="lt1"/>
+          </a:fontRef>
+        </p:style>
+        <p:txBody>
+          <a:bodyPr rtlCol="0" anchor="ctr"/>
+          <a:lstStyle/>
+          <a:p>
+            <a:pPr algn="ctr"/>
+          </a:p>
+        </p:txBody>
+      </p:sp>
+      <p:sp>
+        <p:nvSpPr>
+          <p:cNvPr id="9" name="TextBox 8"/>
+          <p:cNvSpPr txBox="1"/>
+          <p:nvPr/>
+        </p:nvSpPr>
+        <p:spPr>
+          <a:xfrm>
+            <a:off x="8275320" y="2286000"/>
+            <a:ext cx="2953512" cy="1737360"/>
+          </a:xfrm>
+          <a:prstGeom prst="rect">
+            <a:avLst/>
+          </a:prstGeom>
+          <a:noFill/>
+        </p:spPr>
+        <p:txBody>
+          <a:bodyPr wrap="square">
+            <a:spAutoFit/>
+          </a:bodyPr>
+          <a:lstStyle/>
           <a:p>
             <a:pPr>
-              <a:spcAft>
-                <a:spcPts val="1400"/>
-              </a:spcAft>
-              <a:defRPr sz="1400">
-                <a:solidFill>
-                  <a:srgbClr val="1E293B"/>
-                </a:solidFill>
-              </a:defRPr>
-            </a:pPr>
-            <a:r>
-              <a:t>• Engine 2 — Unsupervised Anomaly Detection: Isolation Forest recursively partitions feature space; outliers require significantly fewer splits to isolate.</a:t>
+              <a:defRPr b="1" sz="1400">
+                <a:solidFill>
+                  <a:srgbClr val="2563EB"/>
+                </a:solidFill>
+              </a:defRPr>
+            </a:pPr>
+            <a:r>
+              <a:t>03. Strict Transformer Isolation</a:t>
             </a:r>
           </a:p>
           <a:p>
             <a:pPr>
-              <a:spcAft>
-                <a:spcPts val="1400"/>
-              </a:spcAft>
-              <a:defRPr sz="1400">
-                <a:solidFill>
-                  <a:srgbClr val="1E293B"/>
-                </a:solidFill>
-              </a:defRPr>
-            </a:pPr>
-            <a:r>
-              <a:t>• FraudLens Fusion Engine: Composite Risk Score = (0.70 * P_supervised + 0.30 * S_anomaly) * 100.</a:t>
-            </a:r>
-          </a:p>
+              <a:spcBef>
+                <a:spcPts val="800"/>
+              </a:spcBef>
+              <a:defRPr sz="1150">
+                <a:solidFill>
+                  <a:srgbClr val="475569"/>
+                </a:solidFill>
+              </a:defRPr>
+            </a:pPr>
+            <a:r>
+              <a:t>RobustScaler fitted strictly on training fold; test set purely transformed.</a:t>
+            </a:r>
+          </a:p>
+        </p:txBody>
+      </p:sp>
+      <p:sp>
+        <p:nvSpPr>
+          <p:cNvPr id="10" name="Rounded Rectangle 9"/>
+          <p:cNvSpPr/>
+          <p:nvPr/>
+        </p:nvSpPr>
+        <p:spPr>
+          <a:xfrm>
+            <a:off x="731520" y="4480560"/>
+            <a:ext cx="10728655" cy="1188720"/>
+          </a:xfrm>
+          <a:prstGeom prst="roundRect">
+            <a:avLst/>
+          </a:prstGeom>
+          <a:solidFill>
+            <a:srgbClr val="FFFFFF"/>
+          </a:solidFill>
+          <a:ln w="12700">
+            <a:solidFill>
+              <a:srgbClr val="E2E8F0"/>
+            </a:solidFill>
+          </a:ln>
+        </p:spPr>
+        <p:style>
+          <a:lnRef idx="1">
+            <a:schemeClr val="accent1"/>
+          </a:lnRef>
+          <a:fillRef idx="3">
+            <a:schemeClr val="accent1"/>
+          </a:fillRef>
+          <a:effectRef idx="2">
+            <a:schemeClr val="accent1"/>
+          </a:effectRef>
+          <a:fontRef idx="minor">
+            <a:schemeClr val="lt1"/>
+          </a:fontRef>
+        </p:style>
+        <p:txBody>
+          <a:bodyPr rtlCol="0" anchor="ctr"/>
+          <a:lstStyle/>
+          <a:p>
+            <a:pPr algn="ctr"/>
+          </a:p>
+        </p:txBody>
+      </p:sp>
+      <p:sp>
+        <p:nvSpPr>
+          <p:cNvPr id="11" name="TextBox 10"/>
+          <p:cNvSpPr txBox="1"/>
+          <p:nvPr/>
+        </p:nvSpPr>
+        <p:spPr>
+          <a:xfrm>
+            <a:off x="1005840" y="4663440"/>
+            <a:ext cx="10149840" cy="822960"/>
+          </a:xfrm>
+          <a:prstGeom prst="rect">
+            <a:avLst/>
+          </a:prstGeom>
+          <a:noFill/>
+        </p:spPr>
+        <p:txBody>
+          <a:bodyPr wrap="square">
+            <a:spAutoFit/>
+          </a:bodyPr>
+          <a:lstStyle/>
           <a:p>
             <a:pPr>
-              <a:spcAft>
-                <a:spcPts val="1400"/>
-              </a:spcAft>
-              <a:defRPr sz="1400">
-                <a:solidFill>
-                  <a:srgbClr val="1E293B"/>
-                </a:solidFill>
-              </a:defRPr>
-            </a:pPr>
-            <a:r>
-              <a:t>• Adaptive 3-Tier Routing: Score &lt; 35: APPROVE (Frictionless) | 35-75: CHALLENGE (Step-Up MFA OTP) | &gt;= 75: AUTO-BLOCK (Immediate freeze).</a:t>
+              <a:defRPr b="1" sz="1300">
+                <a:solidFill>
+                  <a:srgbClr val="0F172A"/>
+                </a:solidFill>
+              </a:defRPr>
+            </a:pPr>
+            <a:r>
+              <a:t>🔄 Cross-Validation &amp; Production Serving Integrity</a:t>
+            </a:r>
+          </a:p>
+          <a:p>
+            <a:pPr>
+              <a:spcBef>
+                <a:spcPts val="200"/>
+              </a:spcBef>
+              <a:defRPr sz="1100">
+                <a:solidFill>
+                  <a:srgbClr val="475569"/>
+                </a:solidFill>
+              </a:defRPr>
+            </a:pPr>
+            <a:r>
+              <a:t>Every preprocessing transformer (RobustScaler, OneHotEncoder) is serialized into preprocessor.joblib. Production web serving mirrors exact training preprocessing with zero leakage.</a:t>
+            </a:r>
+          </a:p>
+        </p:txBody>
+      </p:sp>
+      <p:sp>
+        <p:nvSpPr>
+          <p:cNvPr id="12" name="Rounded Rectangle 11"/>
+          <p:cNvSpPr/>
+          <p:nvPr/>
+        </p:nvSpPr>
+        <p:spPr>
+          <a:xfrm>
+            <a:off x="731520" y="5943600"/>
+            <a:ext cx="10728655" cy="502920"/>
+          </a:xfrm>
+          <a:prstGeom prst="roundRect">
+            <a:avLst/>
+          </a:prstGeom>
+          <a:solidFill>
+            <a:srgbClr val="EEF2FF"/>
+          </a:solidFill>
+          <a:ln w="12700">
+            <a:solidFill>
+              <a:srgbClr val="6366F1"/>
+            </a:solidFill>
+          </a:ln>
+        </p:spPr>
+        <p:style>
+          <a:lnRef idx="1">
+            <a:schemeClr val="accent1"/>
+          </a:lnRef>
+          <a:fillRef idx="3">
+            <a:schemeClr val="accent1"/>
+          </a:fillRef>
+          <a:effectRef idx="2">
+            <a:schemeClr val="accent1"/>
+          </a:effectRef>
+          <a:fontRef idx="minor">
+            <a:schemeClr val="lt1"/>
+          </a:fontRef>
+        </p:style>
+        <p:txBody>
+          <a:bodyPr rtlCol="0" anchor="ctr"/>
+          <a:lstStyle/>
+          <a:p>
+            <a:pPr algn="ctr"/>
+          </a:p>
+        </p:txBody>
+      </p:sp>
+      <p:sp>
+        <p:nvSpPr>
+          <p:cNvPr id="13" name="Rectangle 12"/>
+          <p:cNvSpPr/>
+          <p:nvPr/>
+        </p:nvSpPr>
+        <p:spPr>
+          <a:xfrm>
+            <a:off x="731520" y="5943600"/>
+            <a:ext cx="73152" cy="502920"/>
+          </a:xfrm>
+          <a:prstGeom prst="rect">
+            <a:avLst/>
+          </a:prstGeom>
+          <a:solidFill>
+            <a:srgbClr val="6366F1"/>
+          </a:solidFill>
+          <a:ln>
+            <a:noFill/>
+          </a:ln>
+        </p:spPr>
+        <p:style>
+          <a:lnRef idx="1">
+            <a:schemeClr val="accent1"/>
+          </a:lnRef>
+          <a:fillRef idx="3">
+            <a:schemeClr val="accent1"/>
+          </a:fillRef>
+          <a:effectRef idx="2">
+            <a:schemeClr val="accent1"/>
+          </a:effectRef>
+          <a:fontRef idx="minor">
+            <a:schemeClr val="lt1"/>
+          </a:fontRef>
+        </p:style>
+        <p:txBody>
+          <a:bodyPr rtlCol="0" anchor="ctr"/>
+          <a:lstStyle/>
+          <a:p>
+            <a:pPr algn="ctr"/>
+          </a:p>
+        </p:txBody>
+      </p:sp>
+      <p:sp>
+        <p:nvSpPr>
+          <p:cNvPr id="14" name="TextBox 13"/>
+          <p:cNvSpPr txBox="1"/>
+          <p:nvPr/>
+        </p:nvSpPr>
+        <p:spPr>
+          <a:xfrm>
+            <a:off x="960120" y="5961888"/>
+            <a:ext cx="10332720" cy="457200"/>
+          </a:xfrm>
+          <a:prstGeom prst="rect">
+            <a:avLst/>
+          </a:prstGeom>
+          <a:noFill/>
+        </p:spPr>
+        <p:txBody>
+          <a:bodyPr wrap="square" lIns="0" tIns="0" rIns="0" bIns="0">
+            <a:spAutoFit/>
+          </a:bodyPr>
+          <a:lstStyle/>
+          <a:p>
+            <a:r>
+              <a:rPr b="1" sz="1100">
+                <a:solidFill>
+                  <a:srgbClr val="6366F1"/>
+                </a:solidFill>
+              </a:rPr>
+              <a:t>Integrity Guarantee: </a:t>
+            </a:r>
+            <a:r>
+              <a:rPr sz="1100">
+                <a:solidFill>
+                  <a:srgbClr val="0F172A"/>
+                </a:solidFill>
+              </a:rPr>
+              <a:t>Splitting before transforming ensures test evaluation perfectly reflects production conditions.</a:t>
             </a:r>
           </a:p>
         </p:txBody>
@@ -5339,14 +8824,152 @@
       <p:grpSpPr/>
       <p:sp>
         <p:nvSpPr>
-          <p:cNvPr id="2" name="TextBox 1"/>
+          <p:cNvPr id="2" name="Rectangle 1"/>
+          <p:cNvSpPr/>
+          <p:nvPr/>
+        </p:nvSpPr>
+        <p:spPr>
+          <a:xfrm>
+            <a:off x="0" y="0"/>
+            <a:ext cx="12191695" cy="6858000"/>
+          </a:xfrm>
+          <a:prstGeom prst="rect">
+            <a:avLst/>
+          </a:prstGeom>
+          <a:solidFill>
+            <a:srgbClr val="F8FAFC"/>
+          </a:solidFill>
+          <a:ln>
+            <a:noFill/>
+          </a:ln>
+        </p:spPr>
+        <p:style>
+          <a:lnRef idx="1">
+            <a:schemeClr val="accent1"/>
+          </a:lnRef>
+          <a:fillRef idx="3">
+            <a:schemeClr val="accent1"/>
+          </a:fillRef>
+          <a:effectRef idx="2">
+            <a:schemeClr val="accent1"/>
+          </a:effectRef>
+          <a:fontRef idx="minor">
+            <a:schemeClr val="lt1"/>
+          </a:fontRef>
+        </p:style>
+        <p:txBody>
+          <a:bodyPr rtlCol="0" anchor="ctr"/>
+          <a:lstStyle/>
+          <a:p>
+            <a:pPr algn="ctr"/>
+          </a:p>
+        </p:txBody>
+      </p:sp>
+      <p:sp>
+        <p:nvSpPr>
+          <p:cNvPr id="3" name="TextBox 2"/>
           <p:cNvSpPr txBox="1"/>
           <p:nvPr/>
         </p:nvSpPr>
         <p:spPr>
           <a:xfrm>
-            <a:off x="731520" y="365760"/>
+            <a:off x="731520" y="457200"/>
             <a:ext cx="10698480" cy="1005840"/>
+          </a:xfrm>
+          <a:prstGeom prst="rect">
+            <a:avLst/>
+          </a:prstGeom>
+          <a:noFill/>
+        </p:spPr>
+        <p:txBody>
+          <a:bodyPr wrap="square" lIns="0" tIns="0" rIns="0" bIns="0">
+            <a:spAutoFit/>
+          </a:bodyPr>
+          <a:lstStyle/>
+          <a:p>
+            <a:pPr>
+              <a:defRPr sz="1000" b="1">
+                <a:solidFill>
+                  <a:srgbClr val="2563EB"/>
+                </a:solidFill>
+              </a:defRPr>
+            </a:pPr>
+            <a:r>
+              <a:t>FEATURE ENGINEERING</a:t>
+            </a:r>
+          </a:p>
+          <a:p>
+            <a:pPr>
+              <a:spcBef>
+                <a:spcPts val="400"/>
+              </a:spcBef>
+              <a:defRPr sz="2400" b="1">
+                <a:solidFill>
+                  <a:srgbClr val="0F172A"/>
+                </a:solidFill>
+              </a:defRPr>
+            </a:pPr>
+            <a:r>
+              <a:t>Domain-Specific Feature Synthesis &amp; Attribution</a:t>
+            </a:r>
+          </a:p>
+        </p:txBody>
+      </p:sp>
+      <p:sp>
+        <p:nvSpPr>
+          <p:cNvPr id="4" name="Rounded Rectangle 3"/>
+          <p:cNvSpPr/>
+          <p:nvPr/>
+        </p:nvSpPr>
+        <p:spPr>
+          <a:xfrm>
+            <a:off x="731520" y="1828800"/>
+            <a:ext cx="3410712" cy="3840480"/>
+          </a:xfrm>
+          <a:prstGeom prst="roundRect">
+            <a:avLst/>
+          </a:prstGeom>
+          <a:solidFill>
+            <a:srgbClr val="FFFFFF"/>
+          </a:solidFill>
+          <a:ln w="12700">
+            <a:solidFill>
+              <a:srgbClr val="E2E8F0"/>
+            </a:solidFill>
+          </a:ln>
+        </p:spPr>
+        <p:style>
+          <a:lnRef idx="1">
+            <a:schemeClr val="accent1"/>
+          </a:lnRef>
+          <a:fillRef idx="3">
+            <a:schemeClr val="accent1"/>
+          </a:fillRef>
+          <a:effectRef idx="2">
+            <a:schemeClr val="accent1"/>
+          </a:effectRef>
+          <a:fontRef idx="minor">
+            <a:schemeClr val="lt1"/>
+          </a:fontRef>
+        </p:style>
+        <p:txBody>
+          <a:bodyPr rtlCol="0" anchor="ctr"/>
+          <a:lstStyle/>
+          <a:p>
+            <a:pPr algn="ctr"/>
+          </a:p>
+        </p:txBody>
+      </p:sp>
+      <p:sp>
+        <p:nvSpPr>
+          <p:cNvPr id="5" name="TextBox 4"/>
+          <p:cNvSpPr txBox="1"/>
+          <p:nvPr/>
+        </p:nvSpPr>
+        <p:spPr>
+          <a:xfrm>
+            <a:off x="960120" y="2103120"/>
+            <a:ext cx="2953512" cy="3291840"/>
           </a:xfrm>
           <a:prstGeom prst="rect">
             <a:avLst/>
@@ -5360,40 +8983,103 @@
           <a:lstStyle/>
           <a:p>
             <a:pPr>
-              <a:defRPr sz="1000" b="1">
+              <a:defRPr b="1" sz="1500">
+                <a:solidFill>
+                  <a:srgbClr val="0F172A"/>
+                </a:solidFill>
+              </a:defRPr>
+            </a:pPr>
+            <a:r>
+              <a:t>Balance Reconciliation</a:t>
+            </a:r>
+          </a:p>
+          <a:p>
+            <a:pPr>
+              <a:spcBef>
+                <a:spcPts val="400"/>
+              </a:spcBef>
+              <a:defRPr b="1" sz="1100">
                 <a:solidFill>
                   <a:srgbClr val="2563EB"/>
                 </a:solidFill>
               </a:defRPr>
             </a:pPr>
             <a:r>
-              <a:t>RUBRIC 7 — MODEL EVALUATION</a:t>
+              <a:t>Feature: error_balance_orig</a:t>
             </a:r>
           </a:p>
           <a:p>
             <a:pPr>
-              <a:defRPr sz="2200" b="1">
-                <a:solidFill>
-                  <a:srgbClr val="1E3A8A"/>
-                </a:solidFill>
-              </a:defRPr>
-            </a:pPr>
-            <a:r>
-              <a:t>6. Model Benchmarks &amp; Validation Results</a:t>
-            </a:r>
-          </a:p>
-        </p:txBody>
-      </p:sp>
-      <p:sp>
-        <p:nvSpPr>
-          <p:cNvPr id="3" name="TextBox 2"/>
+              <a:spcBef>
+                <a:spcPts val="800"/>
+              </a:spcBef>
+              <a:defRPr sz="1100">
+                <a:solidFill>
+                  <a:srgbClr val="475569"/>
+                </a:solidFill>
+              </a:defRPr>
+            </a:pPr>
+            <a:r>
+              <a:t>(newbalanceOrig + amount) - oldbalanceOrg. In legitimate transfers, delta is 0. In fraud, attackers siphon funds causing massive balance discrepancy errors (38.4% importance).</a:t>
+            </a:r>
+          </a:p>
+        </p:txBody>
+      </p:sp>
+      <p:sp>
+        <p:nvSpPr>
+          <p:cNvPr id="6" name="Rounded Rectangle 5"/>
+          <p:cNvSpPr/>
+          <p:nvPr/>
+        </p:nvSpPr>
+        <p:spPr>
+          <a:xfrm>
+            <a:off x="4389120" y="1828800"/>
+            <a:ext cx="3410712" cy="3840480"/>
+          </a:xfrm>
+          <a:prstGeom prst="roundRect">
+            <a:avLst/>
+          </a:prstGeom>
+          <a:solidFill>
+            <a:srgbClr val="FFFFFF"/>
+          </a:solidFill>
+          <a:ln w="12700">
+            <a:solidFill>
+              <a:srgbClr val="E2E8F0"/>
+            </a:solidFill>
+          </a:ln>
+        </p:spPr>
+        <p:style>
+          <a:lnRef idx="1">
+            <a:schemeClr val="accent1"/>
+          </a:lnRef>
+          <a:fillRef idx="3">
+            <a:schemeClr val="accent1"/>
+          </a:fillRef>
+          <a:effectRef idx="2">
+            <a:schemeClr val="accent1"/>
+          </a:effectRef>
+          <a:fontRef idx="minor">
+            <a:schemeClr val="lt1"/>
+          </a:fontRef>
+        </p:style>
+        <p:txBody>
+          <a:bodyPr rtlCol="0" anchor="ctr"/>
+          <a:lstStyle/>
+          <a:p>
+            <a:pPr algn="ctr"/>
+          </a:p>
+        </p:txBody>
+      </p:sp>
+      <p:sp>
+        <p:nvSpPr>
+          <p:cNvPr id="7" name="TextBox 6"/>
           <p:cNvSpPr txBox="1"/>
           <p:nvPr/>
         </p:nvSpPr>
         <p:spPr>
           <a:xfrm>
-            <a:off x="731520" y="1463040"/>
-            <a:ext cx="5303520" cy="4754880"/>
+            <a:off x="4617720" y="2103120"/>
+            <a:ext cx="2953512" cy="3291840"/>
           </a:xfrm>
           <a:prstGeom prst="rect">
             <a:avLst/>
@@ -5407,105 +9093,287 @@
           <a:lstStyle/>
           <a:p>
             <a:pPr>
-              <a:spcAft>
-                <a:spcPts val="1200"/>
-              </a:spcAft>
-              <a:defRPr sz="1300">
-                <a:solidFill>
-                  <a:srgbClr val="1E293B"/>
-                </a:solidFill>
-              </a:defRPr>
-            </a:pPr>
-            <a:r>
-              <a:t>• Champion Model: Random Forest achieved a perfect 1.0000 PR-AUC on the 12,000-sample test set.</a:t>
+              <a:defRPr b="1" sz="1500">
+                <a:solidFill>
+                  <a:srgbClr val="0F172A"/>
+                </a:solidFill>
+              </a:defRPr>
+            </a:pPr>
+            <a:r>
+              <a:t>Liquidation Sentinel</a:t>
             </a:r>
           </a:p>
           <a:p>
             <a:pPr>
-              <a:spcAft>
-                <a:spcPts val="1200"/>
-              </a:spcAft>
-              <a:defRPr sz="1300">
-                <a:solidFill>
-                  <a:srgbClr val="1E293B"/>
-                </a:solidFill>
-              </a:defRPr>
-            </a:pPr>
-            <a:r>
-              <a:t>• 100% Fraud Detection: Caught 60/60 test fraud incidents with 0 false positives (FPR = 0.0000%).</a:t>
+              <a:spcBef>
+                <a:spcPts val="400"/>
+              </a:spcBef>
+              <a:defRPr b="1" sz="1100">
+                <a:solidFill>
+                  <a:srgbClr val="2563EB"/>
+                </a:solidFill>
+              </a:defRPr>
+            </a:pPr>
+            <a:r>
+              <a:t>Feature: orig_account_drained</a:t>
             </a:r>
           </a:p>
           <a:p>
             <a:pPr>
-              <a:spcAft>
-                <a:spcPts val="1200"/>
-              </a:spcAft>
-              <a:defRPr sz="1300">
-                <a:solidFill>
-                  <a:srgbClr val="1E293B"/>
-                </a:solidFill>
-              </a:defRPr>
-            </a:pPr>
-            <a:r>
-              <a:t>• XGBoost Performance: PR-AUC = 0.9997 | Recall = 100% | Precision = 98.36% (only 1 false alert).</a:t>
-            </a:r>
-          </a:p>
+              <a:spcBef>
+                <a:spcPts val="800"/>
+              </a:spcBef>
+              <a:defRPr sz="1100">
+                <a:solidFill>
+                  <a:srgbClr val="475569"/>
+                </a:solidFill>
+              </a:defRPr>
+            </a:pPr>
+            <a:r>
+              <a:t>Binary flag triggering when origin balance is wiped to exactly $0.00. Identifies complete account drainage in automated bot attacks (21.7% importance).</a:t>
+            </a:r>
+          </a:p>
+        </p:txBody>
+      </p:sp>
+      <p:sp>
+        <p:nvSpPr>
+          <p:cNvPr id="8" name="Rounded Rectangle 7"/>
+          <p:cNvSpPr/>
+          <p:nvPr/>
+        </p:nvSpPr>
+        <p:spPr>
+          <a:xfrm>
+            <a:off x="8046720" y="1828800"/>
+            <a:ext cx="3410712" cy="3840480"/>
+          </a:xfrm>
+          <a:prstGeom prst="roundRect">
+            <a:avLst/>
+          </a:prstGeom>
+          <a:solidFill>
+            <a:srgbClr val="FFFFFF"/>
+          </a:solidFill>
+          <a:ln w="12700">
+            <a:solidFill>
+              <a:srgbClr val="E2E8F0"/>
+            </a:solidFill>
+          </a:ln>
+        </p:spPr>
+        <p:style>
+          <a:lnRef idx="1">
+            <a:schemeClr val="accent1"/>
+          </a:lnRef>
+          <a:fillRef idx="3">
+            <a:schemeClr val="accent1"/>
+          </a:fillRef>
+          <a:effectRef idx="2">
+            <a:schemeClr val="accent1"/>
+          </a:effectRef>
+          <a:fontRef idx="minor">
+            <a:schemeClr val="lt1"/>
+          </a:fontRef>
+        </p:style>
+        <p:txBody>
+          <a:bodyPr rtlCol="0" anchor="ctr"/>
+          <a:lstStyle/>
+          <a:p>
+            <a:pPr algn="ctr"/>
+          </a:p>
+        </p:txBody>
+      </p:sp>
+      <p:sp>
+        <p:nvSpPr>
+          <p:cNvPr id="9" name="TextBox 8"/>
+          <p:cNvSpPr txBox="1"/>
+          <p:nvPr/>
+        </p:nvSpPr>
+        <p:spPr>
+          <a:xfrm>
+            <a:off x="8275320" y="2103120"/>
+            <a:ext cx="2953512" cy="3291840"/>
+          </a:xfrm>
+          <a:prstGeom prst="rect">
+            <a:avLst/>
+          </a:prstGeom>
+          <a:noFill/>
+        </p:spPr>
+        <p:txBody>
+          <a:bodyPr wrap="square">
+            <a:spAutoFit/>
+          </a:bodyPr>
+          <a:lstStyle/>
           <a:p>
             <a:pPr>
-              <a:spcAft>
-                <a:spcPts val="1200"/>
-              </a:spcAft>
-              <a:defRPr sz="1300">
-                <a:solidFill>
-                  <a:srgbClr val="1E293B"/>
-                </a:solidFill>
-              </a:defRPr>
-            </a:pPr>
-            <a:r>
-              <a:t>• Isolation Forest (Anomaly): PR-AUC = 0.9997 | Caught 100% of anomalous attacks purely from unsupervised tree path lengths.</a:t>
+              <a:defRPr b="1" sz="1500">
+                <a:solidFill>
+                  <a:srgbClr val="0F172A"/>
+                </a:solidFill>
+              </a:defRPr>
+            </a:pPr>
+            <a:r>
+              <a:t>Cyber Trust Score</a:t>
             </a:r>
           </a:p>
           <a:p>
             <a:pPr>
-              <a:spcAft>
-                <a:spcPts val="1200"/>
-              </a:spcAft>
-              <a:defRPr sz="1300">
-                <a:solidFill>
-                  <a:srgbClr val="1E293B"/>
-                </a:solidFill>
-              </a:defRPr>
-            </a:pPr>
-            <a:r>
-              <a:t>• Inference Latency: Average scoring latency of 12.4 ms (well beneath 50ms real-time SLA).</a:t>
-            </a:r>
-          </a:p>
-        </p:txBody>
-      </p:sp>
-      <p:pic>
-        <p:nvPicPr>
-          <p:cNvPr id="4" name="Picture 3" descr="eval_roc_curves.png"/>
-          <p:cNvPicPr>
-            <a:picLocks noChangeAspect="1"/>
-          </p:cNvPicPr>
-          <p:nvPr/>
-        </p:nvPicPr>
-        <p:blipFill>
-          <a:blip r:embed="rId2"/>
-          <a:stretch>
-            <a:fillRect/>
-          </a:stretch>
-        </p:blipFill>
-        <p:spPr>
-          <a:xfrm>
-            <a:off x="6309360" y="1463040"/>
-            <a:ext cx="5212080" cy="3909060"/>
+              <a:spcBef>
+                <a:spcPts val="400"/>
+              </a:spcBef>
+              <a:defRPr b="1" sz="1100">
+                <a:solidFill>
+                  <a:srgbClr val="2563EB"/>
+                </a:solidFill>
+              </a:defRPr>
+            </a:pPr>
+            <a:r>
+              <a:t>Feature: combined_risk_index</a:t>
+            </a:r>
+          </a:p>
+          <a:p>
+            <a:pPr>
+              <a:spcBef>
+                <a:spcPts val="800"/>
+              </a:spcBef>
+              <a:defRPr sz="1100">
+                <a:solidFill>
+                  <a:srgbClr val="475569"/>
+                </a:solidFill>
+              </a:defRPr>
+            </a:pPr>
+            <a:r>
+              <a:t>Fuses device fingerprint trust score with geo-velocity IP risk. Catches emulators, VPN proxies, and sudden location hops (17.2% importance).</a:t>
+            </a:r>
+          </a:p>
+        </p:txBody>
+      </p:sp>
+      <p:sp>
+        <p:nvSpPr>
+          <p:cNvPr id="10" name="Rounded Rectangle 9"/>
+          <p:cNvSpPr/>
+          <p:nvPr/>
+        </p:nvSpPr>
+        <p:spPr>
+          <a:xfrm>
+            <a:off x="731520" y="5943600"/>
+            <a:ext cx="10728655" cy="502920"/>
+          </a:xfrm>
+          <a:prstGeom prst="roundRect">
+            <a:avLst/>
+          </a:prstGeom>
+          <a:solidFill>
+            <a:srgbClr val="EEF2FF"/>
+          </a:solidFill>
+          <a:ln w="12700">
+            <a:solidFill>
+              <a:srgbClr val="6366F1"/>
+            </a:solidFill>
+          </a:ln>
+        </p:spPr>
+        <p:style>
+          <a:lnRef idx="1">
+            <a:schemeClr val="accent1"/>
+          </a:lnRef>
+          <a:fillRef idx="3">
+            <a:schemeClr val="accent1"/>
+          </a:fillRef>
+          <a:effectRef idx="2">
+            <a:schemeClr val="accent1"/>
+          </a:effectRef>
+          <a:fontRef idx="minor">
+            <a:schemeClr val="lt1"/>
+          </a:fontRef>
+        </p:style>
+        <p:txBody>
+          <a:bodyPr rtlCol="0" anchor="ctr"/>
+          <a:lstStyle/>
+          <a:p>
+            <a:pPr algn="ctr"/>
+          </a:p>
+        </p:txBody>
+      </p:sp>
+      <p:sp>
+        <p:nvSpPr>
+          <p:cNvPr id="11" name="Rectangle 10"/>
+          <p:cNvSpPr/>
+          <p:nvPr/>
+        </p:nvSpPr>
+        <p:spPr>
+          <a:xfrm>
+            <a:off x="731520" y="5943600"/>
+            <a:ext cx="73152" cy="502920"/>
           </a:xfrm>
           <a:prstGeom prst="rect">
             <a:avLst/>
           </a:prstGeom>
-        </p:spPr>
-      </p:pic>
+          <a:solidFill>
+            <a:srgbClr val="6366F1"/>
+          </a:solidFill>
+          <a:ln>
+            <a:noFill/>
+          </a:ln>
+        </p:spPr>
+        <p:style>
+          <a:lnRef idx="1">
+            <a:schemeClr val="accent1"/>
+          </a:lnRef>
+          <a:fillRef idx="3">
+            <a:schemeClr val="accent1"/>
+          </a:fillRef>
+          <a:effectRef idx="2">
+            <a:schemeClr val="accent1"/>
+          </a:effectRef>
+          <a:fontRef idx="minor">
+            <a:schemeClr val="lt1"/>
+          </a:fontRef>
+        </p:style>
+        <p:txBody>
+          <a:bodyPr rtlCol="0" anchor="ctr"/>
+          <a:lstStyle/>
+          <a:p>
+            <a:pPr algn="ctr"/>
+          </a:p>
+        </p:txBody>
+      </p:sp>
+      <p:sp>
+        <p:nvSpPr>
+          <p:cNvPr id="12" name="TextBox 11"/>
+          <p:cNvSpPr txBox="1"/>
+          <p:nvPr/>
+        </p:nvSpPr>
+        <p:spPr>
+          <a:xfrm>
+            <a:off x="960120" y="5961888"/>
+            <a:ext cx="10332720" cy="457200"/>
+          </a:xfrm>
+          <a:prstGeom prst="rect">
+            <a:avLst/>
+          </a:prstGeom>
+          <a:noFill/>
+        </p:spPr>
+        <p:txBody>
+          <a:bodyPr wrap="square" lIns="0" tIns="0" rIns="0" bIns="0">
+            <a:spAutoFit/>
+          </a:bodyPr>
+          <a:lstStyle/>
+          <a:p>
+            <a:r>
+              <a:rPr b="1" sz="1100">
+                <a:solidFill>
+                  <a:srgbClr val="6366F1"/>
+                </a:solidFill>
+              </a:rPr>
+              <a:t>Feature Ranking: </a:t>
+            </a:r>
+            <a:r>
+              <a:rPr sz="1100">
+                <a:solidFill>
+                  <a:srgbClr val="0F172A"/>
+                </a:solidFill>
+              </a:rPr>
+              <a:t>Domain-engineered features account for over 60% of total model predictive power.</a:t>
+            </a:r>
+          </a:p>
+        </p:txBody>
+      </p:sp>
     </p:spTree>
   </p:cSld>
   <p:clrMapOvr>
@@ -5526,14 +9394,152 @@
       <p:grpSpPr/>
       <p:sp>
         <p:nvSpPr>
-          <p:cNvPr id="2" name="TextBox 1"/>
+          <p:cNvPr id="2" name="Rectangle 1"/>
+          <p:cNvSpPr/>
+          <p:nvPr/>
+        </p:nvSpPr>
+        <p:spPr>
+          <a:xfrm>
+            <a:off x="0" y="0"/>
+            <a:ext cx="12191695" cy="6858000"/>
+          </a:xfrm>
+          <a:prstGeom prst="rect">
+            <a:avLst/>
+          </a:prstGeom>
+          <a:solidFill>
+            <a:srgbClr val="F8FAFC"/>
+          </a:solidFill>
+          <a:ln>
+            <a:noFill/>
+          </a:ln>
+        </p:spPr>
+        <p:style>
+          <a:lnRef idx="1">
+            <a:schemeClr val="accent1"/>
+          </a:lnRef>
+          <a:fillRef idx="3">
+            <a:schemeClr val="accent1"/>
+          </a:fillRef>
+          <a:effectRef idx="2">
+            <a:schemeClr val="accent1"/>
+          </a:effectRef>
+          <a:fontRef idx="minor">
+            <a:schemeClr val="lt1"/>
+          </a:fontRef>
+        </p:style>
+        <p:txBody>
+          <a:bodyPr rtlCol="0" anchor="ctr"/>
+          <a:lstStyle/>
+          <a:p>
+            <a:pPr algn="ctr"/>
+          </a:p>
+        </p:txBody>
+      </p:sp>
+      <p:sp>
+        <p:nvSpPr>
+          <p:cNvPr id="3" name="TextBox 2"/>
           <p:cNvSpPr txBox="1"/>
           <p:nvPr/>
         </p:nvSpPr>
         <p:spPr>
           <a:xfrm>
-            <a:off x="731520" y="365760"/>
+            <a:off x="731520" y="457200"/>
             <a:ext cx="10698480" cy="1005840"/>
+          </a:xfrm>
+          <a:prstGeom prst="rect">
+            <a:avLst/>
+          </a:prstGeom>
+          <a:noFill/>
+        </p:spPr>
+        <p:txBody>
+          <a:bodyPr wrap="square" lIns="0" tIns="0" rIns="0" bIns="0">
+            <a:spAutoFit/>
+          </a:bodyPr>
+          <a:lstStyle/>
+          <a:p>
+            <a:pPr>
+              <a:defRPr sz="1000" b="1">
+                <a:solidFill>
+                  <a:srgbClr val="2563EB"/>
+                </a:solidFill>
+              </a:defRPr>
+            </a:pPr>
+            <a:r>
+              <a:t>ALGORITHM EVALUATION</a:t>
+            </a:r>
+          </a:p>
+          <a:p>
+            <a:pPr>
+              <a:spcBef>
+                <a:spcPts val="400"/>
+              </a:spcBef>
+              <a:defRPr sz="2400" b="1">
+                <a:solidFill>
+                  <a:srgbClr val="0F172A"/>
+                </a:solidFill>
+              </a:defRPr>
+            </a:pPr>
+            <a:r>
+              <a:t>Model Selection &amp; Architecture Benchmarking</a:t>
+            </a:r>
+          </a:p>
+        </p:txBody>
+      </p:sp>
+      <p:sp>
+        <p:nvSpPr>
+          <p:cNvPr id="4" name="Rounded Rectangle 3"/>
+          <p:cNvSpPr/>
+          <p:nvPr/>
+        </p:nvSpPr>
+        <p:spPr>
+          <a:xfrm>
+            <a:off x="731520" y="1737360"/>
+            <a:ext cx="5943600" cy="3931920"/>
+          </a:xfrm>
+          <a:prstGeom prst="roundRect">
+            <a:avLst/>
+          </a:prstGeom>
+          <a:solidFill>
+            <a:srgbClr val="FFFFFF"/>
+          </a:solidFill>
+          <a:ln w="12700">
+            <a:solidFill>
+              <a:srgbClr val="E2E8F0"/>
+            </a:solidFill>
+          </a:ln>
+        </p:spPr>
+        <p:style>
+          <a:lnRef idx="1">
+            <a:schemeClr val="accent1"/>
+          </a:lnRef>
+          <a:fillRef idx="3">
+            <a:schemeClr val="accent1"/>
+          </a:fillRef>
+          <a:effectRef idx="2">
+            <a:schemeClr val="accent1"/>
+          </a:effectRef>
+          <a:fontRef idx="minor">
+            <a:schemeClr val="lt1"/>
+          </a:fontRef>
+        </p:style>
+        <p:txBody>
+          <a:bodyPr rtlCol="0" anchor="ctr"/>
+          <a:lstStyle/>
+          <a:p>
+            <a:pPr algn="ctr"/>
+          </a:p>
+        </p:txBody>
+      </p:sp>
+      <p:sp>
+        <p:nvSpPr>
+          <p:cNvPr id="5" name="TextBox 4"/>
+          <p:cNvSpPr txBox="1"/>
+          <p:nvPr/>
+        </p:nvSpPr>
+        <p:spPr>
+          <a:xfrm>
+            <a:off x="1005840" y="2011680"/>
+            <a:ext cx="5394960" cy="3474720"/>
           </a:xfrm>
           <a:prstGeom prst="rect">
             <a:avLst/>
@@ -5547,40 +9553,146 @@
           <a:lstStyle/>
           <a:p>
             <a:pPr>
-              <a:defRPr sz="1000" b="1">
+              <a:defRPr b="1" sz="1600">
+                <a:solidFill>
+                  <a:srgbClr val="0F172A"/>
+                </a:solidFill>
+              </a:defRPr>
+            </a:pPr>
+            <a:r>
+              <a:t>Candidate Family Comparison</a:t>
+            </a:r>
+          </a:p>
+          <a:p>
+            <a:pPr>
+              <a:spcBef>
+                <a:spcPts val="800"/>
+              </a:spcBef>
+              <a:defRPr sz="1100">
+                <a:solidFill>
+                  <a:srgbClr val="475569"/>
+                </a:solidFill>
+              </a:defRPr>
+            </a:pPr>
+            <a:r>
+              <a:t>• Logistic Regression (Cost-Sensitive) — Evaluated (PR-AUC: 0.9962)</a:t>
+            </a:r>
+          </a:p>
+          <a:p>
+            <a:pPr>
+              <a:spcBef>
+                <a:spcPts val="800"/>
+              </a:spcBef>
+              <a:defRPr sz="1100">
+                <a:solidFill>
+                  <a:srgbClr val="475569"/>
+                </a:solidFill>
+              </a:defRPr>
+            </a:pPr>
+            <a:r>
+              <a:t>• HistGradientBoosting — Evaluated (PR-AUC: 0.9834)</a:t>
+            </a:r>
+          </a:p>
+          <a:p>
+            <a:pPr>
+              <a:spcBef>
+                <a:spcPts val="800"/>
+              </a:spcBef>
+              <a:defRPr sz="1100">
+                <a:solidFill>
+                  <a:srgbClr val="475569"/>
+                </a:solidFill>
+              </a:defRPr>
+            </a:pPr>
+            <a:r>
+              <a:t>• XGBoost (scale_pos_weight = 150) — Evaluated (PR-AUC: 0.9997)</a:t>
+            </a:r>
+          </a:p>
+          <a:p>
+            <a:pPr>
+              <a:spcBef>
+                <a:spcPts val="800"/>
+              </a:spcBef>
+              <a:defRPr sz="1100">
+                <a:solidFill>
+                  <a:srgbClr val="475569"/>
+                </a:solidFill>
+              </a:defRPr>
+            </a:pPr>
+            <a:r>
+              <a:t>• Isolation Forest (Unsupervised Anomaly) — Evaluated (PR-AUC: 0.9997)</a:t>
+            </a:r>
+          </a:p>
+          <a:p>
+            <a:pPr>
+              <a:spcBef>
+                <a:spcPts val="800"/>
+              </a:spcBef>
+              <a:defRPr sz="1100">
                 <a:solidFill>
                   <a:srgbClr val="2563EB"/>
                 </a:solidFill>
               </a:defRPr>
             </a:pPr>
             <a:r>
-              <a:t>RUBRIC 8 — BUSINESS RECOMMENDATIONS</a:t>
-            </a:r>
-          </a:p>
-          <a:p>
-            <a:pPr>
-              <a:defRPr sz="2200" b="1">
-                <a:solidFill>
-                  <a:srgbClr val="1E3A8A"/>
-                </a:solidFill>
-              </a:defRPr>
-            </a:pPr>
-            <a:r>
-              <a:t>7. Financial Impact &amp; Business Balance Sheet</a:t>
-            </a:r>
-          </a:p>
-        </p:txBody>
-      </p:sp>
-      <p:sp>
-        <p:nvSpPr>
-          <p:cNvPr id="3" name="TextBox 2"/>
+              <a:t>• Random Forest (Balanced Subsample) — Selected Champion (PR-AUC: 1.0000)</a:t>
+            </a:r>
+          </a:p>
+        </p:txBody>
+      </p:sp>
+      <p:sp>
+        <p:nvSpPr>
+          <p:cNvPr id="6" name="Rounded Rectangle 5"/>
+          <p:cNvSpPr/>
+          <p:nvPr/>
+        </p:nvSpPr>
+        <p:spPr>
+          <a:xfrm>
+            <a:off x="6949440" y="1737360"/>
+            <a:ext cx="4480560" cy="3931920"/>
+          </a:xfrm>
+          <a:prstGeom prst="roundRect">
+            <a:avLst/>
+          </a:prstGeom>
+          <a:solidFill>
+            <a:srgbClr val="2563EB"/>
+          </a:solidFill>
+          <a:ln>
+            <a:noFill/>
+          </a:ln>
+        </p:spPr>
+        <p:style>
+          <a:lnRef idx="1">
+            <a:schemeClr val="accent1"/>
+          </a:lnRef>
+          <a:fillRef idx="3">
+            <a:schemeClr val="accent1"/>
+          </a:fillRef>
+          <a:effectRef idx="2">
+            <a:schemeClr val="accent1"/>
+          </a:effectRef>
+          <a:fontRef idx="minor">
+            <a:schemeClr val="lt1"/>
+          </a:fontRef>
+        </p:style>
+        <p:txBody>
+          <a:bodyPr rtlCol="0" anchor="ctr"/>
+          <a:lstStyle/>
+          <a:p>
+            <a:pPr algn="ctr"/>
+          </a:p>
+        </p:txBody>
+      </p:sp>
+      <p:sp>
+        <p:nvSpPr>
+          <p:cNvPr id="7" name="TextBox 6"/>
           <p:cNvSpPr txBox="1"/>
           <p:nvPr/>
         </p:nvSpPr>
         <p:spPr>
           <a:xfrm>
-            <a:off x="731520" y="1463040"/>
-            <a:ext cx="10698480" cy="4754880"/>
+            <a:off x="7132320" y="2377440"/>
+            <a:ext cx="4114800" cy="2743200"/>
           </a:xfrm>
           <a:prstGeom prst="rect">
             <a:avLst/>
@@ -5593,108 +9705,178 @@
           </a:bodyPr>
           <a:lstStyle/>
           <a:p>
-            <a:pPr>
-              <a:spcAft>
-                <a:spcPts val="1000"/>
-              </a:spcAft>
-              <a:defRPr sz="1350">
-                <a:solidFill>
-                  <a:srgbClr val="1E293B"/>
-                </a:solidFill>
-              </a:defRPr>
-            </a:pPr>
-            <a:r>
-              <a:t>• Quantifying Economic Return: We converted abstract metrics into real banking dollar savings.</a:t>
-            </a:r>
-          </a:p>
-          <a:p>
-            <a:pPr>
-              <a:spcAft>
-                <a:spcPts val="1000"/>
-              </a:spcAft>
-              <a:defRPr sz="1350">
-                <a:solidFill>
-                  <a:srgbClr val="1E293B"/>
-                </a:solidFill>
-              </a:defRPr>
-            </a:pPr>
-            <a:r>
-              <a:t>• Total Fraud Volume at Risk: $1,567,200.22 on the held-out test stream.</a:t>
-            </a:r>
-          </a:p>
-          <a:p>
-            <a:pPr>
-              <a:spcAft>
-                <a:spcPts val="1000"/>
-              </a:spcAft>
-              <a:defRPr sz="1350">
-                <a:solidFill>
-                  <a:srgbClr val="1E293B"/>
-                </a:solidFill>
-              </a:defRPr>
-            </a:pPr>
-            <a:r>
-              <a:t>• Fraud Losses Intercepted: $1,567,200.22 (100.00% Prevention Efficiency).</a:t>
-            </a:r>
-          </a:p>
-          <a:p>
-            <a:pPr>
-              <a:spcAft>
-                <a:spcPts val="1000"/>
-              </a:spcAft>
-              <a:defRPr sz="1350">
-                <a:solidFill>
-                  <a:srgbClr val="1E293B"/>
-                </a:solidFill>
-              </a:defRPr>
-            </a:pPr>
-            <a:r>
-              <a:t>• Operational Review Costs: $1,500.00 (manual review for alerts + false positive friction).</a:t>
-            </a:r>
-          </a:p>
-          <a:p>
-            <a:pPr>
-              <a:spcAft>
-                <a:spcPts val="1000"/>
-              </a:spcAft>
-              <a:defRPr sz="1350">
-                <a:solidFill>
-                  <a:srgbClr val="1E293B"/>
-                </a:solidFill>
-              </a:defRPr>
-            </a:pPr>
-            <a:r>
-              <a:t>• NET FINANCIAL SAVINGS: $1,565,700.22 NET DOLLARS SAVED.</a:t>
-            </a:r>
-          </a:p>
-          <a:p>
-            <a:pPr>
-              <a:spcAft>
-                <a:spcPts val="1000"/>
-              </a:spcAft>
-              <a:defRPr sz="1350">
-                <a:solidFill>
-                  <a:srgbClr val="1E293B"/>
-                </a:solidFill>
-              </a:defRPr>
-            </a:pPr>
-            <a:r>
-              <a:t>• Return on Investment (ROI): 104,380.0% operational return on investment.</a:t>
-            </a:r>
-          </a:p>
-          <a:p>
-            <a:pPr>
-              <a:spcAft>
-                <a:spcPts val="1000"/>
-              </a:spcAft>
-              <a:defRPr sz="1350">
-                <a:solidFill>
-                  <a:srgbClr val="1E293B"/>
-                </a:solidFill>
-              </a:defRPr>
-            </a:pPr>
-            <a:r>
-              <a:t>• Strategic Action: Never reject border-line cases outright; route scores between 35-75 to instant biometric step-up challenges to prevent customer churn.</a:t>
+            <a:pPr algn="ctr">
+              <a:defRPr sz="4600" b="1">
+                <a:solidFill>
+                  <a:srgbClr val="FFFFFF"/>
+                </a:solidFill>
+              </a:defRPr>
+            </a:pPr>
+            <a:r>
+              <a:t>1.0000</a:t>
+            </a:r>
+          </a:p>
+          <a:p>
+            <a:pPr algn="ctr">
+              <a:spcBef>
+                <a:spcPts val="400"/>
+              </a:spcBef>
+              <a:defRPr sz="1600" b="1">
+                <a:solidFill>
+                  <a:srgbClr val="FFFFFF"/>
+                </a:solidFill>
+              </a:defRPr>
+            </a:pPr>
+            <a:r>
+              <a:t>Champion Model PR-AUC</a:t>
+            </a:r>
+          </a:p>
+          <a:p>
+            <a:pPr algn="ctr">
+              <a:spcBef>
+                <a:spcPts val="800"/>
+              </a:spcBef>
+              <a:defRPr sz="1200">
+                <a:solidFill>
+                  <a:srgbClr val="DBEAFE"/>
+                </a:solidFill>
+              </a:defRPr>
+            </a:pPr>
+            <a:r>
+              <a:t>Random Forest Ensemble</a:t>
+            </a:r>
+            <a:br/>
+            <a:r>
+              <a:t>100 Trees | Balanced Subsampling</a:t>
+            </a:r>
+          </a:p>
+        </p:txBody>
+      </p:sp>
+      <p:sp>
+        <p:nvSpPr>
+          <p:cNvPr id="8" name="Rounded Rectangle 7"/>
+          <p:cNvSpPr/>
+          <p:nvPr/>
+        </p:nvSpPr>
+        <p:spPr>
+          <a:xfrm>
+            <a:off x="731520" y="5943600"/>
+            <a:ext cx="10728655" cy="502920"/>
+          </a:xfrm>
+          <a:prstGeom prst="roundRect">
+            <a:avLst/>
+          </a:prstGeom>
+          <a:solidFill>
+            <a:srgbClr val="EEF2FF"/>
+          </a:solidFill>
+          <a:ln w="12700">
+            <a:solidFill>
+              <a:srgbClr val="6366F1"/>
+            </a:solidFill>
+          </a:ln>
+        </p:spPr>
+        <p:style>
+          <a:lnRef idx="1">
+            <a:schemeClr val="accent1"/>
+          </a:lnRef>
+          <a:fillRef idx="3">
+            <a:schemeClr val="accent1"/>
+          </a:fillRef>
+          <a:effectRef idx="2">
+            <a:schemeClr val="accent1"/>
+          </a:effectRef>
+          <a:fontRef idx="minor">
+            <a:schemeClr val="lt1"/>
+          </a:fontRef>
+        </p:style>
+        <p:txBody>
+          <a:bodyPr rtlCol="0" anchor="ctr"/>
+          <a:lstStyle/>
+          <a:p>
+            <a:pPr algn="ctr"/>
+          </a:p>
+        </p:txBody>
+      </p:sp>
+      <p:sp>
+        <p:nvSpPr>
+          <p:cNvPr id="9" name="Rectangle 8"/>
+          <p:cNvSpPr/>
+          <p:nvPr/>
+        </p:nvSpPr>
+        <p:spPr>
+          <a:xfrm>
+            <a:off x="731520" y="5943600"/>
+            <a:ext cx="73152" cy="502920"/>
+          </a:xfrm>
+          <a:prstGeom prst="rect">
+            <a:avLst/>
+          </a:prstGeom>
+          <a:solidFill>
+            <a:srgbClr val="6366F1"/>
+          </a:solidFill>
+          <a:ln>
+            <a:noFill/>
+          </a:ln>
+        </p:spPr>
+        <p:style>
+          <a:lnRef idx="1">
+            <a:schemeClr val="accent1"/>
+          </a:lnRef>
+          <a:fillRef idx="3">
+            <a:schemeClr val="accent1"/>
+          </a:fillRef>
+          <a:effectRef idx="2">
+            <a:schemeClr val="accent1"/>
+          </a:effectRef>
+          <a:fontRef idx="minor">
+            <a:schemeClr val="lt1"/>
+          </a:fontRef>
+        </p:style>
+        <p:txBody>
+          <a:bodyPr rtlCol="0" anchor="ctr"/>
+          <a:lstStyle/>
+          <a:p>
+            <a:pPr algn="ctr"/>
+          </a:p>
+        </p:txBody>
+      </p:sp>
+      <p:sp>
+        <p:nvSpPr>
+          <p:cNvPr id="10" name="TextBox 9"/>
+          <p:cNvSpPr txBox="1"/>
+          <p:nvPr/>
+        </p:nvSpPr>
+        <p:spPr>
+          <a:xfrm>
+            <a:off x="960120" y="5961888"/>
+            <a:ext cx="10332720" cy="457200"/>
+          </a:xfrm>
+          <a:prstGeom prst="rect">
+            <a:avLst/>
+          </a:prstGeom>
+          <a:noFill/>
+        </p:spPr>
+        <p:txBody>
+          <a:bodyPr wrap="square" lIns="0" tIns="0" rIns="0" bIns="0">
+            <a:spAutoFit/>
+          </a:bodyPr>
+          <a:lstStyle/>
+          <a:p>
+            <a:r>
+              <a:rPr b="1" sz="1100">
+                <a:solidFill>
+                  <a:srgbClr val="6366F1"/>
+                </a:solidFill>
+              </a:rPr>
+              <a:t>Selection Criterion: </a:t>
+            </a:r>
+            <a:r>
+              <a:rPr sz="1100">
+                <a:solidFill>
+                  <a:srgbClr val="0F172A"/>
+                </a:solidFill>
+              </a:rPr>
+              <a:t>Champion selection is governed by Precision-Recall AUC under severe rare-event conditions.</a:t>
             </a:r>
           </a:p>
         </p:txBody>
@@ -5719,14 +9901,152 @@
       <p:grpSpPr/>
       <p:sp>
         <p:nvSpPr>
-          <p:cNvPr id="2" name="TextBox 1"/>
+          <p:cNvPr id="2" name="Rectangle 1"/>
+          <p:cNvSpPr/>
+          <p:nvPr/>
+        </p:nvSpPr>
+        <p:spPr>
+          <a:xfrm>
+            <a:off x="0" y="0"/>
+            <a:ext cx="12191695" cy="6858000"/>
+          </a:xfrm>
+          <a:prstGeom prst="rect">
+            <a:avLst/>
+          </a:prstGeom>
+          <a:solidFill>
+            <a:srgbClr val="F8FAFC"/>
+          </a:solidFill>
+          <a:ln>
+            <a:noFill/>
+          </a:ln>
+        </p:spPr>
+        <p:style>
+          <a:lnRef idx="1">
+            <a:schemeClr val="accent1"/>
+          </a:lnRef>
+          <a:fillRef idx="3">
+            <a:schemeClr val="accent1"/>
+          </a:fillRef>
+          <a:effectRef idx="2">
+            <a:schemeClr val="accent1"/>
+          </a:effectRef>
+          <a:fontRef idx="minor">
+            <a:schemeClr val="lt1"/>
+          </a:fontRef>
+        </p:style>
+        <p:txBody>
+          <a:bodyPr rtlCol="0" anchor="ctr"/>
+          <a:lstStyle/>
+          <a:p>
+            <a:pPr algn="ctr"/>
+          </a:p>
+        </p:txBody>
+      </p:sp>
+      <p:sp>
+        <p:nvSpPr>
+          <p:cNvPr id="3" name="TextBox 2"/>
           <p:cNvSpPr txBox="1"/>
           <p:nvPr/>
         </p:nvSpPr>
         <p:spPr>
           <a:xfrm>
-            <a:off x="731520" y="365760"/>
+            <a:off x="731520" y="457200"/>
             <a:ext cx="10698480" cy="1005840"/>
+          </a:xfrm>
+          <a:prstGeom prst="rect">
+            <a:avLst/>
+          </a:prstGeom>
+          <a:noFill/>
+        </p:spPr>
+        <p:txBody>
+          <a:bodyPr wrap="square" lIns="0" tIns="0" rIns="0" bIns="0">
+            <a:spAutoFit/>
+          </a:bodyPr>
+          <a:lstStyle/>
+          <a:p>
+            <a:pPr>
+              <a:defRPr sz="1000" b="1">
+                <a:solidFill>
+                  <a:srgbClr val="2563EB"/>
+                </a:solidFill>
+              </a:defRPr>
+            </a:pPr>
+            <a:r>
+              <a:t>VALIDATION PERFORMANCE</a:t>
+            </a:r>
+          </a:p>
+          <a:p>
+            <a:pPr>
+              <a:spcBef>
+                <a:spcPts val="400"/>
+              </a:spcBef>
+              <a:defRPr sz="2400" b="1">
+                <a:solidFill>
+                  <a:srgbClr val="0F172A"/>
+                </a:solidFill>
+              </a:defRPr>
+            </a:pPr>
+            <a:r>
+              <a:t>Test Set Evaluation (12,000 Holdout Samples)</a:t>
+            </a:r>
+          </a:p>
+        </p:txBody>
+      </p:sp>
+      <p:sp>
+        <p:nvSpPr>
+          <p:cNvPr id="4" name="Rounded Rectangle 3"/>
+          <p:cNvSpPr/>
+          <p:nvPr/>
+        </p:nvSpPr>
+        <p:spPr>
+          <a:xfrm>
+            <a:off x="731520" y="1737360"/>
+            <a:ext cx="2011680" cy="1463040"/>
+          </a:xfrm>
+          <a:prstGeom prst="roundRect">
+            <a:avLst/>
+          </a:prstGeom>
+          <a:solidFill>
+            <a:srgbClr val="FFFFFF"/>
+          </a:solidFill>
+          <a:ln w="12700">
+            <a:solidFill>
+              <a:srgbClr val="E2E8F0"/>
+            </a:solidFill>
+          </a:ln>
+        </p:spPr>
+        <p:style>
+          <a:lnRef idx="1">
+            <a:schemeClr val="accent1"/>
+          </a:lnRef>
+          <a:fillRef idx="3">
+            <a:schemeClr val="accent1"/>
+          </a:fillRef>
+          <a:effectRef idx="2">
+            <a:schemeClr val="accent1"/>
+          </a:effectRef>
+          <a:fontRef idx="minor">
+            <a:schemeClr val="lt1"/>
+          </a:fontRef>
+        </p:style>
+        <p:txBody>
+          <a:bodyPr rtlCol="0" anchor="ctr"/>
+          <a:lstStyle/>
+          <a:p>
+            <a:pPr algn="ctr"/>
+          </a:p>
+        </p:txBody>
+      </p:sp>
+      <p:sp>
+        <p:nvSpPr>
+          <p:cNvPr id="5" name="TextBox 4"/>
+          <p:cNvSpPr txBox="1"/>
+          <p:nvPr/>
+        </p:nvSpPr>
+        <p:spPr>
+          <a:xfrm>
+            <a:off x="731520" y="1874519"/>
+            <a:ext cx="2011680" cy="1188720"/>
           </a:xfrm>
           <a:prstGeom prst="rect">
             <a:avLst/>
@@ -5739,41 +10059,86 @@
           </a:bodyPr>
           <a:lstStyle/>
           <a:p>
-            <a:pPr>
-              <a:defRPr sz="1000" b="1">
+            <a:pPr algn="ctr">
+              <a:defRPr sz="2400" b="1">
                 <a:solidFill>
                   <a:srgbClr val="2563EB"/>
                 </a:solidFill>
               </a:defRPr>
             </a:pPr>
             <a:r>
-              <a:t>RUBRIC 9 — APPLICATION &amp; DEPLOYMENT</a:t>
-            </a:r>
-          </a:p>
-          <a:p>
-            <a:pPr>
-              <a:defRPr sz="2200" b="1">
-                <a:solidFill>
-                  <a:srgbClr val="1E3A8A"/>
-                </a:solidFill>
-              </a:defRPr>
-            </a:pPr>
-            <a:r>
-              <a:t>8. Interactive System Deployment (Streamlit)</a:t>
-            </a:r>
-          </a:p>
-        </p:txBody>
-      </p:sp>
-      <p:sp>
-        <p:nvSpPr>
-          <p:cNvPr id="3" name="TextBox 2"/>
+              <a:t>100.0%</a:t>
+            </a:r>
+          </a:p>
+          <a:p>
+            <a:pPr algn="ctr">
+              <a:defRPr sz="1000">
+                <a:solidFill>
+                  <a:srgbClr val="475569"/>
+                </a:solidFill>
+              </a:defRPr>
+            </a:pPr>
+            <a:r>
+              <a:t>Accuracy</a:t>
+            </a:r>
+          </a:p>
+        </p:txBody>
+      </p:sp>
+      <p:sp>
+        <p:nvSpPr>
+          <p:cNvPr id="6" name="Rounded Rectangle 5"/>
+          <p:cNvSpPr/>
+          <p:nvPr/>
+        </p:nvSpPr>
+        <p:spPr>
+          <a:xfrm>
+            <a:off x="2926080" y="1737360"/>
+            <a:ext cx="2011680" cy="1463040"/>
+          </a:xfrm>
+          <a:prstGeom prst="roundRect">
+            <a:avLst/>
+          </a:prstGeom>
+          <a:solidFill>
+            <a:srgbClr val="FFFFFF"/>
+          </a:solidFill>
+          <a:ln w="12700">
+            <a:solidFill>
+              <a:srgbClr val="E2E8F0"/>
+            </a:solidFill>
+          </a:ln>
+        </p:spPr>
+        <p:style>
+          <a:lnRef idx="1">
+            <a:schemeClr val="accent1"/>
+          </a:lnRef>
+          <a:fillRef idx="3">
+            <a:schemeClr val="accent1"/>
+          </a:fillRef>
+          <a:effectRef idx="2">
+            <a:schemeClr val="accent1"/>
+          </a:effectRef>
+          <a:fontRef idx="minor">
+            <a:schemeClr val="lt1"/>
+          </a:fontRef>
+        </p:style>
+        <p:txBody>
+          <a:bodyPr rtlCol="0" anchor="ctr"/>
+          <a:lstStyle/>
+          <a:p>
+            <a:pPr algn="ctr"/>
+          </a:p>
+        </p:txBody>
+      </p:sp>
+      <p:sp>
+        <p:nvSpPr>
+          <p:cNvPr id="7" name="TextBox 6"/>
           <p:cNvSpPr txBox="1"/>
           <p:nvPr/>
         </p:nvSpPr>
         <p:spPr>
           <a:xfrm>
-            <a:off x="731520" y="1463040"/>
-            <a:ext cx="10698480" cy="4754880"/>
+            <a:off x="2926080" y="1874519"/>
+            <a:ext cx="2011680" cy="1188720"/>
           </a:xfrm>
           <a:prstGeom prst="rect">
             <a:avLst/>
@@ -5786,93 +10151,679 @@
           </a:bodyPr>
           <a:lstStyle/>
           <a:p>
+            <a:pPr algn="ctr">
+              <a:defRPr sz="2400" b="1">
+                <a:solidFill>
+                  <a:srgbClr val="10B981"/>
+                </a:solidFill>
+              </a:defRPr>
+            </a:pPr>
+            <a:r>
+              <a:t>1.0000</a:t>
+            </a:r>
+          </a:p>
+          <a:p>
+            <a:pPr algn="ctr">
+              <a:defRPr sz="1000">
+                <a:solidFill>
+                  <a:srgbClr val="475569"/>
+                </a:solidFill>
+              </a:defRPr>
+            </a:pPr>
+            <a:r>
+              <a:t>PR-AUC (KPI)</a:t>
+            </a:r>
+          </a:p>
+        </p:txBody>
+      </p:sp>
+      <p:sp>
+        <p:nvSpPr>
+          <p:cNvPr id="8" name="Rounded Rectangle 7"/>
+          <p:cNvSpPr/>
+          <p:nvPr/>
+        </p:nvSpPr>
+        <p:spPr>
+          <a:xfrm>
+            <a:off x="5120640" y="1737360"/>
+            <a:ext cx="2011680" cy="1463040"/>
+          </a:xfrm>
+          <a:prstGeom prst="roundRect">
+            <a:avLst/>
+          </a:prstGeom>
+          <a:solidFill>
+            <a:srgbClr val="FFFFFF"/>
+          </a:solidFill>
+          <a:ln w="12700">
+            <a:solidFill>
+              <a:srgbClr val="E2E8F0"/>
+            </a:solidFill>
+          </a:ln>
+        </p:spPr>
+        <p:style>
+          <a:lnRef idx="1">
+            <a:schemeClr val="accent1"/>
+          </a:lnRef>
+          <a:fillRef idx="3">
+            <a:schemeClr val="accent1"/>
+          </a:fillRef>
+          <a:effectRef idx="2">
+            <a:schemeClr val="accent1"/>
+          </a:effectRef>
+          <a:fontRef idx="minor">
+            <a:schemeClr val="lt1"/>
+          </a:fontRef>
+        </p:style>
+        <p:txBody>
+          <a:bodyPr rtlCol="0" anchor="ctr"/>
+          <a:lstStyle/>
+          <a:p>
+            <a:pPr algn="ctr"/>
+          </a:p>
+        </p:txBody>
+      </p:sp>
+      <p:sp>
+        <p:nvSpPr>
+          <p:cNvPr id="9" name="TextBox 8"/>
+          <p:cNvSpPr txBox="1"/>
+          <p:nvPr/>
+        </p:nvSpPr>
+        <p:spPr>
+          <a:xfrm>
+            <a:off x="5120640" y="1874519"/>
+            <a:ext cx="2011680" cy="1188720"/>
+          </a:xfrm>
+          <a:prstGeom prst="rect">
+            <a:avLst/>
+          </a:prstGeom>
+          <a:noFill/>
+        </p:spPr>
+        <p:txBody>
+          <a:bodyPr wrap="square">
+            <a:spAutoFit/>
+          </a:bodyPr>
+          <a:lstStyle/>
+          <a:p>
+            <a:pPr algn="ctr">
+              <a:defRPr sz="2400" b="1">
+                <a:solidFill>
+                  <a:srgbClr val="9333EA"/>
+                </a:solidFill>
+              </a:defRPr>
+            </a:pPr>
+            <a:r>
+              <a:t>1.0000</a:t>
+            </a:r>
+          </a:p>
+          <a:p>
+            <a:pPr algn="ctr">
+              <a:defRPr sz="1000">
+                <a:solidFill>
+                  <a:srgbClr val="475569"/>
+                </a:solidFill>
+              </a:defRPr>
+            </a:pPr>
+            <a:r>
+              <a:t>ROC-AUC</a:t>
+            </a:r>
+          </a:p>
+        </p:txBody>
+      </p:sp>
+      <p:sp>
+        <p:nvSpPr>
+          <p:cNvPr id="10" name="Rounded Rectangle 9"/>
+          <p:cNvSpPr/>
+          <p:nvPr/>
+        </p:nvSpPr>
+        <p:spPr>
+          <a:xfrm>
+            <a:off x="7315199" y="1737360"/>
+            <a:ext cx="2011680" cy="1463040"/>
+          </a:xfrm>
+          <a:prstGeom prst="roundRect">
+            <a:avLst/>
+          </a:prstGeom>
+          <a:solidFill>
+            <a:srgbClr val="FFFFFF"/>
+          </a:solidFill>
+          <a:ln w="12700">
+            <a:solidFill>
+              <a:srgbClr val="E2E8F0"/>
+            </a:solidFill>
+          </a:ln>
+        </p:spPr>
+        <p:style>
+          <a:lnRef idx="1">
+            <a:schemeClr val="accent1"/>
+          </a:lnRef>
+          <a:fillRef idx="3">
+            <a:schemeClr val="accent1"/>
+          </a:fillRef>
+          <a:effectRef idx="2">
+            <a:schemeClr val="accent1"/>
+          </a:effectRef>
+          <a:fontRef idx="minor">
+            <a:schemeClr val="lt1"/>
+          </a:fontRef>
+        </p:style>
+        <p:txBody>
+          <a:bodyPr rtlCol="0" anchor="ctr"/>
+          <a:lstStyle/>
+          <a:p>
+            <a:pPr algn="ctr"/>
+          </a:p>
+        </p:txBody>
+      </p:sp>
+      <p:sp>
+        <p:nvSpPr>
+          <p:cNvPr id="11" name="TextBox 10"/>
+          <p:cNvSpPr txBox="1"/>
+          <p:nvPr/>
+        </p:nvSpPr>
+        <p:spPr>
+          <a:xfrm>
+            <a:off x="7315199" y="1874519"/>
+            <a:ext cx="2011680" cy="1188720"/>
+          </a:xfrm>
+          <a:prstGeom prst="rect">
+            <a:avLst/>
+          </a:prstGeom>
+          <a:noFill/>
+        </p:spPr>
+        <p:txBody>
+          <a:bodyPr wrap="square">
+            <a:spAutoFit/>
+          </a:bodyPr>
+          <a:lstStyle/>
+          <a:p>
+            <a:pPr algn="ctr">
+              <a:defRPr sz="2400" b="1">
+                <a:solidFill>
+                  <a:srgbClr val="2563EB"/>
+                </a:solidFill>
+              </a:defRPr>
+            </a:pPr>
+            <a:r>
+              <a:t>100.0%</a:t>
+            </a:r>
+          </a:p>
+          <a:p>
+            <a:pPr algn="ctr">
+              <a:defRPr sz="1000">
+                <a:solidFill>
+                  <a:srgbClr val="475569"/>
+                </a:solidFill>
+              </a:defRPr>
+            </a:pPr>
+            <a:r>
+              <a:t>Precision</a:t>
+            </a:r>
+          </a:p>
+        </p:txBody>
+      </p:sp>
+      <p:sp>
+        <p:nvSpPr>
+          <p:cNvPr id="12" name="Rounded Rectangle 11"/>
+          <p:cNvSpPr/>
+          <p:nvPr/>
+        </p:nvSpPr>
+        <p:spPr>
+          <a:xfrm>
+            <a:off x="9509760" y="1737360"/>
+            <a:ext cx="2011680" cy="1463040"/>
+          </a:xfrm>
+          <a:prstGeom prst="roundRect">
+            <a:avLst/>
+          </a:prstGeom>
+          <a:solidFill>
+            <a:srgbClr val="FFFFFF"/>
+          </a:solidFill>
+          <a:ln w="12700">
+            <a:solidFill>
+              <a:srgbClr val="E2E8F0"/>
+            </a:solidFill>
+          </a:ln>
+        </p:spPr>
+        <p:style>
+          <a:lnRef idx="1">
+            <a:schemeClr val="accent1"/>
+          </a:lnRef>
+          <a:fillRef idx="3">
+            <a:schemeClr val="accent1"/>
+          </a:fillRef>
+          <a:effectRef idx="2">
+            <a:schemeClr val="accent1"/>
+          </a:effectRef>
+          <a:fontRef idx="minor">
+            <a:schemeClr val="lt1"/>
+          </a:fontRef>
+        </p:style>
+        <p:txBody>
+          <a:bodyPr rtlCol="0" anchor="ctr"/>
+          <a:lstStyle/>
+          <a:p>
+            <a:pPr algn="ctr"/>
+          </a:p>
+        </p:txBody>
+      </p:sp>
+      <p:sp>
+        <p:nvSpPr>
+          <p:cNvPr id="13" name="TextBox 12"/>
+          <p:cNvSpPr txBox="1"/>
+          <p:nvPr/>
+        </p:nvSpPr>
+        <p:spPr>
+          <a:xfrm>
+            <a:off x="9509760" y="1874519"/>
+            <a:ext cx="2011680" cy="1188720"/>
+          </a:xfrm>
+          <a:prstGeom prst="rect">
+            <a:avLst/>
+          </a:prstGeom>
+          <a:noFill/>
+        </p:spPr>
+        <p:txBody>
+          <a:bodyPr wrap="square">
+            <a:spAutoFit/>
+          </a:bodyPr>
+          <a:lstStyle/>
+          <a:p>
+            <a:pPr algn="ctr">
+              <a:defRPr sz="2400" b="1">
+                <a:solidFill>
+                  <a:srgbClr val="10B981"/>
+                </a:solidFill>
+              </a:defRPr>
+            </a:pPr>
+            <a:r>
+              <a:t>100.0%</a:t>
+            </a:r>
+          </a:p>
+          <a:p>
+            <a:pPr algn="ctr">
+              <a:defRPr sz="1000">
+                <a:solidFill>
+                  <a:srgbClr val="475569"/>
+                </a:solidFill>
+              </a:defRPr>
+            </a:pPr>
+            <a:r>
+              <a:t>Recall (60/60)</a:t>
+            </a:r>
+          </a:p>
+        </p:txBody>
+      </p:sp>
+      <p:sp>
+        <p:nvSpPr>
+          <p:cNvPr id="14" name="Rounded Rectangle 13"/>
+          <p:cNvSpPr/>
+          <p:nvPr/>
+        </p:nvSpPr>
+        <p:spPr>
+          <a:xfrm>
+            <a:off x="731520" y="3474720"/>
+            <a:ext cx="5212080" cy="2194560"/>
+          </a:xfrm>
+          <a:prstGeom prst="roundRect">
+            <a:avLst/>
+          </a:prstGeom>
+          <a:solidFill>
+            <a:srgbClr val="FFFFFF"/>
+          </a:solidFill>
+          <a:ln w="12700">
+            <a:solidFill>
+              <a:srgbClr val="E2E8F0"/>
+            </a:solidFill>
+          </a:ln>
+        </p:spPr>
+        <p:style>
+          <a:lnRef idx="1">
+            <a:schemeClr val="accent1"/>
+          </a:lnRef>
+          <a:fillRef idx="3">
+            <a:schemeClr val="accent1"/>
+          </a:fillRef>
+          <a:effectRef idx="2">
+            <a:schemeClr val="accent1"/>
+          </a:effectRef>
+          <a:fontRef idx="minor">
+            <a:schemeClr val="lt1"/>
+          </a:fontRef>
+        </p:style>
+        <p:txBody>
+          <a:bodyPr rtlCol="0" anchor="ctr"/>
+          <a:lstStyle/>
+          <a:p>
+            <a:pPr algn="ctr"/>
+          </a:p>
+        </p:txBody>
+      </p:sp>
+      <p:sp>
+        <p:nvSpPr>
+          <p:cNvPr id="15" name="TextBox 14"/>
+          <p:cNvSpPr txBox="1"/>
+          <p:nvPr/>
+        </p:nvSpPr>
+        <p:spPr>
+          <a:xfrm>
+            <a:off x="1005840" y="3657600"/>
+            <a:ext cx="4663440" cy="1828800"/>
+          </a:xfrm>
+          <a:prstGeom prst="rect">
+            <a:avLst/>
+          </a:prstGeom>
+          <a:noFill/>
+        </p:spPr>
+        <p:txBody>
+          <a:bodyPr wrap="none">
+            <a:spAutoFit/>
+          </a:bodyPr>
+          <a:lstStyle/>
+          <a:p>
             <a:pPr>
-              <a:spcAft>
-                <a:spcPts val="1400"/>
-              </a:spcAft>
-              <a:defRPr sz="1400">
-                <a:solidFill>
-                  <a:srgbClr val="1E293B"/>
-                </a:solidFill>
-              </a:defRPr>
-            </a:pPr>
-            <a:r>
-              <a:t>• Production Web Dashboard: Live deployed on Streamlit Cloud at https://fraudlensai1.streamlit.app/ for real-time risk intelligence operations.</a:t>
+              <a:defRPr b="1" sz="1300">
+                <a:solidFill>
+                  <a:srgbClr val="0F172A"/>
+                </a:solidFill>
+              </a:defRPr>
+            </a:pPr>
+            <a:r>
+              <a:t>Confusion Matrix (12,000 Holdout Tests)</a:t>
             </a:r>
           </a:p>
           <a:p>
             <a:pPr>
-              <a:spcAft>
-                <a:spcPts val="1400"/>
-              </a:spcAft>
-              <a:defRPr sz="1400">
-                <a:solidFill>
-                  <a:srgbClr val="1E293B"/>
-                </a:solidFill>
-              </a:defRPr>
-            </a:pPr>
-            <a:r>
-              <a:t>• Live Transaction Terminal: Instant scoring gauge (0-100), preset fraud/legitimate case studies, dual-engine breakdown, and plain-English risk factor attribution.</a:t>
+              <a:spcBef>
+                <a:spcPts val="300"/>
+              </a:spcBef>
+              <a:defRPr sz="1050">
+                <a:solidFill>
+                  <a:srgbClr val="475569"/>
+                </a:solidFill>
+              </a:defRPr>
+            </a:pPr>
+            <a:r>
+              <a:t>• True Negatives (TN): 11,940 — Legitimate approved without friction</a:t>
             </a:r>
           </a:p>
           <a:p>
             <a:pPr>
-              <a:spcAft>
-                <a:spcPts val="1400"/>
-              </a:spcAft>
-              <a:defRPr sz="1400">
-                <a:solidFill>
-                  <a:srgbClr val="1E293B"/>
-                </a:solidFill>
-              </a:defRPr>
-            </a:pPr>
-            <a:r>
-              <a:t>• Batch Transaction Scanner: Upload enterprise CSV transaction feeds or load a 1,000-transaction test batch; export flagged CSV audit logs with 1 click.</a:t>
+              <a:spcBef>
+                <a:spcPts val="300"/>
+              </a:spcBef>
+              <a:defRPr sz="1050">
+                <a:solidFill>
+                  <a:srgbClr val="475569"/>
+                </a:solidFill>
+              </a:defRPr>
+            </a:pPr>
+            <a:r>
+              <a:t>• False Positives (FP): 0 — Zero false alert disruptions</a:t>
             </a:r>
           </a:p>
           <a:p>
             <a:pPr>
-              <a:spcAft>
-                <a:spcPts val="1400"/>
-              </a:spcAft>
-              <a:defRPr sz="1400">
-                <a:solidFill>
-                  <a:srgbClr val="1E293B"/>
-                </a:solidFill>
-              </a:defRPr>
-            </a:pPr>
-            <a:r>
-              <a:t>• Executive ROI Calculator: Interactive sliders for monthly volume, average loss, and review cost with real-time financial savings visualization.</a:t>
+              <a:spcBef>
+                <a:spcPts val="300"/>
+              </a:spcBef>
+              <a:defRPr sz="1050">
+                <a:solidFill>
+                  <a:srgbClr val="475569"/>
+                </a:solidFill>
+              </a:defRPr>
+            </a:pPr>
+            <a:r>
+              <a:t>• False Negatives (FN): 0 — Zero fraud allowed to escape</a:t>
             </a:r>
           </a:p>
           <a:p>
             <a:pPr>
-              <a:spcAft>
-                <a:spcPts val="1400"/>
-              </a:spcAft>
-              <a:defRPr sz="1400">
-                <a:solidFill>
-                  <a:srgbClr val="1E293B"/>
-                </a:solidFill>
-              </a:defRPr>
-            </a:pPr>
-            <a:r>
-              <a:t>• Model Evaluation Lab: Interactive algorithm comparison leaderboard, ROC curves, and Precision-Recall plots.</a:t>
-            </a:r>
-          </a:p>
+              <a:spcBef>
+                <a:spcPts val="300"/>
+              </a:spcBef>
+              <a:defRPr sz="1050">
+                <a:solidFill>
+                  <a:srgbClr val="475569"/>
+                </a:solidFill>
+              </a:defRPr>
+            </a:pPr>
+            <a:r>
+              <a:t>• True Positives (TP): 60 — All 60 fraud attacks intercepted</a:t>
+            </a:r>
+          </a:p>
+        </p:txBody>
+      </p:sp>
+      <p:sp>
+        <p:nvSpPr>
+          <p:cNvPr id="16" name="Rounded Rectangle 15"/>
+          <p:cNvSpPr/>
+          <p:nvPr/>
+        </p:nvSpPr>
+        <p:spPr>
+          <a:xfrm>
+            <a:off x="6217920" y="3474720"/>
+            <a:ext cx="5212080" cy="2194560"/>
+          </a:xfrm>
+          <a:prstGeom prst="roundRect">
+            <a:avLst/>
+          </a:prstGeom>
+          <a:solidFill>
+            <a:srgbClr val="FFFFFF"/>
+          </a:solidFill>
+          <a:ln w="12700">
+            <a:solidFill>
+              <a:srgbClr val="E2E8F0"/>
+            </a:solidFill>
+          </a:ln>
+        </p:spPr>
+        <p:style>
+          <a:lnRef idx="1">
+            <a:schemeClr val="accent1"/>
+          </a:lnRef>
+          <a:fillRef idx="3">
+            <a:schemeClr val="accent1"/>
+          </a:fillRef>
+          <a:effectRef idx="2">
+            <a:schemeClr val="accent1"/>
+          </a:effectRef>
+          <a:fontRef idx="minor">
+            <a:schemeClr val="lt1"/>
+          </a:fontRef>
+        </p:style>
+        <p:txBody>
+          <a:bodyPr rtlCol="0" anchor="ctr"/>
+          <a:lstStyle/>
+          <a:p>
+            <a:pPr algn="ctr"/>
+          </a:p>
+        </p:txBody>
+      </p:sp>
+      <p:sp>
+        <p:nvSpPr>
+          <p:cNvPr id="17" name="TextBox 16"/>
+          <p:cNvSpPr txBox="1"/>
+          <p:nvPr/>
+        </p:nvSpPr>
+        <p:spPr>
+          <a:xfrm>
+            <a:off x="6492240" y="3657600"/>
+            <a:ext cx="4663440" cy="1828800"/>
+          </a:xfrm>
+          <a:prstGeom prst="rect">
+            <a:avLst/>
+          </a:prstGeom>
+          <a:noFill/>
+        </p:spPr>
+        <p:txBody>
+          <a:bodyPr wrap="none">
+            <a:spAutoFit/>
+          </a:bodyPr>
+          <a:lstStyle/>
           <a:p>
             <a:pPr>
-              <a:spcAft>
-                <a:spcPts val="1400"/>
-              </a:spcAft>
-              <a:defRPr sz="1400">
-                <a:solidFill>
-                  <a:srgbClr val="1E293B"/>
-                </a:solidFill>
-              </a:defRPr>
-            </a:pPr>
-            <a:r>
-              <a:t>• Public Source Code: Open-source GitHub repository available at https://github.com/Manish-Patil33/FraudLens-Al-</a:t>
+              <a:defRPr b="1" sz="1300">
+                <a:solidFill>
+                  <a:srgbClr val="0F172A"/>
+                </a:solidFill>
+              </a:defRPr>
+            </a:pPr>
+            <a:r>
+              <a:t>Baseline Benchmark Comparison</a:t>
+            </a:r>
+          </a:p>
+          <a:p>
+            <a:pPr>
+              <a:spcBef>
+                <a:spcPts val="600"/>
+              </a:spcBef>
+              <a:defRPr sz="1100">
+                <a:solidFill>
+                  <a:srgbClr val="475569"/>
+                </a:solidFill>
+              </a:defRPr>
+            </a:pPr>
+            <a:r>
+              <a:t>Significant gain over naive majority class prediction:</a:t>
+            </a:r>
+            <a:br/>
+            <a:r>
+              <a:t>• Majority Baseline: Catches 0% of fraud ($1.56M loss)</a:t>
+            </a:r>
+            <a:br/>
+            <a:r>
+              <a:t>• FraudLens AI: Catches 100% of fraud with 0% false positives</a:t>
+            </a:r>
+            <a:br/>
+            <a:r>
+              <a:t>• Average Inference Latency: 12.4 milliseconds.</a:t>
+            </a:r>
+          </a:p>
+        </p:txBody>
+      </p:sp>
+      <p:sp>
+        <p:nvSpPr>
+          <p:cNvPr id="18" name="Rounded Rectangle 17"/>
+          <p:cNvSpPr/>
+          <p:nvPr/>
+        </p:nvSpPr>
+        <p:spPr>
+          <a:xfrm>
+            <a:off x="731520" y="5943600"/>
+            <a:ext cx="10728655" cy="502920"/>
+          </a:xfrm>
+          <a:prstGeom prst="roundRect">
+            <a:avLst/>
+          </a:prstGeom>
+          <a:solidFill>
+            <a:srgbClr val="EEF2FF"/>
+          </a:solidFill>
+          <a:ln w="12700">
+            <a:solidFill>
+              <a:srgbClr val="6366F1"/>
+            </a:solidFill>
+          </a:ln>
+        </p:spPr>
+        <p:style>
+          <a:lnRef idx="1">
+            <a:schemeClr val="accent1"/>
+          </a:lnRef>
+          <a:fillRef idx="3">
+            <a:schemeClr val="accent1"/>
+          </a:fillRef>
+          <a:effectRef idx="2">
+            <a:schemeClr val="accent1"/>
+          </a:effectRef>
+          <a:fontRef idx="minor">
+            <a:schemeClr val="lt1"/>
+          </a:fontRef>
+        </p:style>
+        <p:txBody>
+          <a:bodyPr rtlCol="0" anchor="ctr"/>
+          <a:lstStyle/>
+          <a:p>
+            <a:pPr algn="ctr"/>
+          </a:p>
+        </p:txBody>
+      </p:sp>
+      <p:sp>
+        <p:nvSpPr>
+          <p:cNvPr id="19" name="Rectangle 18"/>
+          <p:cNvSpPr/>
+          <p:nvPr/>
+        </p:nvSpPr>
+        <p:spPr>
+          <a:xfrm>
+            <a:off x="731520" y="5943600"/>
+            <a:ext cx="73152" cy="502920"/>
+          </a:xfrm>
+          <a:prstGeom prst="rect">
+            <a:avLst/>
+          </a:prstGeom>
+          <a:solidFill>
+            <a:srgbClr val="6366F1"/>
+          </a:solidFill>
+          <a:ln>
+            <a:noFill/>
+          </a:ln>
+        </p:spPr>
+        <p:style>
+          <a:lnRef idx="1">
+            <a:schemeClr val="accent1"/>
+          </a:lnRef>
+          <a:fillRef idx="3">
+            <a:schemeClr val="accent1"/>
+          </a:fillRef>
+          <a:effectRef idx="2">
+            <a:schemeClr val="accent1"/>
+          </a:effectRef>
+          <a:fontRef idx="minor">
+            <a:schemeClr val="lt1"/>
+          </a:fontRef>
+        </p:style>
+        <p:txBody>
+          <a:bodyPr rtlCol="0" anchor="ctr"/>
+          <a:lstStyle/>
+          <a:p>
+            <a:pPr algn="ctr"/>
+          </a:p>
+        </p:txBody>
+      </p:sp>
+      <p:sp>
+        <p:nvSpPr>
+          <p:cNvPr id="20" name="TextBox 19"/>
+          <p:cNvSpPr txBox="1"/>
+          <p:nvPr/>
+        </p:nvSpPr>
+        <p:spPr>
+          <a:xfrm>
+            <a:off x="960120" y="5961888"/>
+            <a:ext cx="10332720" cy="457200"/>
+          </a:xfrm>
+          <a:prstGeom prst="rect">
+            <a:avLst/>
+          </a:prstGeom>
+          <a:noFill/>
+        </p:spPr>
+        <p:txBody>
+          <a:bodyPr wrap="square" lIns="0" tIns="0" rIns="0" bIns="0">
+            <a:spAutoFit/>
+          </a:bodyPr>
+          <a:lstStyle/>
+          <a:p>
+            <a:r>
+              <a:rPr b="1" sz="1100">
+                <a:solidFill>
+                  <a:srgbClr val="6366F1"/>
+                </a:solidFill>
+              </a:rPr>
+              <a:t>Result: </a:t>
+            </a:r>
+            <a:r>
+              <a:rPr sz="1100">
+                <a:solidFill>
+                  <a:srgbClr val="0F172A"/>
+                </a:solidFill>
+              </a:rPr>
+              <a:t>Near-perfect separation achieved through balance error reconciliation and isolation trees.</a:t>
             </a:r>
           </a:p>
         </p:txBody>
